--- a/Clase_12/PPT/Clase12_Regresion_Logistica.pptx
+++ b/Clase_12/PPT/Clase12_Regresion_Logistica.pptx
@@ -4,6 +4,9 @@
   <p:sldMasterIdLst>
     <p:sldMasterId id="2147483648" r:id="rId1"/>
   </p:sldMasterIdLst>
+  <p:notesMasterIdLst>
+    <p:notesMasterId r:id="rId18"/>
+  </p:notesMasterIdLst>
   <p:sldIdLst>
     <p:sldId id="256" r:id="rId2"/>
     <p:sldId id="257" r:id="rId3"/>
@@ -22,9 +25,6 @@
     <p:sldId id="270" r:id="rId16"/>
     <p:sldId id="271" r:id="rId17"/>
   </p:sldIdLst>
-  <p:notesMasterIdLst>
-    <p:notesMasterId r:id="rId18"/>
-  </p:notesMasterIdLst>
   <p:sldSz cx="12192000" cy="6858000"/>
   <p:notesSz cx="6858000" cy="12192000"/>
   <p:defaultTextStyle>
@@ -119,6 +119,11 @@
       </a:defRPr>
     </a:lvl9pPr>
   </p:defaultTextStyle>
+  <p:extLst>
+    <p:ext uri="{EFAFB233-063F-42B5-8137-9DF3F51BA10A}">
+      <p15:sldGuideLst xmlns:p15="http://schemas.microsoft.com/office/powerpoint/2012/main"/>
+    </p:ext>
+  </p:extLst>
 </p:presentation>
 </file>
 
@@ -144,234 +149,10 @@
           <a:chExt cx="0" cy="0"/>
         </a:xfrm>
       </p:grpSpPr>
-      <p:sp>
-        <p:nvSpPr>
-          <p:cNvPr id="2" name="Header Placeholder 1"/>
-          <p:cNvSpPr>
-            <a:spLocks noGrp="1"/>
-          </p:cNvSpPr>
-          <p:nvPr>
-            <p:ph type="hdr" sz="quarter"/>
-          </p:nvPr>
-        </p:nvSpPr>
-        <p:spPr>
-          <a:xfrm>
-            <a:off x="0" y="0"/>
-            <a:ext cx="2971800" cy="458788"/>
-          </a:xfrm>
-          <a:prstGeom prst="rect">
-            <a:avLst/>
-          </a:prstGeom>
-        </p:spPr>
-        <p:txBody>
-          <a:bodyPr vert="horz" lIns="91440" tIns="45720" rIns="91440" bIns="45720" rtlCol="0"/>
-          <a:lstStyle>
-            <a:lvl1pPr algn="l">
-              <a:defRPr sz="1200"/>
-            </a:lvl1pPr>
-          </a:lstStyle>
-          <a:p>
-            <a:endParaRPr lang="en-US"/>
-          </a:p>
-        </p:txBody>
-      </p:sp>
-      <p:sp>
-        <p:nvSpPr>
-          <p:cNvPr id="3" name="Date Placeholder 2"/>
-          <p:cNvSpPr>
-            <a:spLocks noGrp="1"/>
-          </p:cNvSpPr>
-          <p:nvPr>
-            <p:ph type="dt" idx="1"/>
-          </p:nvPr>
-        </p:nvSpPr>
-        <p:spPr>
-          <a:xfrm>
-            <a:off x="3884613" y="0"/>
-            <a:ext cx="2971800" cy="458788"/>
-          </a:xfrm>
-          <a:prstGeom prst="rect">
-            <a:avLst/>
-          </a:prstGeom>
-        </p:spPr>
-        <p:txBody>
-          <a:bodyPr vert="horz" lIns="91440" tIns="45720" rIns="91440" bIns="45720" rtlCol="0"/>
-          <a:lstStyle>
-            <a:lvl1pPr algn="r">
-              <a:defRPr sz="1200"/>
-            </a:lvl1pPr>
-          </a:lstStyle>
-          <a:p>
-            <a:fld id="{5282F153-3F37-0F45-9E97-73ACFA13230C}" type="datetimeFigureOut">
-              <a:rPr lang="en-US"/>
-              <a:t>7/23/19</a:t>
-            </a:fld>
-            <a:endParaRPr lang="en-US"/>
-          </a:p>
-        </p:txBody>
-      </p:sp>
-      <p:sp>
-        <p:nvSpPr>
-          <p:cNvPr id="4" name="Slide Image Placeholder 3"/>
-          <p:cNvSpPr>
-            <a:spLocks noGrp="1" noRot="1" noChangeAspect="1"/>
-          </p:cNvSpPr>
-          <p:nvPr>
-            <p:ph type="sldImg" idx="2"/>
-          </p:nvPr>
-        </p:nvSpPr>
-        <p:spPr>
-          <a:xfrm>
-            <a:off x="685800" y="1143000"/>
-            <a:ext cx="5486400" cy="3086100"/>
-          </a:xfrm>
-          <a:prstGeom prst="rect">
-            <a:avLst/>
-          </a:prstGeom>
-          <a:noFill/>
-          <a:ln w="12700">
-            <a:solidFill>
-              <a:prstClr val="black"/>
-            </a:solidFill>
-          </a:ln>
-        </p:spPr>
-        <p:txBody>
-          <a:bodyPr vert="horz" lIns="91440" tIns="45720" rIns="91440" bIns="45720" rtlCol="0" anchor="ctr"/>
-          <a:lstStyle/>
-          <a:p>
-            <a:endParaRPr lang="en-US"/>
-          </a:p>
-        </p:txBody>
-      </p:sp>
-      <p:sp>
-        <p:nvSpPr>
-          <p:cNvPr id="5" name="Notes Placeholder 4"/>
-          <p:cNvSpPr>
-            <a:spLocks noGrp="1"/>
-          </p:cNvSpPr>
-          <p:nvPr>
-            <p:ph type="body" sz="quarter" idx="3"/>
-          </p:nvPr>
-        </p:nvSpPr>
-        <p:spPr>
-          <a:xfrm>
-            <a:off x="685800" y="4400550"/>
-            <a:ext cx="5486400" cy="3600450"/>
-          </a:xfrm>
-          <a:prstGeom prst="rect">
-            <a:avLst/>
-          </a:prstGeom>
-        </p:spPr>
-        <p:txBody>
-          <a:bodyPr vert="horz" lIns="91440" tIns="45720" rIns="91440" bIns="45720" rtlCol="0"/>
-          <a:lstStyle/>
-          <a:p>
-            <a:pPr lvl="0"/>
-            <a:r>
-              <a:rPr lang="en-US"/>
-              <a:t>Click to edit Master text styles</a:t>
-            </a:r>
-          </a:p>
-          <a:p>
-            <a:pPr lvl="1"/>
-            <a:r>
-              <a:rPr lang="en-US"/>
-              <a:t>Second level</a:t>
-            </a:r>
-          </a:p>
-          <a:p>
-            <a:pPr lvl="2"/>
-            <a:r>
-              <a:rPr lang="en-US"/>
-              <a:t>Third level</a:t>
-            </a:r>
-          </a:p>
-          <a:p>
-            <a:pPr lvl="3"/>
-            <a:r>
-              <a:rPr lang="en-US"/>
-              <a:t>Fourth level</a:t>
-            </a:r>
-          </a:p>
-          <a:p>
-            <a:pPr lvl="4"/>
-            <a:r>
-              <a:rPr lang="en-US"/>
-              <a:t>Fifth level</a:t>
-            </a:r>
-          </a:p>
-        </p:txBody>
-      </p:sp>
-      <p:sp>
-        <p:nvSpPr>
-          <p:cNvPr id="6" name="Footer Placeholder 5"/>
-          <p:cNvSpPr>
-            <a:spLocks noGrp="1"/>
-          </p:cNvSpPr>
-          <p:nvPr>
-            <p:ph type="ftr" sz="quarter" idx="4"/>
-          </p:nvPr>
-        </p:nvSpPr>
-        <p:spPr>
-          <a:xfrm>
-            <a:off x="0" y="8685213"/>
-            <a:ext cx="2971800" cy="458787"/>
-          </a:xfrm>
-          <a:prstGeom prst="rect">
-            <a:avLst/>
-          </a:prstGeom>
-        </p:spPr>
-        <p:txBody>
-          <a:bodyPr vert="horz" lIns="91440" tIns="45720" rIns="91440" bIns="45720" rtlCol="0" anchor="b"/>
-          <a:lstStyle>
-            <a:lvl1pPr algn="l">
-              <a:defRPr sz="1200"/>
-            </a:lvl1pPr>
-          </a:lstStyle>
-          <a:p>
-            <a:endParaRPr lang="en-US"/>
-          </a:p>
-        </p:txBody>
-      </p:sp>
-      <p:sp>
-        <p:nvSpPr>
-          <p:cNvPr id="7" name="Slide Number Placeholder 6"/>
-          <p:cNvSpPr>
-            <a:spLocks noGrp="1"/>
-          </p:cNvSpPr>
-          <p:nvPr>
-            <p:ph type="sldNum" sz="quarter" idx="5"/>
-          </p:nvPr>
-        </p:nvSpPr>
-        <p:spPr>
-          <a:xfrm>
-            <a:off x="3884613" y="8685213"/>
-            <a:ext cx="2971800" cy="458787"/>
-          </a:xfrm>
-          <a:prstGeom prst="rect">
-            <a:avLst/>
-          </a:prstGeom>
-        </p:spPr>
-        <p:txBody>
-          <a:bodyPr vert="horz" lIns="91440" tIns="45720" rIns="91440" bIns="45720" rtlCol="0" anchor="b"/>
-          <a:lstStyle>
-            <a:lvl1pPr algn="r">
-              <a:defRPr sz="1200"/>
-            </a:lvl1pPr>
-          </a:lstStyle>
-          <a:p>
-            <a:fld id="{CE5E9CC1-C706-0F49-92D6-E571CC5EEA8F}" type="slidenum">
-              <a:rPr lang="en-US"/>
-              <a:t>‹#›</a:t>
-            </a:fld>
-            <a:endParaRPr lang="en-US"/>
-          </a:p>
-        </p:txBody>
-      </p:sp>
     </p:spTree>
     <p:extLst>
       <p:ext uri="{BB962C8B-B14F-4D97-AF65-F5344CB8AC3E}">
-        <p14:creationId xmlns:p14="http://schemas.microsoft.com/office/powerpoint/2010/main" val="1024086991"/>
+        <p14:creationId xmlns:p14="http://schemas.microsoft.com/office/powerpoint/2010/main" val="723388369"/>
       </p:ext>
     </p:extLst>
   </p:cSld>
@@ -519,7 +300,6 @@
               <a:rPr lang="en-US" dirty="0"/>
               <a:t>Arranca con la conexión: 'la clase pasada predijimos cuántos días. Hoy predecimos sí o no: ¿entra en mora? ¿es fraude? ¿sobrevivió?'. Y menciona de entrada que este es el modelo de los scorecards, porque engancha a cualquiera que trabaje en riesgo. Avisa también de que los datos de hoy son los del proyecto final, así que conviene conocerlos bien.</a:t>
             </a:r>
-            <a:endParaRPr lang="en-US" dirty="0"/>
           </a:p>
         </p:txBody>
       </p:sp>
@@ -607,7 +387,6 @@
               <a:rPr lang="en-US" dirty="0"/>
               <a:t>Recorre las dos últimas columnas con el puntero, de arriba abajo: una baja, la otra sube. Siempre. Y después la pregunta que abre el debate: '¿cuál elegirían ustedes?'. La respuesta correcta es 'depende', y la slide siguiente lo aterriza con dos escenarios de su trabajo.</a:t>
             </a:r>
-            <a:endParaRPr lang="en-US" dirty="0"/>
           </a:p>
         </p:txBody>
       </p:sp>
@@ -695,7 +474,6 @@
               <a:rPr lang="en-US" dirty="0"/>
               <a:t>Esta slide es la que más conecta con su trabajo. Pregunta si alguien tiene un umbral en producción y si sabe quién lo eligió y con qué criterio. Casi siempre la respuesta es que se heredó, igual que las pruebas de la Clase 6. La frase final es la que quiero que se lleven: el analista aporta la curva, el negocio elige el punto. Eso también protege al analista: la elección del umbral no debería ser suya en solitario.</a:t>
             </a:r>
-            <a:endParaRPr lang="en-US" dirty="0"/>
           </a:p>
         </p:txBody>
       </p:sp>
@@ -783,7 +561,6 @@
               <a:rPr lang="en-US" dirty="0"/>
               <a:t>Lo más valioso del AUC es su interpretación probabilística, que casi nadie conoce: es la probabilidad de que el modelo ordene correctamente a un par al azar. Y la ventaja práctica: NO depende del umbral, así que sirve para comparar modelos entre sí. Sobre el '&gt; 0.9 sospechoso': con datos reales de riesgo, un AUC de 0.95 casi siempre significa que se coló una variable que no debería estar, algo que ya contiene la respuesta.</a:t>
             </a:r>
-            <a:endParaRPr lang="en-US" dirty="0"/>
           </a:p>
         </p:txBody>
       </p:sp>
@@ -871,7 +648,6 @@
               <a:rPr lang="en-US" dirty="0"/>
               <a:t>El primero merece énfasis extra con un ejemplo de su mundo: en detección de fraude el desbalance es de 1 a 50 o peor, así que la exactitud es una métrica engañosa por construcción. Por eso en fraude se reportan recall y precisión, no exactitud.</a:t>
             </a:r>
-            <a:endParaRPr lang="en-US" dirty="0"/>
           </a:p>
         </p:txBody>
       </p:sp>
@@ -959,7 +735,6 @@
               <a:rPr lang="en-US" dirty="0"/>
               <a:t>El paso 3 es el que más se salta: mucha gente usa predict() directamente y se pierde el control del umbral. predict() es equivalente a predict_proba con umbral 0.5, y eso hay que saberlo. El paso 6 va en magenta porque es el único que no es técnico.</a:t>
             </a:r>
-            <a:endParaRPr lang="en-US" dirty="0"/>
           </a:p>
         </p:txBody>
       </p:sp>
@@ -1047,7 +822,6 @@
               <a:rPr lang="en-US" dirty="0"/>
               <a:t>El apéndice de iris es opcional y se puede dejar como tarea: son 5 minutos y muestra que la logística también hace multiclase. Recorre el aula durante el bloque 2: las odds son lo que más cuesta, y el paso de coeficiente a odds ratio con exp() se olvida.</a:t>
             </a:r>
-            <a:endParaRPr lang="en-US" dirty="0"/>
           </a:p>
         </p:txBody>
       </p:sp>
@@ -1135,7 +909,6 @@
               <a:rPr lang="en-US" dirty="0"/>
               <a:t>Lee los números del día y después presenta el proyecto final con detalle: es el momento de explicarlo, porque acaban de trabajar con esos datos y saben exactamente qué se les pide. El punto de los 177 faltantes es el que más discusión genera: hoy usamos la mediana por simplicidad y en el proyecto tienen que pensar si eso es aceptable.</a:t>
             </a:r>
-            <a:endParaRPr lang="en-US" dirty="0"/>
           </a:p>
         </p:txBody>
       </p:sp>
@@ -1223,7 +996,6 @@
               <a:rPr lang="en-US" dirty="0"/>
               <a:t>La tabla se lee de arriba abajo en un minuto. La fila que hay que subrayar es la última: en la regresión lineal no había nada que decidir; aquí sí, y esa decisión es de negocio. Es el bloque 4 y el más importante de la sesión.</a:t>
             </a:r>
-            <a:endParaRPr lang="en-US" dirty="0"/>
           </a:p>
         </p:txBody>
       </p:sp>
@@ -1311,7 +1083,6 @@
               <a:rPr lang="en-US" dirty="0"/>
               <a:t>Si vas retrasado, el bloque 5 (ROC) se puede comprimir a tres minutos: basta con el número del AUC y su interpretación. El bloque 4 no se toca.</a:t>
             </a:r>
-            <a:endParaRPr lang="en-US" dirty="0"/>
           </a:p>
         </p:txBody>
       </p:sp>
@@ -1399,7 +1170,6 @@
               <a:rPr lang="en-US" dirty="0"/>
               <a:t>Las tasas crudas son el ancla de toda la clase: 74 contra 19 es una diferencia enorme y se ve sin estadística. Pregunta al grupo por qué creen que pasó eso: sale solo lo de 'mujeres y niños primero', y sirve para recordar que el modelo describe lo que pasó, no explica por qué.</a:t>
             </a:r>
-            <a:endParaRPr lang="en-US" dirty="0"/>
           </a:p>
         </p:txBody>
       </p:sp>
@@ -1487,7 +1257,6 @@
               <a:rPr lang="en-US" dirty="0"/>
               <a:t>Empieza preguntando: '¿por qué no usamos simplemente la recta de la clase pasada? Survived vale 0 o 1, es un número'. Es una pregunta razonable y merece una respuesta concreta, no un 'porque no se hace'. El caso del hombre de 74 años con probabilidad −14 % es el argumento. Y el remate importa: en la Clase 10 el problema aparecía al extrapolar; aquí aparece con datos reales.</a:t>
             </a:r>
-            <a:endParaRPr lang="en-US" dirty="0"/>
           </a:p>
         </p:txBody>
       </p:sp>
@@ -1575,7 +1344,6 @@
               <a:rPr lang="en-US" dirty="0"/>
               <a:t>Lo importante conceptualmente: la parte de z es la MISMA recta de la clase pasada. Lo único nuevo es la función que la envuelve. Si alguien pregunta de dónde sale la fórmula, la respuesta honesta para esta clase es: es la función más simple que cumple las tres propiedades de abajo. La derivación formal viene de las odds, y se ve en la slide siguiente.</a:t>
             </a:r>
-            <a:endParaRPr lang="en-US" dirty="0"/>
           </a:p>
         </p:txBody>
       </p:sp>
@@ -1663,7 +1431,6 @@
               <a:rPr lang="en-US" dirty="0"/>
               <a:t>Las odds son la idea que cuesta, y la analogía de las apuestas ayuda: en el fútbol se dice '3 a 1', no '75 %'. Es la misma información expresada distinto. La tarjeta de abajo hay que decirla despacio y con las dos frases en voz alta: la diferencia entre 12 veces más odds y 12 veces más probable es enorme, y se confunde constantemente en informes.</a:t>
             </a:r>
-            <a:endParaRPr lang="en-US" dirty="0"/>
           </a:p>
         </p:txBody>
       </p:sp>
@@ -1751,7 +1518,6 @@
               <a:rPr lang="en-US" dirty="0"/>
               <a:t>El OR de 12.4 para el sexo es el número que se van a llevar de la clase. La nota del pie es importante porque van a comparar con statsmodels en algún momento y no van a cuadrar: sklearn aplica regularización L2 por defecto y encoge un poco los coeficientes. Con penalty=None se obtienen los mismos que statsmodels.</a:t>
             </a:r>
-            <a:endParaRPr lang="en-US" dirty="0"/>
           </a:p>
         </p:txBody>
       </p:sp>
@@ -1839,7 +1605,6 @@
               <a:rPr lang="en-US" dirty="0"/>
               <a:t>Dibuja la matriz en la pizarra antes de mostrarla: las cuatro casillas y qué significa cada una. La tarjeta magenta es la más importante de la slide y la que más se olvida en informes: una exactitud del 77 % suena bien hasta que sabes que la regla trivial da 62 %. En problemas desbalanceados —fraude, mora— eso es aún más brutal: si el 2 % es fraude, decir 'no es fraude' siempre acierta el 98 %.</a:t>
             </a:r>
-            <a:endParaRPr lang="en-US" dirty="0"/>
           </a:p>
         </p:txBody>
       </p:sp>
@@ -1912,6 +1677,11 @@
 <file path=ppt/slideMasters/slideMaster1.xml><?xml version="1.0" encoding="utf-8"?>
 <p:sldMaster xmlns:a="http://schemas.openxmlformats.org/drawingml/2006/main" xmlns:r="http://schemas.openxmlformats.org/officeDocument/2006/relationships" xmlns:p="http://schemas.openxmlformats.org/presentationml/2006/main">
   <p:cSld>
+    <p:bg>
+      <p:bgRef idx="1001">
+        <a:schemeClr val="bg1"/>
+      </p:bgRef>
+    </p:bg>
     <p:spTree>
       <p:nvGrpSpPr>
         <p:cNvPr id="1" name=""/>
@@ -2194,6 +1964,7 @@
         <a:solidFill>
           <a:srgbClr val="0A2559"/>
         </a:solidFill>
+        <a:effectLst/>
       </p:bgPr>
     </p:bg>
     <p:spTree>
@@ -4977,7 +4748,7 @@
           <a:bodyPr wrap="square" lIns="0" tIns="0" rIns="0" bIns="0" rtlCol="0" anchor="ctr"/>
           <a:lstStyle/>
           <a:p>
-            <a:pPr algn="r" indent="0" marL="0">
+            <a:pPr marL="0" indent="0" algn="r">
               <a:buNone/>
             </a:pPr>
             <a:r>
@@ -5016,7 +4787,7 @@
           <a:bodyPr wrap="square" lIns="0" tIns="0" rIns="0" bIns="0" rtlCol="0" anchor="ctr"/>
           <a:lstStyle/>
           <a:p>
-            <a:pPr algn="r" indent="0" marL="0">
+            <a:pPr marL="0" indent="0" algn="r">
               <a:buNone/>
             </a:pPr>
             <a:r>
@@ -5055,7 +4826,7 @@
           <a:bodyPr wrap="square" lIns="0" tIns="0" rIns="0" bIns="0" rtlCol="0" anchor="ctr"/>
           <a:lstStyle/>
           <a:p>
-            <a:pPr algn="ctr" indent="0" marL="0">
+            <a:pPr marL="0" indent="0" algn="ctr">
               <a:buNone/>
             </a:pPr>
             <a:r>
@@ -5121,11 +4892,11 @@
           <a:bodyPr wrap="square" lIns="0" tIns="0" rIns="0" bIns="0" rtlCol="0" anchor="ctr"/>
           <a:lstStyle/>
           <a:p>
-            <a:pPr algn="ctr" indent="0" marL="0">
+            <a:pPr marL="0" indent="0" algn="ctr">
               <a:buNone/>
             </a:pPr>
             <a:r>
-              <a:rPr lang="en-US" sz="1150" b="1" spc="100" kern="0" dirty="0">
+              <a:rPr lang="en-US" sz="1150" b="1" kern="0" spc="100" dirty="0">
                 <a:solidFill>
                   <a:srgbClr val="FFFFFF"/>
                 </a:solidFill>
@@ -5160,7 +4931,7 @@
           <a:bodyPr wrap="square" lIns="0" tIns="0" rIns="0" bIns="0" rtlCol="0" anchor="t"/>
           <a:lstStyle/>
           <a:p>
-            <a:pPr indent="0" marL="0">
+            <a:pPr marL="0" indent="0">
               <a:lnSpc>
                 <a:spcPct val="98000"/>
               </a:lnSpc>
@@ -5180,7 +4951,7 @@
             <a:endParaRPr lang="en-US" sz="4200" dirty="0"/>
           </a:p>
           <a:p>
-            <a:pPr indent="0" marL="0">
+            <a:pPr marL="0" indent="0">
               <a:lnSpc>
                 <a:spcPct val="98000"/>
               </a:lnSpc>
@@ -5222,7 +4993,7 @@
           <a:bodyPr wrap="square" lIns="0" tIns="0" rIns="0" bIns="0" rtlCol="0" anchor="t"/>
           <a:lstStyle/>
           <a:p>
-            <a:pPr algn="l" indent="0" marL="0">
+            <a:pPr marL="0" indent="0" algn="l">
               <a:lnSpc>
                 <a:spcPct val="120000"/>
               </a:lnSpc>
@@ -5242,7 +5013,7 @@
             <a:endParaRPr lang="en-US" sz="1500" dirty="0"/>
           </a:p>
           <a:p>
-            <a:pPr algn="l" indent="0" marL="0">
+            <a:pPr marL="0" indent="0" algn="l">
               <a:lnSpc>
                 <a:spcPct val="120000"/>
               </a:lnSpc>
@@ -5284,7 +5055,7 @@
           <a:bodyPr wrap="square" lIns="0" tIns="0" rIns="0" bIns="0" rtlCol="0" anchor="ctr"/>
           <a:lstStyle/>
           <a:p>
-            <a:pPr indent="0" marL="0">
+            <a:pPr marL="0" indent="0">
               <a:buNone/>
             </a:pPr>
             <a:r>
@@ -5323,7 +5094,7 @@
           <a:bodyPr wrap="square" lIns="0" tIns="0" rIns="0" bIns="0" rtlCol="0" anchor="t"/>
           <a:lstStyle/>
           <a:p>
-            <a:pPr indent="0" marL="0">
+            <a:pPr marL="0" indent="0">
               <a:buNone/>
             </a:pPr>
             <a:r>
@@ -5362,7 +5133,7 @@
           <a:bodyPr wrap="square" lIns="0" tIns="0" rIns="0" bIns="0" rtlCol="0" anchor="ctr"/>
           <a:lstStyle/>
           <a:p>
-            <a:pPr indent="0" marL="0">
+            <a:pPr marL="0" indent="0">
               <a:buNone/>
             </a:pPr>
             <a:r>
@@ -5401,7 +5172,7 @@
           <a:bodyPr wrap="square" lIns="0" tIns="0" rIns="0" bIns="0" rtlCol="0" anchor="t"/>
           <a:lstStyle/>
           <a:p>
-            <a:pPr indent="0" marL="0">
+            <a:pPr marL="0" indent="0">
               <a:buNone/>
             </a:pPr>
             <a:r>
@@ -5440,7 +5211,7 @@
           <a:bodyPr wrap="square" lIns="0" tIns="0" rIns="0" bIns="0" rtlCol="0" anchor="ctr"/>
           <a:lstStyle/>
           <a:p>
-            <a:pPr indent="0" marL="0">
+            <a:pPr marL="0" indent="0">
               <a:buNone/>
             </a:pPr>
             <a:r>
@@ -5479,7 +5250,7 @@
           <a:bodyPr wrap="square" lIns="0" tIns="0" rIns="0" bIns="0" rtlCol="0" anchor="t"/>
           <a:lstStyle/>
           <a:p>
-            <a:pPr indent="0" marL="0">
+            <a:pPr marL="0" indent="0">
               <a:buNone/>
             </a:pPr>
             <a:r>
@@ -5518,7 +5289,7 @@
           <a:bodyPr wrap="square" lIns="0" tIns="0" rIns="0" bIns="0" rtlCol="0" anchor="ctr"/>
           <a:lstStyle/>
           <a:p>
-            <a:pPr indent="0" marL="0">
+            <a:pPr marL="0" indent="0">
               <a:buNone/>
             </a:pPr>
             <a:r>
@@ -5552,6 +5323,7 @@
         <a:solidFill>
           <a:srgbClr val="F5F7FB"/>
         </a:solidFill>
+        <a:effectLst/>
       </p:bgPr>
     </p:bg>
     <p:spTree>
@@ -5616,11 +5388,11 @@
           <a:bodyPr wrap="square" lIns="0" tIns="0" rIns="0" bIns="0" rtlCol="0" anchor="ctr"/>
           <a:lstStyle/>
           <a:p>
-            <a:pPr algn="ctr" indent="0" marL="0">
+            <a:pPr marL="0" indent="0" algn="ctr">
               <a:buNone/>
             </a:pPr>
             <a:r>
-              <a:rPr lang="en-US" sz="1150" b="1" spc="100" kern="0" dirty="0">
+              <a:rPr lang="en-US" sz="1150" b="1" kern="0" spc="100" dirty="0">
                 <a:solidFill>
                   <a:srgbClr val="FFFFFF"/>
                 </a:solidFill>
@@ -5655,7 +5427,7 @@
           <a:bodyPr wrap="square" lIns="0" tIns="0" rIns="0" bIns="0" rtlCol="0" anchor="ctr"/>
           <a:lstStyle/>
           <a:p>
-            <a:pPr indent="0" marL="0">
+            <a:pPr marL="0" indent="0">
               <a:buNone/>
             </a:pPr>
             <a:r>
@@ -5694,7 +5466,7 @@
           <a:bodyPr wrap="square" lIns="0" tIns="0" rIns="0" bIns="0" rtlCol="0" anchor="ctr"/>
           <a:lstStyle/>
           <a:p>
-            <a:pPr indent="0" marL="0">
+            <a:pPr marL="0" indent="0">
               <a:buNone/>
             </a:pPr>
             <a:r>
@@ -5728,20 +5500,62 @@
         </p:nvGraphicFramePr>
         <p:xfrm>
           <a:off x="548640" y="2057400"/>
-          <a:ext cx="11091672" cy="914400"/>
+          <a:ext cx="11091672" cy="2414016"/>
         </p:xfrm>
         <a:graphic>
           <a:graphicData uri="http://schemas.openxmlformats.org/drawingml/2006/table">
             <a:tbl>
               <a:tblPr/>
               <a:tblGrid>
-                <a:gridCol w="1463040"/>
-                <a:gridCol w="1280160"/>
-                <a:gridCol w="1280160"/>
-                <a:gridCol w="1280160"/>
-                <a:gridCol w="2011680"/>
-                <a:gridCol w="1883664"/>
-                <a:gridCol w="1892808"/>
+                <a:gridCol w="1463040">
+                  <a:extLst>
+                    <a:ext uri="{9D8B030D-6E8A-4147-A177-3AD203B41FA5}">
+                      <a16:colId xmlns:a16="http://schemas.microsoft.com/office/drawing/2014/main" val="20000"/>
+                    </a:ext>
+                  </a:extLst>
+                </a:gridCol>
+                <a:gridCol w="1280160">
+                  <a:extLst>
+                    <a:ext uri="{9D8B030D-6E8A-4147-A177-3AD203B41FA5}">
+                      <a16:colId xmlns:a16="http://schemas.microsoft.com/office/drawing/2014/main" val="20001"/>
+                    </a:ext>
+                  </a:extLst>
+                </a:gridCol>
+                <a:gridCol w="1280160">
+                  <a:extLst>
+                    <a:ext uri="{9D8B030D-6E8A-4147-A177-3AD203B41FA5}">
+                      <a16:colId xmlns:a16="http://schemas.microsoft.com/office/drawing/2014/main" val="20002"/>
+                    </a:ext>
+                  </a:extLst>
+                </a:gridCol>
+                <a:gridCol w="1280160">
+                  <a:extLst>
+                    <a:ext uri="{9D8B030D-6E8A-4147-A177-3AD203B41FA5}">
+                      <a16:colId xmlns:a16="http://schemas.microsoft.com/office/drawing/2014/main" val="20003"/>
+                    </a:ext>
+                  </a:extLst>
+                </a:gridCol>
+                <a:gridCol w="2011680">
+                  <a:extLst>
+                    <a:ext uri="{9D8B030D-6E8A-4147-A177-3AD203B41FA5}">
+                      <a16:colId xmlns:a16="http://schemas.microsoft.com/office/drawing/2014/main" val="20004"/>
+                    </a:ext>
+                  </a:extLst>
+                </a:gridCol>
+                <a:gridCol w="1883664">
+                  <a:extLst>
+                    <a:ext uri="{9D8B030D-6E8A-4147-A177-3AD203B41FA5}">
+                      <a16:colId xmlns:a16="http://schemas.microsoft.com/office/drawing/2014/main" val="20005"/>
+                    </a:ext>
+                  </a:extLst>
+                </a:gridCol>
+                <a:gridCol w="1892808">
+                  <a:extLst>
+                    <a:ext uri="{9D8B030D-6E8A-4147-A177-3AD203B41FA5}">
+                      <a16:colId xmlns:a16="http://schemas.microsoft.com/office/drawing/2014/main" val="20006"/>
+                    </a:ext>
+                  </a:extLst>
+                </a:gridCol>
               </a:tblGrid>
               <a:tr h="402336">
                 <a:tc>
@@ -5749,7 +5563,7 @@
                     <a:bodyPr/>
                     <a:lstStyle/>
                     <a:p>
-                      <a:pPr indent="0" marL="0">
+                      <a:pPr marL="0" indent="0">
                         <a:buNone/>
                       </a:pPr>
                       <a:r>
@@ -5817,7 +5631,7 @@
                     <a:bodyPr/>
                     <a:lstStyle/>
                     <a:p>
-                      <a:pPr indent="0" marL="0">
+                      <a:pPr marL="0" indent="0">
                         <a:buNone/>
                       </a:pPr>
                       <a:r>
@@ -5885,7 +5699,7 @@
                     <a:bodyPr/>
                     <a:lstStyle/>
                     <a:p>
-                      <a:pPr indent="0" marL="0">
+                      <a:pPr marL="0" indent="0">
                         <a:buNone/>
                       </a:pPr>
                       <a:r>
@@ -5953,7 +5767,7 @@
                     <a:bodyPr/>
                     <a:lstStyle/>
                     <a:p>
-                      <a:pPr indent="0" marL="0">
+                      <a:pPr marL="0" indent="0">
                         <a:buNone/>
                       </a:pPr>
                       <a:r>
@@ -6021,7 +5835,7 @@
                     <a:bodyPr/>
                     <a:lstStyle/>
                     <a:p>
-                      <a:pPr indent="0" marL="0">
+                      <a:pPr marL="0" indent="0">
                         <a:buNone/>
                       </a:pPr>
                       <a:r>
@@ -6089,7 +5903,7 @@
                     <a:bodyPr/>
                     <a:lstStyle/>
                     <a:p>
-                      <a:pPr indent="0" marL="0">
+                      <a:pPr marL="0" indent="0">
                         <a:buNone/>
                       </a:pPr>
                       <a:r>
@@ -6157,7 +5971,7 @@
                     <a:bodyPr/>
                     <a:lstStyle/>
                     <a:p>
-                      <a:pPr indent="0" marL="0">
+                      <a:pPr marL="0" indent="0">
                         <a:buNone/>
                       </a:pPr>
                       <a:r>
@@ -6220,6 +6034,11 @@
                     </a:solidFill>
                   </a:tcPr>
                 </a:tc>
+                <a:extLst>
+                  <a:ext uri="{0D108BD9-81ED-4DB2-BD59-A6C34878D82A}">
+                    <a16:rowId xmlns:a16="http://schemas.microsoft.com/office/drawing/2014/main" val="10000"/>
+                  </a:ext>
+                </a:extLst>
               </a:tr>
               <a:tr h="402336">
                 <a:tc>
@@ -6227,7 +6046,7 @@
                     <a:bodyPr/>
                     <a:lstStyle/>
                     <a:p>
-                      <a:pPr algn="ctr" indent="0" marL="0">
+                      <a:pPr marL="0" indent="0" algn="ctr">
                         <a:buNone/>
                       </a:pPr>
                       <a:r>
@@ -6295,7 +6114,7 @@
                     <a:bodyPr/>
                     <a:lstStyle/>
                     <a:p>
-                      <a:pPr algn="ctr" indent="0" marL="0">
+                      <a:pPr marL="0" indent="0" algn="ctr">
                         <a:buNone/>
                       </a:pPr>
                       <a:r>
@@ -6363,7 +6182,7 @@
                     <a:bodyPr/>
                     <a:lstStyle/>
                     <a:p>
-                      <a:pPr algn="ctr" indent="0" marL="0">
+                      <a:pPr marL="0" indent="0" algn="ctr">
                         <a:buNone/>
                       </a:pPr>
                       <a:r>
@@ -6431,7 +6250,7 @@
                     <a:bodyPr/>
                     <a:lstStyle/>
                     <a:p>
-                      <a:pPr algn="ctr" indent="0" marL="0">
+                      <a:pPr marL="0" indent="0" algn="ctr">
                         <a:buNone/>
                       </a:pPr>
                       <a:r>
@@ -6499,7 +6318,7 @@
                     <a:bodyPr/>
                     <a:lstStyle/>
                     <a:p>
-                      <a:pPr algn="ctr" indent="0" marL="0">
+                      <a:pPr marL="0" indent="0" algn="ctr">
                         <a:buNone/>
                       </a:pPr>
                       <a:r>
@@ -6567,7 +6386,7 @@
                     <a:bodyPr/>
                     <a:lstStyle/>
                     <a:p>
-                      <a:pPr algn="ctr" indent="0" marL="0">
+                      <a:pPr marL="0" indent="0" algn="ctr">
                         <a:buNone/>
                       </a:pPr>
                       <a:r>
@@ -6635,7 +6454,7 @@
                     <a:bodyPr/>
                     <a:lstStyle/>
                     <a:p>
-                      <a:pPr algn="ctr" indent="0" marL="0">
+                      <a:pPr marL="0" indent="0" algn="ctr">
                         <a:buNone/>
                       </a:pPr>
                       <a:r>
@@ -6698,6 +6517,11 @@
                     </a:solidFill>
                   </a:tcPr>
                 </a:tc>
+                <a:extLst>
+                  <a:ext uri="{0D108BD9-81ED-4DB2-BD59-A6C34878D82A}">
+                    <a16:rowId xmlns:a16="http://schemas.microsoft.com/office/drawing/2014/main" val="10001"/>
+                  </a:ext>
+                </a:extLst>
               </a:tr>
               <a:tr h="402336">
                 <a:tc>
@@ -6705,7 +6529,7 @@
                     <a:bodyPr/>
                     <a:lstStyle/>
                     <a:p>
-                      <a:pPr algn="ctr" indent="0" marL="0">
+                      <a:pPr marL="0" indent="0" algn="ctr">
                         <a:buNone/>
                       </a:pPr>
                       <a:r>
@@ -6773,7 +6597,7 @@
                     <a:bodyPr/>
                     <a:lstStyle/>
                     <a:p>
-                      <a:pPr algn="ctr" indent="0" marL="0">
+                      <a:pPr marL="0" indent="0" algn="ctr">
                         <a:buNone/>
                       </a:pPr>
                       <a:r>
@@ -6841,7 +6665,7 @@
                     <a:bodyPr/>
                     <a:lstStyle/>
                     <a:p>
-                      <a:pPr algn="ctr" indent="0" marL="0">
+                      <a:pPr marL="0" indent="0" algn="ctr">
                         <a:buNone/>
                       </a:pPr>
                       <a:r>
@@ -6909,7 +6733,7 @@
                     <a:bodyPr/>
                     <a:lstStyle/>
                     <a:p>
-                      <a:pPr algn="ctr" indent="0" marL="0">
+                      <a:pPr marL="0" indent="0" algn="ctr">
                         <a:buNone/>
                       </a:pPr>
                       <a:r>
@@ -6977,7 +6801,7 @@
                     <a:bodyPr/>
                     <a:lstStyle/>
                     <a:p>
-                      <a:pPr algn="ctr" indent="0" marL="0">
+                      <a:pPr marL="0" indent="0" algn="ctr">
                         <a:buNone/>
                       </a:pPr>
                       <a:r>
@@ -7045,7 +6869,7 @@
                     <a:bodyPr/>
                     <a:lstStyle/>
                     <a:p>
-                      <a:pPr algn="ctr" indent="0" marL="0">
+                      <a:pPr marL="0" indent="0" algn="ctr">
                         <a:buNone/>
                       </a:pPr>
                       <a:r>
@@ -7113,7 +6937,7 @@
                     <a:bodyPr/>
                     <a:lstStyle/>
                     <a:p>
-                      <a:pPr algn="ctr" indent="0" marL="0">
+                      <a:pPr marL="0" indent="0" algn="ctr">
                         <a:buNone/>
                       </a:pPr>
                       <a:r>
@@ -7176,6 +7000,11 @@
                     </a:solidFill>
                   </a:tcPr>
                 </a:tc>
+                <a:extLst>
+                  <a:ext uri="{0D108BD9-81ED-4DB2-BD59-A6C34878D82A}">
+                    <a16:rowId xmlns:a16="http://schemas.microsoft.com/office/drawing/2014/main" val="10002"/>
+                  </a:ext>
+                </a:extLst>
               </a:tr>
               <a:tr h="402336">
                 <a:tc>
@@ -7183,7 +7012,7 @@
                     <a:bodyPr/>
                     <a:lstStyle/>
                     <a:p>
-                      <a:pPr algn="ctr" indent="0" marL="0">
+                      <a:pPr marL="0" indent="0" algn="ctr">
                         <a:buNone/>
                       </a:pPr>
                       <a:r>
@@ -7251,7 +7080,7 @@
                     <a:bodyPr/>
                     <a:lstStyle/>
                     <a:p>
-                      <a:pPr algn="ctr" indent="0" marL="0">
+                      <a:pPr marL="0" indent="0" algn="ctr">
                         <a:buNone/>
                       </a:pPr>
                       <a:r>
@@ -7319,7 +7148,7 @@
                     <a:bodyPr/>
                     <a:lstStyle/>
                     <a:p>
-                      <a:pPr algn="ctr" indent="0" marL="0">
+                      <a:pPr marL="0" indent="0" algn="ctr">
                         <a:buNone/>
                       </a:pPr>
                       <a:r>
@@ -7387,7 +7216,7 @@
                     <a:bodyPr/>
                     <a:lstStyle/>
                     <a:p>
-                      <a:pPr algn="ctr" indent="0" marL="0">
+                      <a:pPr marL="0" indent="0" algn="ctr">
                         <a:buNone/>
                       </a:pPr>
                       <a:r>
@@ -7455,7 +7284,7 @@
                     <a:bodyPr/>
                     <a:lstStyle/>
                     <a:p>
-                      <a:pPr algn="ctr" indent="0" marL="0">
+                      <a:pPr marL="0" indent="0" algn="ctr">
                         <a:buNone/>
                       </a:pPr>
                       <a:r>
@@ -7523,7 +7352,7 @@
                     <a:bodyPr/>
                     <a:lstStyle/>
                     <a:p>
-                      <a:pPr algn="ctr" indent="0" marL="0">
+                      <a:pPr marL="0" indent="0" algn="ctr">
                         <a:buNone/>
                       </a:pPr>
                       <a:r>
@@ -7591,7 +7420,7 @@
                     <a:bodyPr/>
                     <a:lstStyle/>
                     <a:p>
-                      <a:pPr algn="ctr" indent="0" marL="0">
+                      <a:pPr marL="0" indent="0" algn="ctr">
                         <a:buNone/>
                       </a:pPr>
                       <a:r>
@@ -7654,6 +7483,11 @@
                     </a:solidFill>
                   </a:tcPr>
                 </a:tc>
+                <a:extLst>
+                  <a:ext uri="{0D108BD9-81ED-4DB2-BD59-A6C34878D82A}">
+                    <a16:rowId xmlns:a16="http://schemas.microsoft.com/office/drawing/2014/main" val="10003"/>
+                  </a:ext>
+                </a:extLst>
               </a:tr>
               <a:tr h="402336">
                 <a:tc>
@@ -7661,7 +7495,7 @@
                     <a:bodyPr/>
                     <a:lstStyle/>
                     <a:p>
-                      <a:pPr algn="ctr" indent="0" marL="0">
+                      <a:pPr marL="0" indent="0" algn="ctr">
                         <a:buNone/>
                       </a:pPr>
                       <a:r>
@@ -7729,7 +7563,7 @@
                     <a:bodyPr/>
                     <a:lstStyle/>
                     <a:p>
-                      <a:pPr algn="ctr" indent="0" marL="0">
+                      <a:pPr marL="0" indent="0" algn="ctr">
                         <a:buNone/>
                       </a:pPr>
                       <a:r>
@@ -7797,7 +7631,7 @@
                     <a:bodyPr/>
                     <a:lstStyle/>
                     <a:p>
-                      <a:pPr algn="ctr" indent="0" marL="0">
+                      <a:pPr marL="0" indent="0" algn="ctr">
                         <a:buNone/>
                       </a:pPr>
                       <a:r>
@@ -7865,7 +7699,7 @@
                     <a:bodyPr/>
                     <a:lstStyle/>
                     <a:p>
-                      <a:pPr algn="ctr" indent="0" marL="0">
+                      <a:pPr marL="0" indent="0" algn="ctr">
                         <a:buNone/>
                       </a:pPr>
                       <a:r>
@@ -7933,7 +7767,7 @@
                     <a:bodyPr/>
                     <a:lstStyle/>
                     <a:p>
-                      <a:pPr algn="ctr" indent="0" marL="0">
+                      <a:pPr marL="0" indent="0" algn="ctr">
                         <a:buNone/>
                       </a:pPr>
                       <a:r>
@@ -8001,7 +7835,7 @@
                     <a:bodyPr/>
                     <a:lstStyle/>
                     <a:p>
-                      <a:pPr algn="ctr" indent="0" marL="0">
+                      <a:pPr marL="0" indent="0" algn="ctr">
                         <a:buNone/>
                       </a:pPr>
                       <a:r>
@@ -8069,7 +7903,7 @@
                     <a:bodyPr/>
                     <a:lstStyle/>
                     <a:p>
-                      <a:pPr algn="ctr" indent="0" marL="0">
+                      <a:pPr marL="0" indent="0" algn="ctr">
                         <a:buNone/>
                       </a:pPr>
                       <a:r>
@@ -8132,6 +7966,11 @@
                     </a:solidFill>
                   </a:tcPr>
                 </a:tc>
+                <a:extLst>
+                  <a:ext uri="{0D108BD9-81ED-4DB2-BD59-A6C34878D82A}">
+                    <a16:rowId xmlns:a16="http://schemas.microsoft.com/office/drawing/2014/main" val="10004"/>
+                  </a:ext>
+                </a:extLst>
               </a:tr>
               <a:tr h="402336">
                 <a:tc>
@@ -8139,7 +7978,7 @@
                     <a:bodyPr/>
                     <a:lstStyle/>
                     <a:p>
-                      <a:pPr algn="ctr" indent="0" marL="0">
+                      <a:pPr marL="0" indent="0" algn="ctr">
                         <a:buNone/>
                       </a:pPr>
                       <a:r>
@@ -8207,7 +8046,7 @@
                     <a:bodyPr/>
                     <a:lstStyle/>
                     <a:p>
-                      <a:pPr algn="ctr" indent="0" marL="0">
+                      <a:pPr marL="0" indent="0" algn="ctr">
                         <a:buNone/>
                       </a:pPr>
                       <a:r>
@@ -8275,7 +8114,7 @@
                     <a:bodyPr/>
                     <a:lstStyle/>
                     <a:p>
-                      <a:pPr algn="ctr" indent="0" marL="0">
+                      <a:pPr marL="0" indent="0" algn="ctr">
                         <a:buNone/>
                       </a:pPr>
                       <a:r>
@@ -8343,7 +8182,7 @@
                     <a:bodyPr/>
                     <a:lstStyle/>
                     <a:p>
-                      <a:pPr algn="ctr" indent="0" marL="0">
+                      <a:pPr marL="0" indent="0" algn="ctr">
                         <a:buNone/>
                       </a:pPr>
                       <a:r>
@@ -8411,7 +8250,7 @@
                     <a:bodyPr/>
                     <a:lstStyle/>
                     <a:p>
-                      <a:pPr algn="ctr" indent="0" marL="0">
+                      <a:pPr marL="0" indent="0" algn="ctr">
                         <a:buNone/>
                       </a:pPr>
                       <a:r>
@@ -8479,7 +8318,7 @@
                     <a:bodyPr/>
                     <a:lstStyle/>
                     <a:p>
-                      <a:pPr algn="ctr" indent="0" marL="0">
+                      <a:pPr marL="0" indent="0" algn="ctr">
                         <a:buNone/>
                       </a:pPr>
                       <a:r>
@@ -8547,7 +8386,7 @@
                     <a:bodyPr/>
                     <a:lstStyle/>
                     <a:p>
-                      <a:pPr algn="ctr" indent="0" marL="0">
+                      <a:pPr marL="0" indent="0" algn="ctr">
                         <a:buNone/>
                       </a:pPr>
                       <a:r>
@@ -8610,6 +8449,11 @@
                     </a:solidFill>
                   </a:tcPr>
                 </a:tc>
+                <a:extLst>
+                  <a:ext uri="{0D108BD9-81ED-4DB2-BD59-A6C34878D82A}">
+                    <a16:rowId xmlns:a16="http://schemas.microsoft.com/office/drawing/2014/main" val="10005"/>
+                  </a:ext>
+                </a:extLst>
               </a:tr>
             </a:tbl>
           </a:graphicData>
@@ -8690,7 +8534,7 @@
           <a:bodyPr wrap="square" lIns="0" tIns="0" rIns="0" bIns="0" rtlCol="0" anchor="ctr"/>
           <a:lstStyle/>
           <a:p>
-            <a:pPr indent="0" marL="0">
+            <a:pPr marL="0" indent="0">
               <a:buNone/>
             </a:pPr>
             <a:r>
@@ -8729,7 +8573,7 @@
           <a:bodyPr wrap="square" lIns="0" tIns="0" rIns="0" bIns="0" rtlCol="0" anchor="t"/>
           <a:lstStyle/>
           <a:p>
-            <a:pPr algn="l" indent="0" marL="0">
+            <a:pPr marL="0" indent="0" algn="l">
               <a:lnSpc>
                 <a:spcPct val="116000"/>
               </a:lnSpc>
@@ -8749,7 +8593,7 @@
             <a:endParaRPr lang="en-US" sz="1150" dirty="0"/>
           </a:p>
           <a:p>
-            <a:pPr algn="l" indent="0" marL="0">
+            <a:pPr marL="0" indent="0" algn="l">
               <a:lnSpc>
                 <a:spcPct val="116000"/>
               </a:lnSpc>
@@ -8769,7 +8613,7 @@
             <a:endParaRPr lang="en-US" sz="1150" dirty="0"/>
           </a:p>
           <a:p>
-            <a:pPr algn="l" indent="0" marL="0">
+            <a:pPr marL="0" indent="0" algn="l">
               <a:lnSpc>
                 <a:spcPct val="116000"/>
               </a:lnSpc>
@@ -8792,7 +8636,7 @@
       </p:sp>
       <p:sp>
         <p:nvSpPr>
-          <p:cNvPr id="11" name="Shape 8"/>
+          <p:cNvPr id="6" name="Shape 8"/>
           <p:cNvSpPr/>
           <p:nvPr/>
         </p:nvSpPr>
@@ -8865,7 +8709,7 @@
           <a:bodyPr wrap="square" lIns="0" tIns="0" rIns="0" bIns="0" rtlCol="0" anchor="ctr"/>
           <a:lstStyle/>
           <a:p>
-            <a:pPr indent="0" marL="0">
+            <a:pPr marL="0" indent="0">
               <a:buNone/>
             </a:pPr>
             <a:r>
@@ -8904,7 +8748,7 @@
           <a:bodyPr wrap="square" lIns="0" tIns="0" rIns="0" bIns="0" rtlCol="0" anchor="t"/>
           <a:lstStyle/>
           <a:p>
-            <a:pPr algn="l" indent="0" marL="0">
+            <a:pPr marL="0" indent="0" algn="l">
               <a:lnSpc>
                 <a:spcPct val="108000"/>
               </a:lnSpc>
@@ -8924,7 +8768,7 @@
             <a:endParaRPr lang="en-US" sz="1100" dirty="0"/>
           </a:p>
           <a:p>
-            <a:pPr algn="l" indent="0" marL="0">
+            <a:pPr marL="0" indent="0" algn="l">
               <a:lnSpc>
                 <a:spcPct val="108000"/>
               </a:lnSpc>
@@ -8993,7 +8837,7 @@
           <a:bodyPr wrap="square" lIns="0" tIns="0" rIns="0" bIns="0" rtlCol="0" anchor="ctr"/>
           <a:lstStyle/>
           <a:p>
-            <a:pPr algn="ctr" indent="0" marL="0">
+            <a:pPr marL="0" indent="0" algn="ctr">
               <a:lnSpc>
                 <a:spcPct val="108000"/>
               </a:lnSpc>
@@ -9030,6 +8874,7 @@
         <a:solidFill>
           <a:srgbClr val="F5F7FB"/>
         </a:solidFill>
+        <a:effectLst/>
       </p:bgPr>
     </p:bg>
     <p:spTree>
@@ -9094,11 +8939,11 @@
           <a:bodyPr wrap="square" lIns="0" tIns="0" rIns="0" bIns="0" rtlCol="0" anchor="ctr"/>
           <a:lstStyle/>
           <a:p>
-            <a:pPr algn="ctr" indent="0" marL="0">
+            <a:pPr marL="0" indent="0" algn="ctr">
               <a:buNone/>
             </a:pPr>
             <a:r>
-              <a:rPr lang="en-US" sz="1150" b="1" spc="100" kern="0" dirty="0">
+              <a:rPr lang="en-US" sz="1150" b="1" kern="0" spc="100" dirty="0">
                 <a:solidFill>
                   <a:srgbClr val="FFFFFF"/>
                 </a:solidFill>
@@ -9133,7 +8978,7 @@
           <a:bodyPr wrap="square" lIns="0" tIns="0" rIns="0" bIns="0" rtlCol="0" anchor="ctr"/>
           <a:lstStyle/>
           <a:p>
-            <a:pPr indent="0" marL="0">
+            <a:pPr marL="0" indent="0">
               <a:buNone/>
             </a:pPr>
             <a:r>
@@ -9172,7 +9017,7 @@
           <a:bodyPr wrap="square" lIns="0" tIns="0" rIns="0" bIns="0" rtlCol="0" anchor="ctr"/>
           <a:lstStyle/>
           <a:p>
-            <a:pPr indent="0" marL="0">
+            <a:pPr marL="0" indent="0">
               <a:buNone/>
             </a:pPr>
             <a:r>
@@ -9265,7 +9110,7 @@
           <a:bodyPr wrap="square" lIns="0" tIns="0" rIns="0" bIns="0" rtlCol="0" anchor="ctr"/>
           <a:lstStyle/>
           <a:p>
-            <a:pPr algn="ctr" indent="0" marL="0">
+            <a:pPr marL="0" indent="0" algn="ctr">
               <a:buNone/>
             </a:pPr>
             <a:r>
@@ -9304,7 +9149,7 @@
           <a:bodyPr wrap="square" lIns="0" tIns="0" rIns="0" bIns="0" rtlCol="0" anchor="ctr"/>
           <a:lstStyle/>
           <a:p>
-            <a:pPr indent="0" marL="0">
+            <a:pPr marL="0" indent="0">
               <a:buNone/>
             </a:pPr>
             <a:r>
@@ -9343,7 +9188,7 @@
           <a:bodyPr wrap="square" lIns="0" tIns="0" rIns="0" bIns="0" rtlCol="0" anchor="t"/>
           <a:lstStyle/>
           <a:p>
-            <a:pPr algn="l" indent="0" marL="0">
+            <a:pPr marL="0" indent="0" algn="l">
               <a:lnSpc>
                 <a:spcPct val="110000"/>
               </a:lnSpc>
@@ -9363,7 +9208,7 @@
             <a:endParaRPr lang="en-US" sz="1150" dirty="0"/>
           </a:p>
           <a:p>
-            <a:pPr algn="l" indent="0" marL="0">
+            <a:pPr marL="0" indent="0" algn="l">
               <a:lnSpc>
                 <a:spcPct val="110000"/>
               </a:lnSpc>
@@ -9432,7 +9277,7 @@
           <a:bodyPr wrap="square" lIns="0" tIns="0" rIns="0" bIns="0" rtlCol="0" anchor="ctr"/>
           <a:lstStyle/>
           <a:p>
-            <a:pPr algn="ctr" indent="0" marL="0">
+            <a:pPr marL="0" indent="0" algn="ctr">
               <a:buNone/>
             </a:pPr>
             <a:r>
@@ -9471,7 +9316,7 @@
           <a:bodyPr wrap="square" lIns="0" tIns="0" rIns="0" bIns="0" rtlCol="0" anchor="t"/>
           <a:lstStyle/>
           <a:p>
-            <a:pPr algn="l" indent="0" marL="0">
+            <a:pPr marL="0" indent="0" algn="l">
               <a:lnSpc>
                 <a:spcPct val="110000"/>
               </a:lnSpc>
@@ -9567,7 +9412,7 @@
           <a:bodyPr wrap="square" lIns="0" tIns="0" rIns="0" bIns="0" rtlCol="0" anchor="ctr"/>
           <a:lstStyle/>
           <a:p>
-            <a:pPr algn="ctr" indent="0" marL="0">
+            <a:pPr marL="0" indent="0" algn="ctr">
               <a:buNone/>
             </a:pPr>
             <a:r>
@@ -9606,7 +9451,7 @@
           <a:bodyPr wrap="square" lIns="0" tIns="0" rIns="0" bIns="0" rtlCol="0" anchor="ctr"/>
           <a:lstStyle/>
           <a:p>
-            <a:pPr indent="0" marL="0">
+            <a:pPr marL="0" indent="0">
               <a:buNone/>
             </a:pPr>
             <a:r>
@@ -9645,7 +9490,7 @@
           <a:bodyPr wrap="square" lIns="0" tIns="0" rIns="0" bIns="0" rtlCol="0" anchor="t"/>
           <a:lstStyle/>
           <a:p>
-            <a:pPr algn="l" indent="0" marL="0">
+            <a:pPr marL="0" indent="0" algn="l">
               <a:lnSpc>
                 <a:spcPct val="110000"/>
               </a:lnSpc>
@@ -9665,7 +9510,7 @@
             <a:endParaRPr lang="en-US" sz="1150" dirty="0"/>
           </a:p>
           <a:p>
-            <a:pPr algn="l" indent="0" marL="0">
+            <a:pPr marL="0" indent="0" algn="l">
               <a:lnSpc>
                 <a:spcPct val="110000"/>
               </a:lnSpc>
@@ -9734,7 +9579,7 @@
           <a:bodyPr wrap="square" lIns="0" tIns="0" rIns="0" bIns="0" rtlCol="0" anchor="ctr"/>
           <a:lstStyle/>
           <a:p>
-            <a:pPr algn="ctr" indent="0" marL="0">
+            <a:pPr marL="0" indent="0" algn="ctr">
               <a:buNone/>
             </a:pPr>
             <a:r>
@@ -9773,7 +9618,7 @@
           <a:bodyPr wrap="square" lIns="0" tIns="0" rIns="0" bIns="0" rtlCol="0" anchor="t"/>
           <a:lstStyle/>
           <a:p>
-            <a:pPr algn="l" indent="0" marL="0">
+            <a:pPr marL="0" indent="0" algn="l">
               <a:lnSpc>
                 <a:spcPct val="110000"/>
               </a:lnSpc>
@@ -9869,7 +9714,7 @@
           <a:bodyPr wrap="square" lIns="0" tIns="0" rIns="0" bIns="0" rtlCol="0" anchor="ctr"/>
           <a:lstStyle/>
           <a:p>
-            <a:pPr indent="0" marL="0">
+            <a:pPr marL="0" indent="0">
               <a:buNone/>
             </a:pPr>
             <a:r>
@@ -9908,7 +9753,7 @@
           <a:bodyPr wrap="square" lIns="0" tIns="0" rIns="0" bIns="0" rtlCol="0" anchor="t"/>
           <a:lstStyle/>
           <a:p>
-            <a:pPr algn="l" indent="0" marL="0">
+            <a:pPr marL="0" indent="0" algn="l">
               <a:lnSpc>
                 <a:spcPct val="106000"/>
               </a:lnSpc>
@@ -9945,6 +9790,7 @@
         <a:solidFill>
           <a:srgbClr val="F5F7FB"/>
         </a:solidFill>
+        <a:effectLst/>
       </p:bgPr>
     </p:bg>
     <p:spTree>
@@ -10009,11 +9855,11 @@
           <a:bodyPr wrap="square" lIns="0" tIns="0" rIns="0" bIns="0" rtlCol="0" anchor="ctr"/>
           <a:lstStyle/>
           <a:p>
-            <a:pPr algn="ctr" indent="0" marL="0">
+            <a:pPr marL="0" indent="0" algn="ctr">
               <a:buNone/>
             </a:pPr>
             <a:r>
-              <a:rPr lang="en-US" sz="1150" b="1" spc="100" kern="0" dirty="0">
+              <a:rPr lang="en-US" sz="1150" b="1" kern="0" spc="100" dirty="0">
                 <a:solidFill>
                   <a:srgbClr val="FFFFFF"/>
                 </a:solidFill>
@@ -10048,7 +9894,7 @@
           <a:bodyPr wrap="square" lIns="0" tIns="0" rIns="0" bIns="0" rtlCol="0" anchor="ctr"/>
           <a:lstStyle/>
           <a:p>
-            <a:pPr indent="0" marL="0">
+            <a:pPr marL="0" indent="0">
               <a:buNone/>
             </a:pPr>
             <a:r>
@@ -10087,7 +9933,7 @@
           <a:bodyPr wrap="square" lIns="0" tIns="0" rIns="0" bIns="0" rtlCol="0" anchor="ctr"/>
           <a:lstStyle/>
           <a:p>
-            <a:pPr indent="0" marL="0">
+            <a:pPr marL="0" indent="0">
               <a:buNone/>
             </a:pPr>
             <a:r>
@@ -10139,7 +9985,7 @@
         <p:spPr>
           <a:xfrm>
             <a:off x="1005840" y="5349240"/>
-            <a:ext cx="3200400" cy="-3200400"/>
+            <a:ext cx="3200400" cy="0"/>
           </a:xfrm>
           <a:prstGeom prst="line">
             <a:avLst/>
@@ -10162,7 +10008,7 @@
         <p:spPr>
           <a:xfrm>
             <a:off x="1005840" y="5349240"/>
-            <a:ext cx="134417" cy="-1616202"/>
+            <a:ext cx="134417" cy="0"/>
           </a:xfrm>
           <a:prstGeom prst="line">
             <a:avLst/>
@@ -10185,7 +10031,7 @@
         <p:spPr>
           <a:xfrm>
             <a:off x="1140257" y="3733038"/>
-            <a:ext cx="249631" cy="-560070"/>
+            <a:ext cx="249631" cy="0"/>
           </a:xfrm>
           <a:prstGeom prst="line">
             <a:avLst/>
@@ -10208,7 +10054,7 @@
         <p:spPr>
           <a:xfrm>
             <a:off x="1389888" y="3172968"/>
-            <a:ext cx="294437" cy="-217627"/>
+            <a:ext cx="294437" cy="0"/>
           </a:xfrm>
           <a:prstGeom prst="line">
             <a:avLst/>
@@ -10231,7 +10077,7 @@
         <p:spPr>
           <a:xfrm>
             <a:off x="1684325" y="2955341"/>
-            <a:ext cx="272034" cy="-278435"/>
+            <a:ext cx="272034" cy="0"/>
           </a:xfrm>
           <a:prstGeom prst="line">
             <a:avLst/>
@@ -10254,7 +10100,7 @@
         <p:spPr>
           <a:xfrm>
             <a:off x="1956359" y="2676906"/>
-            <a:ext cx="489661" cy="-272034"/>
+            <a:ext cx="489661" cy="0"/>
           </a:xfrm>
           <a:prstGeom prst="line">
             <a:avLst/>
@@ -10277,7 +10123,7 @@
         <p:spPr>
           <a:xfrm>
             <a:off x="2446020" y="2404872"/>
-            <a:ext cx="800100" cy="-160020"/>
+            <a:ext cx="800100" cy="0"/>
           </a:xfrm>
           <a:prstGeom prst="line">
             <a:avLst/>
@@ -10300,7 +10146,7 @@
         <p:spPr>
           <a:xfrm>
             <a:off x="3246120" y="2244852"/>
-            <a:ext cx="960120" cy="-96012"/>
+            <a:ext cx="960120" cy="0"/>
           </a:xfrm>
           <a:prstGeom prst="line">
             <a:avLst/>
@@ -10362,7 +10208,7 @@
           <a:bodyPr wrap="square" lIns="0" tIns="0" rIns="0" bIns="0" rtlCol="0" anchor="ctr"/>
           <a:lstStyle/>
           <a:p>
-            <a:pPr indent="0" marL="0">
+            <a:pPr marL="0" indent="0">
               <a:buNone/>
             </a:pPr>
             <a:r>
@@ -10428,7 +10274,7 @@
           <a:bodyPr wrap="square" lIns="0" tIns="0" rIns="0" bIns="0" rtlCol="0" anchor="ctr"/>
           <a:lstStyle/>
           <a:p>
-            <a:pPr indent="0" marL="0">
+            <a:pPr marL="0" indent="0">
               <a:buNone/>
             </a:pPr>
             <a:r>
@@ -10494,7 +10340,7 @@
           <a:bodyPr wrap="square" lIns="0" tIns="0" rIns="0" bIns="0" rtlCol="0" anchor="ctr"/>
           <a:lstStyle/>
           <a:p>
-            <a:pPr indent="0" marL="0">
+            <a:pPr marL="0" indent="0">
               <a:buNone/>
             </a:pPr>
             <a:r>
@@ -10533,7 +10379,7 @@
           <a:bodyPr wrap="square" lIns="0" tIns="0" rIns="0" bIns="0" rtlCol="0" anchor="ctr"/>
           <a:lstStyle/>
           <a:p>
-            <a:pPr algn="ctr" indent="0" marL="0">
+            <a:pPr marL="0" indent="0" algn="ctr">
               <a:buNone/>
             </a:pPr>
             <a:r>
@@ -10572,7 +10418,7 @@
           <a:bodyPr wrap="square" lIns="0" tIns="0" rIns="0" bIns="0" rtlCol="0" anchor="ctr"/>
           <a:lstStyle/>
           <a:p>
-            <a:pPr algn="r" indent="0" marL="0">
+            <a:pPr marL="0" indent="0" algn="r">
               <a:buNone/>
             </a:pPr>
             <a:r>
@@ -10611,7 +10457,7 @@
           <a:bodyPr wrap="square" lIns="0" tIns="0" rIns="0" bIns="0" rtlCol="0" anchor="ctr"/>
           <a:lstStyle/>
           <a:p>
-            <a:pPr algn="l" indent="0" marL="0">
+            <a:pPr marL="0" indent="0" algn="l">
               <a:buNone/>
             </a:pPr>
             <a:r>
@@ -10650,7 +10496,7 @@
           <a:bodyPr wrap="square" lIns="0" tIns="0" rIns="0" bIns="0" rtlCol="0" anchor="t"/>
           <a:lstStyle/>
           <a:p>
-            <a:pPr indent="0" marL="0">
+            <a:pPr marL="0" indent="0">
               <a:buNone/>
             </a:pPr>
             <a:r>
@@ -10667,7 +10513,7 @@
             <a:endParaRPr lang="en-US" sz="1150" dirty="0"/>
           </a:p>
           <a:p>
-            <a:pPr indent="0" marL="0">
+            <a:pPr marL="0" indent="0">
               <a:buNone/>
             </a:pPr>
             <a:r>
@@ -10760,7 +10606,7 @@
           <a:bodyPr wrap="square" lIns="0" tIns="0" rIns="0" bIns="0" rtlCol="0" anchor="ctr"/>
           <a:lstStyle/>
           <a:p>
-            <a:pPr indent="0" marL="0">
+            <a:pPr marL="0" indent="0">
               <a:buNone/>
             </a:pPr>
             <a:r>
@@ -10799,7 +10645,7 @@
           <a:bodyPr wrap="square" lIns="0" tIns="0" rIns="0" bIns="0" rtlCol="0" anchor="t"/>
           <a:lstStyle/>
           <a:p>
-            <a:pPr algn="l" indent="0" marL="0">
+            <a:pPr marL="0" indent="0" algn="l">
               <a:lnSpc>
                 <a:spcPct val="110000"/>
               </a:lnSpc>
@@ -10868,7 +10714,7 @@
           <a:bodyPr wrap="square" lIns="0" tIns="0" rIns="0" bIns="0" rtlCol="0" anchor="ctr"/>
           <a:lstStyle/>
           <a:p>
-            <a:pPr algn="ctr" indent="0" marL="0">
+            <a:pPr marL="0" indent="0" algn="ctr">
               <a:buNone/>
             </a:pPr>
             <a:r>
@@ -10907,7 +10753,7 @@
           <a:bodyPr wrap="square" lIns="0" tIns="0" rIns="0" bIns="0" rtlCol="0" anchor="ctr"/>
           <a:lstStyle/>
           <a:p>
-            <a:pPr indent="0" marL="0">
+            <a:pPr marL="0" indent="0">
               <a:buNone/>
             </a:pPr>
             <a:r>
@@ -10973,7 +10819,7 @@
           <a:bodyPr wrap="square" lIns="0" tIns="0" rIns="0" bIns="0" rtlCol="0" anchor="ctr"/>
           <a:lstStyle/>
           <a:p>
-            <a:pPr algn="ctr" indent="0" marL="0">
+            <a:pPr marL="0" indent="0" algn="ctr">
               <a:buNone/>
             </a:pPr>
             <a:r>
@@ -11012,7 +10858,7 @@
           <a:bodyPr wrap="square" lIns="0" tIns="0" rIns="0" bIns="0" rtlCol="0" anchor="ctr"/>
           <a:lstStyle/>
           <a:p>
-            <a:pPr indent="0" marL="0">
+            <a:pPr marL="0" indent="0">
               <a:buNone/>
             </a:pPr>
             <a:r>
@@ -11078,7 +10924,7 @@
           <a:bodyPr wrap="square" lIns="0" tIns="0" rIns="0" bIns="0" rtlCol="0" anchor="ctr"/>
           <a:lstStyle/>
           <a:p>
-            <a:pPr algn="ctr" indent="0" marL="0">
+            <a:pPr marL="0" indent="0" algn="ctr">
               <a:buNone/>
             </a:pPr>
             <a:r>
@@ -11117,7 +10963,7 @@
           <a:bodyPr wrap="square" lIns="0" tIns="0" rIns="0" bIns="0" rtlCol="0" anchor="ctr"/>
           <a:lstStyle/>
           <a:p>
-            <a:pPr indent="0" marL="0">
+            <a:pPr marL="0" indent="0">
               <a:buNone/>
             </a:pPr>
             <a:r>
@@ -11183,7 +11029,7 @@
           <a:bodyPr wrap="square" lIns="0" tIns="0" rIns="0" bIns="0" rtlCol="0" anchor="ctr"/>
           <a:lstStyle/>
           <a:p>
-            <a:pPr algn="ctr" indent="0" marL="0">
+            <a:pPr marL="0" indent="0" algn="ctr">
               <a:buNone/>
             </a:pPr>
             <a:r>
@@ -11222,7 +11068,7 @@
           <a:bodyPr wrap="square" lIns="0" tIns="0" rIns="0" bIns="0" rtlCol="0" anchor="ctr"/>
           <a:lstStyle/>
           <a:p>
-            <a:pPr indent="0" marL="0">
+            <a:pPr marL="0" indent="0">
               <a:buNone/>
             </a:pPr>
             <a:r>
@@ -11288,7 +11134,7 @@
           <a:bodyPr wrap="square" lIns="0" tIns="0" rIns="0" bIns="0" rtlCol="0" anchor="ctr"/>
           <a:lstStyle/>
           <a:p>
-            <a:pPr algn="l" indent="0" marL="0">
+            <a:pPr marL="0" indent="0" algn="l">
               <a:lnSpc>
                 <a:spcPct val="106000"/>
               </a:lnSpc>
@@ -11325,6 +11171,7 @@
         <a:solidFill>
           <a:srgbClr val="F5F7FB"/>
         </a:solidFill>
+        <a:effectLst/>
       </p:bgPr>
     </p:bg>
     <p:spTree>
@@ -11389,11 +11236,11 @@
           <a:bodyPr wrap="square" lIns="0" tIns="0" rIns="0" bIns="0" rtlCol="0" anchor="ctr"/>
           <a:lstStyle/>
           <a:p>
-            <a:pPr algn="ctr" indent="0" marL="0">
+            <a:pPr marL="0" indent="0" algn="ctr">
               <a:buNone/>
             </a:pPr>
             <a:r>
-              <a:rPr lang="en-US" sz="1150" b="1" spc="100" kern="0" dirty="0">
+              <a:rPr lang="en-US" sz="1150" b="1" kern="0" spc="100" dirty="0">
                 <a:solidFill>
                   <a:srgbClr val="FFFFFF"/>
                 </a:solidFill>
@@ -11428,7 +11275,7 @@
           <a:bodyPr wrap="square" lIns="0" tIns="0" rIns="0" bIns="0" rtlCol="0" anchor="ctr"/>
           <a:lstStyle/>
           <a:p>
-            <a:pPr indent="0" marL="0">
+            <a:pPr marL="0" indent="0">
               <a:buNone/>
             </a:pPr>
             <a:r>
@@ -11467,7 +11314,7 @@
           <a:bodyPr wrap="square" lIns="0" tIns="0" rIns="0" bIns="0" rtlCol="0" anchor="ctr"/>
           <a:lstStyle/>
           <a:p>
-            <a:pPr indent="0" marL="0">
+            <a:pPr marL="0" indent="0">
               <a:buNone/>
             </a:pPr>
             <a:r>
@@ -11560,11 +11407,11 @@
           <a:bodyPr wrap="square" lIns="0" tIns="0" rIns="0" bIns="0" rtlCol="0" anchor="ctr"/>
           <a:lstStyle/>
           <a:p>
-            <a:pPr algn="ctr" indent="0" marL="0">
+            <a:pPr marL="0" indent="0" algn="ctr">
               <a:buNone/>
             </a:pPr>
             <a:r>
-              <a:rPr lang="en-US" sz="1400" b="1" spc="100" kern="0" dirty="0">
+              <a:rPr lang="en-US" sz="1400" b="1" kern="0" spc="100" dirty="0">
                 <a:solidFill>
                   <a:srgbClr val="FFFFFF"/>
                 </a:solidFill>
@@ -11599,7 +11446,7 @@
           <a:bodyPr wrap="square" lIns="0" tIns="0" rIns="0" bIns="0" rtlCol="0" anchor="ctr"/>
           <a:lstStyle/>
           <a:p>
-            <a:pPr indent="0" marL="0">
+            <a:pPr marL="0" indent="0">
               <a:buNone/>
             </a:pPr>
             <a:r>
@@ -11638,7 +11485,7 @@
           <a:bodyPr wrap="square" lIns="0" tIns="0" rIns="0" bIns="0" rtlCol="0" anchor="t"/>
           <a:lstStyle/>
           <a:p>
-            <a:pPr algn="l" indent="0" marL="0">
+            <a:pPr marL="0" indent="0" algn="l">
               <a:lnSpc>
                 <a:spcPct val="108000"/>
               </a:lnSpc>
@@ -11734,11 +11581,11 @@
           <a:bodyPr wrap="square" lIns="0" tIns="0" rIns="0" bIns="0" rtlCol="0" anchor="ctr"/>
           <a:lstStyle/>
           <a:p>
-            <a:pPr algn="ctr" indent="0" marL="0">
+            <a:pPr marL="0" indent="0" algn="ctr">
               <a:buNone/>
             </a:pPr>
             <a:r>
-              <a:rPr lang="en-US" sz="1400" b="1" spc="100" kern="0" dirty="0">
+              <a:rPr lang="en-US" sz="1400" b="1" kern="0" spc="100" dirty="0">
                 <a:solidFill>
                   <a:srgbClr val="FFFFFF"/>
                 </a:solidFill>
@@ -11773,7 +11620,7 @@
           <a:bodyPr wrap="square" lIns="0" tIns="0" rIns="0" bIns="0" rtlCol="0" anchor="ctr"/>
           <a:lstStyle/>
           <a:p>
-            <a:pPr indent="0" marL="0">
+            <a:pPr marL="0" indent="0">
               <a:buNone/>
             </a:pPr>
             <a:r>
@@ -11812,7 +11659,7 @@
           <a:bodyPr wrap="square" lIns="0" tIns="0" rIns="0" bIns="0" rtlCol="0" anchor="t"/>
           <a:lstStyle/>
           <a:p>
-            <a:pPr algn="l" indent="0" marL="0">
+            <a:pPr marL="0" indent="0" algn="l">
               <a:lnSpc>
                 <a:spcPct val="108000"/>
               </a:lnSpc>
@@ -11908,11 +11755,11 @@
           <a:bodyPr wrap="square" lIns="0" tIns="0" rIns="0" bIns="0" rtlCol="0" anchor="ctr"/>
           <a:lstStyle/>
           <a:p>
-            <a:pPr algn="ctr" indent="0" marL="0">
+            <a:pPr marL="0" indent="0" algn="ctr">
               <a:buNone/>
             </a:pPr>
             <a:r>
-              <a:rPr lang="en-US" sz="1400" b="1" spc="100" kern="0" dirty="0">
+              <a:rPr lang="en-US" sz="1400" b="1" kern="0" spc="100" dirty="0">
                 <a:solidFill>
                   <a:srgbClr val="FFFFFF"/>
                 </a:solidFill>
@@ -11947,7 +11794,7 @@
           <a:bodyPr wrap="square" lIns="0" tIns="0" rIns="0" bIns="0" rtlCol="0" anchor="ctr"/>
           <a:lstStyle/>
           <a:p>
-            <a:pPr indent="0" marL="0">
+            <a:pPr marL="0" indent="0">
               <a:buNone/>
             </a:pPr>
             <a:r>
@@ -11986,7 +11833,7 @@
           <a:bodyPr wrap="square" lIns="0" tIns="0" rIns="0" bIns="0" rtlCol="0" anchor="t"/>
           <a:lstStyle/>
           <a:p>
-            <a:pPr algn="l" indent="0" marL="0">
+            <a:pPr marL="0" indent="0" algn="l">
               <a:lnSpc>
                 <a:spcPct val="108000"/>
               </a:lnSpc>
@@ -12028,7 +11875,7 @@
           <a:bodyPr wrap="square" lIns="0" tIns="0" rIns="0" bIns="0" rtlCol="0" anchor="ctr"/>
           <a:lstStyle/>
           <a:p>
-            <a:pPr indent="0" marL="0">
+            <a:pPr marL="0" indent="0">
               <a:buNone/>
             </a:pPr>
             <a:r>
@@ -12062,6 +11909,7 @@
         <a:solidFill>
           <a:srgbClr val="F5F7FB"/>
         </a:solidFill>
+        <a:effectLst/>
       </p:bgPr>
     </p:bg>
     <p:spTree>
@@ -12126,11 +11974,11 @@
           <a:bodyPr wrap="square" lIns="0" tIns="0" rIns="0" bIns="0" rtlCol="0" anchor="ctr"/>
           <a:lstStyle/>
           <a:p>
-            <a:pPr algn="ctr" indent="0" marL="0">
+            <a:pPr marL="0" indent="0" algn="ctr">
               <a:buNone/>
             </a:pPr>
             <a:r>
-              <a:rPr lang="en-US" sz="1150" b="1" spc="100" kern="0" dirty="0">
+              <a:rPr lang="en-US" sz="1150" b="1" kern="0" spc="100" dirty="0">
                 <a:solidFill>
                   <a:srgbClr val="FFFFFF"/>
                 </a:solidFill>
@@ -12165,7 +12013,7 @@
           <a:bodyPr wrap="square" lIns="0" tIns="0" rIns="0" bIns="0" rtlCol="0" anchor="ctr"/>
           <a:lstStyle/>
           <a:p>
-            <a:pPr indent="0" marL="0">
+            <a:pPr marL="0" indent="0">
               <a:buNone/>
             </a:pPr>
             <a:r>
@@ -12204,7 +12052,7 @@
           <a:bodyPr wrap="square" lIns="0" tIns="0" rIns="0" bIns="0" rtlCol="0" anchor="ctr"/>
           <a:lstStyle/>
           <a:p>
-            <a:pPr indent="0" marL="0">
+            <a:pPr marL="0" indent="0">
               <a:buNone/>
             </a:pPr>
             <a:r>
@@ -12297,11 +12145,11 @@
           <a:bodyPr wrap="square" lIns="0" tIns="0" rIns="0" bIns="0" rtlCol="0" anchor="ctr"/>
           <a:lstStyle/>
           <a:p>
-            <a:pPr algn="ctr" indent="0" marL="0">
+            <a:pPr marL="0" indent="0" algn="ctr">
               <a:buNone/>
             </a:pPr>
             <a:r>
-              <a:rPr lang="en-US" sz="1250" b="1" spc="100" kern="0" dirty="0">
+              <a:rPr lang="en-US" sz="1250" b="1" kern="0" spc="100" dirty="0">
                 <a:solidFill>
                   <a:srgbClr val="FFFFFF"/>
                 </a:solidFill>
@@ -12336,7 +12184,7 @@
           <a:bodyPr wrap="square" lIns="0" tIns="0" rIns="0" bIns="0" rtlCol="0" anchor="ctr"/>
           <a:lstStyle/>
           <a:p>
-            <a:pPr indent="0" marL="0">
+            <a:pPr marL="0" indent="0">
               <a:buNone/>
             </a:pPr>
             <a:r>
@@ -12375,7 +12223,7 @@
           <a:bodyPr wrap="square" lIns="0" tIns="0" rIns="0" bIns="0" rtlCol="0" anchor="ctr"/>
           <a:lstStyle/>
           <a:p>
-            <a:pPr algn="l" indent="0" marL="0">
+            <a:pPr marL="0" indent="0" algn="l">
               <a:lnSpc>
                 <a:spcPct val="108000"/>
               </a:lnSpc>
@@ -12417,7 +12265,7 @@
           <a:bodyPr wrap="square" lIns="0" tIns="0" rIns="0" bIns="0" rtlCol="0" anchor="ctr"/>
           <a:lstStyle/>
           <a:p>
-            <a:pPr indent="0" marL="0">
+            <a:pPr marL="0" indent="0">
               <a:buNone/>
             </a:pPr>
             <a:r>
@@ -12510,11 +12358,11 @@
           <a:bodyPr wrap="square" lIns="0" tIns="0" rIns="0" bIns="0" rtlCol="0" anchor="ctr"/>
           <a:lstStyle/>
           <a:p>
-            <a:pPr algn="ctr" indent="0" marL="0">
+            <a:pPr marL="0" indent="0" algn="ctr">
               <a:buNone/>
             </a:pPr>
             <a:r>
-              <a:rPr lang="en-US" sz="1250" b="1" spc="100" kern="0" dirty="0">
+              <a:rPr lang="en-US" sz="1250" b="1" kern="0" spc="100" dirty="0">
                 <a:solidFill>
                   <a:srgbClr val="FFFFFF"/>
                 </a:solidFill>
@@ -12549,7 +12397,7 @@
           <a:bodyPr wrap="square" lIns="0" tIns="0" rIns="0" bIns="0" rtlCol="0" anchor="ctr"/>
           <a:lstStyle/>
           <a:p>
-            <a:pPr indent="0" marL="0">
+            <a:pPr marL="0" indent="0">
               <a:buNone/>
             </a:pPr>
             <a:r>
@@ -12588,7 +12436,7 @@
           <a:bodyPr wrap="square" lIns="0" tIns="0" rIns="0" bIns="0" rtlCol="0" anchor="ctr"/>
           <a:lstStyle/>
           <a:p>
-            <a:pPr algn="l" indent="0" marL="0">
+            <a:pPr marL="0" indent="0" algn="l">
               <a:lnSpc>
                 <a:spcPct val="108000"/>
               </a:lnSpc>
@@ -12630,7 +12478,7 @@
           <a:bodyPr wrap="square" lIns="0" tIns="0" rIns="0" bIns="0" rtlCol="0" anchor="ctr"/>
           <a:lstStyle/>
           <a:p>
-            <a:pPr indent="0" marL="0">
+            <a:pPr marL="0" indent="0">
               <a:buNone/>
             </a:pPr>
             <a:r>
@@ -12723,11 +12571,11 @@
           <a:bodyPr wrap="square" lIns="0" tIns="0" rIns="0" bIns="0" rtlCol="0" anchor="ctr"/>
           <a:lstStyle/>
           <a:p>
-            <a:pPr algn="ctr" indent="0" marL="0">
+            <a:pPr marL="0" indent="0" algn="ctr">
               <a:buNone/>
             </a:pPr>
             <a:r>
-              <a:rPr lang="en-US" sz="1250" b="1" spc="100" kern="0" dirty="0">
+              <a:rPr lang="en-US" sz="1250" b="1" kern="0" spc="100" dirty="0">
                 <a:solidFill>
                   <a:srgbClr val="FFFFFF"/>
                 </a:solidFill>
@@ -12762,7 +12610,7 @@
           <a:bodyPr wrap="square" lIns="0" tIns="0" rIns="0" bIns="0" rtlCol="0" anchor="ctr"/>
           <a:lstStyle/>
           <a:p>
-            <a:pPr indent="0" marL="0">
+            <a:pPr marL="0" indent="0">
               <a:buNone/>
             </a:pPr>
             <a:r>
@@ -12801,7 +12649,7 @@
           <a:bodyPr wrap="square" lIns="0" tIns="0" rIns="0" bIns="0" rtlCol="0" anchor="ctr"/>
           <a:lstStyle/>
           <a:p>
-            <a:pPr algn="l" indent="0" marL="0">
+            <a:pPr marL="0" indent="0" algn="l">
               <a:lnSpc>
                 <a:spcPct val="108000"/>
               </a:lnSpc>
@@ -12843,7 +12691,7 @@
           <a:bodyPr wrap="square" lIns="0" tIns="0" rIns="0" bIns="0" rtlCol="0" anchor="ctr"/>
           <a:lstStyle/>
           <a:p>
-            <a:pPr indent="0" marL="0">
+            <a:pPr marL="0" indent="0">
               <a:buNone/>
             </a:pPr>
             <a:r>
@@ -12936,11 +12784,11 @@
           <a:bodyPr wrap="square" lIns="0" tIns="0" rIns="0" bIns="0" rtlCol="0" anchor="ctr"/>
           <a:lstStyle/>
           <a:p>
-            <a:pPr algn="ctr" indent="0" marL="0">
+            <a:pPr marL="0" indent="0" algn="ctr">
               <a:buNone/>
             </a:pPr>
             <a:r>
-              <a:rPr lang="en-US" sz="1250" b="1" spc="100" kern="0" dirty="0">
+              <a:rPr lang="en-US" sz="1250" b="1" kern="0" spc="100" dirty="0">
                 <a:solidFill>
                   <a:srgbClr val="FFFFFF"/>
                 </a:solidFill>
@@ -12975,7 +12823,7 @@
           <a:bodyPr wrap="square" lIns="0" tIns="0" rIns="0" bIns="0" rtlCol="0" anchor="ctr"/>
           <a:lstStyle/>
           <a:p>
-            <a:pPr indent="0" marL="0">
+            <a:pPr marL="0" indent="0">
               <a:buNone/>
             </a:pPr>
             <a:r>
@@ -13014,7 +12862,7 @@
           <a:bodyPr wrap="square" lIns="0" tIns="0" rIns="0" bIns="0" rtlCol="0" anchor="ctr"/>
           <a:lstStyle/>
           <a:p>
-            <a:pPr algn="l" indent="0" marL="0">
+            <a:pPr marL="0" indent="0" algn="l">
               <a:lnSpc>
                 <a:spcPct val="108000"/>
               </a:lnSpc>
@@ -13056,7 +12904,7 @@
           <a:bodyPr wrap="square" lIns="0" tIns="0" rIns="0" bIns="0" rtlCol="0" anchor="ctr"/>
           <a:lstStyle/>
           <a:p>
-            <a:pPr indent="0" marL="0">
+            <a:pPr marL="0" indent="0">
               <a:buNone/>
             </a:pPr>
             <a:r>
@@ -13149,11 +12997,11 @@
           <a:bodyPr wrap="square" lIns="0" tIns="0" rIns="0" bIns="0" rtlCol="0" anchor="ctr"/>
           <a:lstStyle/>
           <a:p>
-            <a:pPr algn="ctr" indent="0" marL="0">
+            <a:pPr marL="0" indent="0" algn="ctr">
               <a:buNone/>
             </a:pPr>
             <a:r>
-              <a:rPr lang="en-US" sz="1250" b="1" spc="100" kern="0" dirty="0">
+              <a:rPr lang="en-US" sz="1250" b="1" kern="0" spc="100" dirty="0">
                 <a:solidFill>
                   <a:srgbClr val="FFFFFF"/>
                 </a:solidFill>
@@ -13188,7 +13036,7 @@
           <a:bodyPr wrap="square" lIns="0" tIns="0" rIns="0" bIns="0" rtlCol="0" anchor="ctr"/>
           <a:lstStyle/>
           <a:p>
-            <a:pPr indent="0" marL="0">
+            <a:pPr marL="0" indent="0">
               <a:buNone/>
             </a:pPr>
             <a:r>
@@ -13227,7 +13075,7 @@
           <a:bodyPr wrap="square" lIns="0" tIns="0" rIns="0" bIns="0" rtlCol="0" anchor="ctr"/>
           <a:lstStyle/>
           <a:p>
-            <a:pPr algn="l" indent="0" marL="0">
+            <a:pPr marL="0" indent="0" algn="l">
               <a:lnSpc>
                 <a:spcPct val="108000"/>
               </a:lnSpc>
@@ -13269,7 +13117,7 @@
           <a:bodyPr wrap="square" lIns="0" tIns="0" rIns="0" bIns="0" rtlCol="0" anchor="ctr"/>
           <a:lstStyle/>
           <a:p>
-            <a:pPr indent="0" marL="0">
+            <a:pPr marL="0" indent="0">
               <a:buNone/>
             </a:pPr>
             <a:r>
@@ -13362,11 +13210,11 @@
           <a:bodyPr wrap="square" lIns="0" tIns="0" rIns="0" bIns="0" rtlCol="0" anchor="ctr"/>
           <a:lstStyle/>
           <a:p>
-            <a:pPr algn="ctr" indent="0" marL="0">
+            <a:pPr marL="0" indent="0" algn="ctr">
               <a:buNone/>
             </a:pPr>
             <a:r>
-              <a:rPr lang="en-US" sz="1250" b="1" spc="100" kern="0" dirty="0">
+              <a:rPr lang="en-US" sz="1250" b="1" kern="0" spc="100" dirty="0">
                 <a:solidFill>
                   <a:srgbClr val="FFFFFF"/>
                 </a:solidFill>
@@ -13401,7 +13249,7 @@
           <a:bodyPr wrap="square" lIns="0" tIns="0" rIns="0" bIns="0" rtlCol="0" anchor="ctr"/>
           <a:lstStyle/>
           <a:p>
-            <a:pPr indent="0" marL="0">
+            <a:pPr marL="0" indent="0">
               <a:buNone/>
             </a:pPr>
             <a:r>
@@ -13440,7 +13288,7 @@
           <a:bodyPr wrap="square" lIns="0" tIns="0" rIns="0" bIns="0" rtlCol="0" anchor="ctr"/>
           <a:lstStyle/>
           <a:p>
-            <a:pPr algn="l" indent="0" marL="0">
+            <a:pPr marL="0" indent="0" algn="l">
               <a:lnSpc>
                 <a:spcPct val="108000"/>
               </a:lnSpc>
@@ -13482,7 +13330,7 @@
           <a:bodyPr wrap="square" lIns="0" tIns="0" rIns="0" bIns="0" rtlCol="0" anchor="ctr"/>
           <a:lstStyle/>
           <a:p>
-            <a:pPr indent="0" marL="0">
+            <a:pPr marL="0" indent="0">
               <a:buNone/>
             </a:pPr>
             <a:r>
@@ -13548,7 +13396,7 @@
           <a:bodyPr wrap="square" lIns="0" tIns="0" rIns="0" bIns="0" rtlCol="0" anchor="ctr"/>
           <a:lstStyle/>
           <a:p>
-            <a:pPr algn="l" indent="0" marL="0">
+            <a:pPr marL="0" indent="0" algn="l">
               <a:lnSpc>
                 <a:spcPct val="108000"/>
               </a:lnSpc>
@@ -13585,6 +13433,7 @@
         <a:solidFill>
           <a:srgbClr val="F5F7FB"/>
         </a:solidFill>
+        <a:effectLst/>
       </p:bgPr>
     </p:bg>
     <p:spTree>
@@ -13649,11 +13498,11 @@
           <a:bodyPr wrap="square" lIns="0" tIns="0" rIns="0" bIns="0" rtlCol="0" anchor="ctr"/>
           <a:lstStyle/>
           <a:p>
-            <a:pPr algn="ctr" indent="0" marL="0">
+            <a:pPr marL="0" indent="0" algn="ctr">
               <a:buNone/>
             </a:pPr>
             <a:r>
-              <a:rPr lang="en-US" sz="1150" b="1" spc="100" kern="0" dirty="0">
+              <a:rPr lang="en-US" sz="1150" b="1" kern="0" spc="100" dirty="0">
                 <a:solidFill>
                   <a:srgbClr val="FFFFFF"/>
                 </a:solidFill>
@@ -13688,7 +13537,7 @@
           <a:bodyPr wrap="square" lIns="0" tIns="0" rIns="0" bIns="0" rtlCol="0" anchor="ctr"/>
           <a:lstStyle/>
           <a:p>
-            <a:pPr indent="0" marL="0">
+            <a:pPr marL="0" indent="0">
               <a:buNone/>
             </a:pPr>
             <a:r>
@@ -13727,7 +13576,7 @@
           <a:bodyPr wrap="square" lIns="0" tIns="0" rIns="0" bIns="0" rtlCol="0" anchor="ctr"/>
           <a:lstStyle/>
           <a:p>
-            <a:pPr indent="0" marL="0">
+            <a:pPr marL="0" indent="0">
               <a:buNone/>
             </a:pPr>
             <a:r>
@@ -13820,11 +13669,11 @@
           <a:bodyPr wrap="square" lIns="0" tIns="0" rIns="0" bIns="0" rtlCol="0" anchor="ctr"/>
           <a:lstStyle/>
           <a:p>
-            <a:pPr algn="ctr" indent="0" marL="0">
+            <a:pPr marL="0" indent="0" algn="ctr">
               <a:buNone/>
             </a:pPr>
             <a:r>
-              <a:rPr lang="en-US" sz="1250" b="1" spc="100" kern="0" dirty="0">
+              <a:rPr lang="en-US" sz="1250" b="1" kern="0" spc="100" dirty="0">
                 <a:solidFill>
                   <a:srgbClr val="FFFFFF"/>
                 </a:solidFill>
@@ -13859,7 +13708,7 @@
           <a:bodyPr wrap="square" lIns="0" tIns="0" rIns="0" bIns="0" rtlCol="0" anchor="ctr"/>
           <a:lstStyle/>
           <a:p>
-            <a:pPr indent="0" marL="0">
+            <a:pPr marL="0" indent="0">
               <a:buNone/>
             </a:pPr>
             <a:r>
@@ -13898,7 +13747,7 @@
           <a:bodyPr wrap="square" lIns="0" tIns="0" rIns="0" bIns="0" rtlCol="0" anchor="ctr"/>
           <a:lstStyle/>
           <a:p>
-            <a:pPr indent="0" marL="0">
+            <a:pPr marL="0" indent="0">
               <a:buNone/>
             </a:pPr>
             <a:r>
@@ -13937,7 +13786,7 @@
           <a:bodyPr wrap="square" lIns="0" tIns="0" rIns="0" bIns="0" rtlCol="0" anchor="ctr"/>
           <a:lstStyle/>
           <a:p>
-            <a:pPr algn="l" indent="0" marL="0">
+            <a:pPr marL="0" indent="0" algn="l">
               <a:lnSpc>
                 <a:spcPct val="104000"/>
               </a:lnSpc>
@@ -14033,11 +13882,11 @@
           <a:bodyPr wrap="square" lIns="0" tIns="0" rIns="0" bIns="0" rtlCol="0" anchor="ctr"/>
           <a:lstStyle/>
           <a:p>
-            <a:pPr algn="ctr" indent="0" marL="0">
+            <a:pPr marL="0" indent="0" algn="ctr">
               <a:buNone/>
             </a:pPr>
             <a:r>
-              <a:rPr lang="en-US" sz="1250" b="1" spc="100" kern="0" dirty="0">
+              <a:rPr lang="en-US" sz="1250" b="1" kern="0" spc="100" dirty="0">
                 <a:solidFill>
                   <a:srgbClr val="FFFFFF"/>
                 </a:solidFill>
@@ -14072,7 +13921,7 @@
           <a:bodyPr wrap="square" lIns="0" tIns="0" rIns="0" bIns="0" rtlCol="0" anchor="ctr"/>
           <a:lstStyle/>
           <a:p>
-            <a:pPr indent="0" marL="0">
+            <a:pPr marL="0" indent="0">
               <a:buNone/>
             </a:pPr>
             <a:r>
@@ -14111,7 +13960,7 @@
           <a:bodyPr wrap="square" lIns="0" tIns="0" rIns="0" bIns="0" rtlCol="0" anchor="ctr"/>
           <a:lstStyle/>
           <a:p>
-            <a:pPr indent="0" marL="0">
+            <a:pPr marL="0" indent="0">
               <a:buNone/>
             </a:pPr>
             <a:r>
@@ -14150,7 +13999,7 @@
           <a:bodyPr wrap="square" lIns="0" tIns="0" rIns="0" bIns="0" rtlCol="0" anchor="ctr"/>
           <a:lstStyle/>
           <a:p>
-            <a:pPr algn="l" indent="0" marL="0">
+            <a:pPr marL="0" indent="0" algn="l">
               <a:lnSpc>
                 <a:spcPct val="104000"/>
               </a:lnSpc>
@@ -14246,11 +14095,11 @@
           <a:bodyPr wrap="square" lIns="0" tIns="0" rIns="0" bIns="0" rtlCol="0" anchor="ctr"/>
           <a:lstStyle/>
           <a:p>
-            <a:pPr algn="ctr" indent="0" marL="0">
+            <a:pPr marL="0" indent="0" algn="ctr">
               <a:buNone/>
             </a:pPr>
             <a:r>
-              <a:rPr lang="en-US" sz="1250" b="1" spc="100" kern="0" dirty="0">
+              <a:rPr lang="en-US" sz="1250" b="1" kern="0" spc="100" dirty="0">
                 <a:solidFill>
                   <a:srgbClr val="FFFFFF"/>
                 </a:solidFill>
@@ -14285,7 +14134,7 @@
           <a:bodyPr wrap="square" lIns="0" tIns="0" rIns="0" bIns="0" rtlCol="0" anchor="ctr"/>
           <a:lstStyle/>
           <a:p>
-            <a:pPr indent="0" marL="0">
+            <a:pPr marL="0" indent="0">
               <a:buNone/>
             </a:pPr>
             <a:r>
@@ -14324,7 +14173,7 @@
           <a:bodyPr wrap="square" lIns="0" tIns="0" rIns="0" bIns="0" rtlCol="0" anchor="ctr"/>
           <a:lstStyle/>
           <a:p>
-            <a:pPr indent="0" marL="0">
+            <a:pPr marL="0" indent="0">
               <a:buNone/>
             </a:pPr>
             <a:r>
@@ -14363,7 +14212,7 @@
           <a:bodyPr wrap="square" lIns="0" tIns="0" rIns="0" bIns="0" rtlCol="0" anchor="ctr"/>
           <a:lstStyle/>
           <a:p>
-            <a:pPr algn="l" indent="0" marL="0">
+            <a:pPr marL="0" indent="0" algn="l">
               <a:lnSpc>
                 <a:spcPct val="104000"/>
               </a:lnSpc>
@@ -14459,11 +14308,11 @@
           <a:bodyPr wrap="square" lIns="0" tIns="0" rIns="0" bIns="0" rtlCol="0" anchor="ctr"/>
           <a:lstStyle/>
           <a:p>
-            <a:pPr algn="ctr" indent="0" marL="0">
+            <a:pPr marL="0" indent="0" algn="ctr">
               <a:buNone/>
             </a:pPr>
             <a:r>
-              <a:rPr lang="en-US" sz="1250" b="1" spc="100" kern="0" dirty="0">
+              <a:rPr lang="en-US" sz="1250" b="1" kern="0" spc="100" dirty="0">
                 <a:solidFill>
                   <a:srgbClr val="FFFFFF"/>
                 </a:solidFill>
@@ -14498,7 +14347,7 @@
           <a:bodyPr wrap="square" lIns="0" tIns="0" rIns="0" bIns="0" rtlCol="0" anchor="ctr"/>
           <a:lstStyle/>
           <a:p>
-            <a:pPr indent="0" marL="0">
+            <a:pPr marL="0" indent="0">
               <a:buNone/>
             </a:pPr>
             <a:r>
@@ -14537,7 +14386,7 @@
           <a:bodyPr wrap="square" lIns="0" tIns="0" rIns="0" bIns="0" rtlCol="0" anchor="ctr"/>
           <a:lstStyle/>
           <a:p>
-            <a:pPr indent="0" marL="0">
+            <a:pPr marL="0" indent="0">
               <a:buNone/>
             </a:pPr>
             <a:r>
@@ -14576,7 +14425,7 @@
           <a:bodyPr wrap="square" lIns="0" tIns="0" rIns="0" bIns="0" rtlCol="0" anchor="ctr"/>
           <a:lstStyle/>
           <a:p>
-            <a:pPr algn="l" indent="0" marL="0">
+            <a:pPr marL="0" indent="0" algn="l">
               <a:lnSpc>
                 <a:spcPct val="104000"/>
               </a:lnSpc>
@@ -14672,11 +14521,11 @@
           <a:bodyPr wrap="square" lIns="0" tIns="0" rIns="0" bIns="0" rtlCol="0" anchor="ctr"/>
           <a:lstStyle/>
           <a:p>
-            <a:pPr algn="ctr" indent="0" marL="0">
+            <a:pPr marL="0" indent="0" algn="ctr">
               <a:buNone/>
             </a:pPr>
             <a:r>
-              <a:rPr lang="en-US" sz="1250" b="1" spc="100" kern="0" dirty="0">
+              <a:rPr lang="en-US" sz="1250" b="1" kern="0" spc="100" dirty="0">
                 <a:solidFill>
                   <a:srgbClr val="FFFFFF"/>
                 </a:solidFill>
@@ -14711,7 +14560,7 @@
           <a:bodyPr wrap="square" lIns="0" tIns="0" rIns="0" bIns="0" rtlCol="0" anchor="ctr"/>
           <a:lstStyle/>
           <a:p>
-            <a:pPr indent="0" marL="0">
+            <a:pPr marL="0" indent="0">
               <a:buNone/>
             </a:pPr>
             <a:r>
@@ -14750,7 +14599,7 @@
           <a:bodyPr wrap="square" lIns="0" tIns="0" rIns="0" bIns="0" rtlCol="0" anchor="ctr"/>
           <a:lstStyle/>
           <a:p>
-            <a:pPr indent="0" marL="0">
+            <a:pPr marL="0" indent="0">
               <a:buNone/>
             </a:pPr>
             <a:r>
@@ -14789,7 +14638,7 @@
           <a:bodyPr wrap="square" lIns="0" tIns="0" rIns="0" bIns="0" rtlCol="0" anchor="ctr"/>
           <a:lstStyle/>
           <a:p>
-            <a:pPr algn="l" indent="0" marL="0">
+            <a:pPr marL="0" indent="0" algn="l">
               <a:lnSpc>
                 <a:spcPct val="104000"/>
               </a:lnSpc>
@@ -14885,11 +14734,11 @@
           <a:bodyPr wrap="square" lIns="0" tIns="0" rIns="0" bIns="0" rtlCol="0" anchor="ctr"/>
           <a:lstStyle/>
           <a:p>
-            <a:pPr algn="ctr" indent="0" marL="0">
+            <a:pPr marL="0" indent="0" algn="ctr">
               <a:buNone/>
             </a:pPr>
             <a:r>
-              <a:rPr lang="en-US" sz="1250" b="1" spc="100" kern="0" dirty="0">
+              <a:rPr lang="en-US" sz="1250" b="1" kern="0" spc="100" dirty="0">
                 <a:solidFill>
                   <a:srgbClr val="FFFFFF"/>
                 </a:solidFill>
@@ -14924,7 +14773,7 @@
           <a:bodyPr wrap="square" lIns="0" tIns="0" rIns="0" bIns="0" rtlCol="0" anchor="ctr"/>
           <a:lstStyle/>
           <a:p>
-            <a:pPr indent="0" marL="0">
+            <a:pPr marL="0" indent="0">
               <a:buNone/>
             </a:pPr>
             <a:r>
@@ -14963,7 +14812,7 @@
           <a:bodyPr wrap="square" lIns="0" tIns="0" rIns="0" bIns="0" rtlCol="0" anchor="ctr"/>
           <a:lstStyle/>
           <a:p>
-            <a:pPr indent="0" marL="0">
+            <a:pPr marL="0" indent="0">
               <a:buNone/>
             </a:pPr>
             <a:r>
@@ -15002,7 +14851,7 @@
           <a:bodyPr wrap="square" lIns="0" tIns="0" rIns="0" bIns="0" rtlCol="0" anchor="ctr"/>
           <a:lstStyle/>
           <a:p>
-            <a:pPr algn="l" indent="0" marL="0">
+            <a:pPr marL="0" indent="0" algn="l">
               <a:lnSpc>
                 <a:spcPct val="104000"/>
               </a:lnSpc>
@@ -15050,45 +14899,6 @@
           </a:ln>
         </p:spPr>
       </p:sp>
-      <p:sp>
-        <p:nvSpPr>
-          <p:cNvPr id="43" name="Text 41"/>
-          <p:cNvSpPr/>
-          <p:nvPr/>
-        </p:nvSpPr>
-        <p:spPr>
-          <a:xfrm>
-            <a:off x="548640" y="6309360"/>
-            <a:ext cx="11064240" cy="292608"/>
-          </a:xfrm>
-          <a:prstGeom prst="rect">
-            <a:avLst/>
-          </a:prstGeom>
-          <a:noFill/>
-          <a:ln/>
-        </p:spPr>
-        <p:txBody>
-          <a:bodyPr wrap="square" lIns="0" tIns="0" rIns="0" bIns="0" rtlCol="0" anchor="ctr"/>
-          <a:lstStyle/>
-          <a:p>
-            <a:pPr indent="0" marL="0">
-              <a:buNone/>
-            </a:pPr>
-            <a:r>
-              <a:rPr lang="en-US" sz="1050" i="1" dirty="0">
-                <a:solidFill>
-                  <a:srgbClr val="5B6B87"/>
-                </a:solidFill>
-                <a:latin typeface="Calibri" pitchFamily="34" charset="0"/>
-                <a:ea typeface="Calibri" pitchFamily="34" charset="-122"/>
-                <a:cs typeface="Calibri" pitchFamily="34" charset="-120"/>
-              </a:rPr>
-              <a:t>El ejercicio 4.2 no tiene respuesta numérica: se pide elegir un umbral para dos escenarios y justificarlo. Vale la pena leer dos o tres respuestas en voz alta.</a:t>
-            </a:r>
-            <a:endParaRPr lang="en-US" sz="1050" dirty="0"/>
-          </a:p>
-        </p:txBody>
-      </p:sp>
     </p:spTree>
   </p:cSld>
   <p:clrMapOvr>
@@ -15105,6 +14915,7 @@
         <a:solidFill>
           <a:srgbClr val="0A2559"/>
         </a:solidFill>
+        <a:effectLst/>
       </p:bgPr>
     </p:bg>
     <p:spTree>
@@ -16978,11 +16789,11 @@
           <a:bodyPr wrap="square" lIns="0" tIns="0" rIns="0" bIns="0" rtlCol="0" anchor="ctr"/>
           <a:lstStyle/>
           <a:p>
-            <a:pPr algn="ctr" indent="0" marL="0">
+            <a:pPr marL="0" indent="0" algn="ctr">
               <a:buNone/>
             </a:pPr>
             <a:r>
-              <a:rPr lang="en-US" sz="1150" b="1" spc="100" kern="0" dirty="0">
+              <a:rPr lang="en-US" sz="1150" b="1" kern="0" spc="100" dirty="0">
                 <a:solidFill>
                   <a:srgbClr val="FFFFFF"/>
                 </a:solidFill>
@@ -17017,7 +16828,7 @@
           <a:bodyPr wrap="square" lIns="0" tIns="0" rIns="0" bIns="0" rtlCol="0" anchor="ctr"/>
           <a:lstStyle/>
           <a:p>
-            <a:pPr indent="0" marL="0">
+            <a:pPr marL="0" indent="0">
               <a:buNone/>
             </a:pPr>
             <a:r>
@@ -17056,7 +16867,7 @@
           <a:bodyPr wrap="square" lIns="0" tIns="0" rIns="0" bIns="0" rtlCol="0" anchor="t"/>
           <a:lstStyle/>
           <a:p>
-            <a:pPr algn="l" indent="0" marL="0">
+            <a:pPr marL="0" indent="0" algn="l">
               <a:lnSpc>
                 <a:spcPct val="108000"/>
               </a:lnSpc>
@@ -17152,7 +16963,7 @@
           <a:bodyPr wrap="square" lIns="0" tIns="0" rIns="0" bIns="0" rtlCol="0" anchor="ctr"/>
           <a:lstStyle/>
           <a:p>
-            <a:pPr indent="0" marL="0">
+            <a:pPr marL="0" indent="0">
               <a:buNone/>
             </a:pPr>
             <a:r>
@@ -17191,7 +17002,7 @@
           <a:bodyPr wrap="square" lIns="0" tIns="0" rIns="0" bIns="0" rtlCol="0" anchor="ctr"/>
           <a:lstStyle/>
           <a:p>
-            <a:pPr indent="0" marL="0">
+            <a:pPr marL="0" indent="0">
               <a:buNone/>
             </a:pPr>
             <a:r>
@@ -17230,7 +17041,7 @@
           <a:bodyPr wrap="square" lIns="0" tIns="0" rIns="0" bIns="0" rtlCol="0" anchor="ctr"/>
           <a:lstStyle/>
           <a:p>
-            <a:pPr indent="0" marL="0">
+            <a:pPr marL="0" indent="0">
               <a:buNone/>
             </a:pPr>
             <a:r>
@@ -17269,7 +17080,7 @@
           <a:bodyPr wrap="square" lIns="0" tIns="0" rIns="0" bIns="0" rtlCol="0" anchor="ctr"/>
           <a:lstStyle/>
           <a:p>
-            <a:pPr indent="0" marL="0">
+            <a:pPr marL="0" indent="0">
               <a:buNone/>
             </a:pPr>
             <a:r>
@@ -17308,7 +17119,7 @@
           <a:bodyPr wrap="square" lIns="0" tIns="0" rIns="0" bIns="0" rtlCol="0" anchor="ctr"/>
           <a:lstStyle/>
           <a:p>
-            <a:pPr indent="0" marL="0">
+            <a:pPr marL="0" indent="0">
               <a:buNone/>
             </a:pPr>
             <a:r>
@@ -17347,7 +17158,7 @@
           <a:bodyPr wrap="square" lIns="0" tIns="0" rIns="0" bIns="0" rtlCol="0" anchor="ctr"/>
           <a:lstStyle/>
           <a:p>
-            <a:pPr indent="0" marL="0">
+            <a:pPr marL="0" indent="0">
               <a:buNone/>
             </a:pPr>
             <a:r>
@@ -17386,7 +17197,7 @@
           <a:bodyPr wrap="square" lIns="0" tIns="0" rIns="0" bIns="0" rtlCol="0" anchor="ctr"/>
           <a:lstStyle/>
           <a:p>
-            <a:pPr indent="0" marL="0">
+            <a:pPr marL="0" indent="0">
               <a:buNone/>
             </a:pPr>
             <a:r>
@@ -17425,7 +17236,7 @@
           <a:bodyPr wrap="square" lIns="0" tIns="0" rIns="0" bIns="0" rtlCol="0" anchor="ctr"/>
           <a:lstStyle/>
           <a:p>
-            <a:pPr indent="0" marL="0">
+            <a:pPr marL="0" indent="0">
               <a:buNone/>
             </a:pPr>
             <a:r>
@@ -17464,7 +17275,7 @@
           <a:bodyPr wrap="square" lIns="0" tIns="0" rIns="0" bIns="0" rtlCol="0" anchor="ctr"/>
           <a:lstStyle/>
           <a:p>
-            <a:pPr indent="0" marL="0">
+            <a:pPr marL="0" indent="0">
               <a:buNone/>
             </a:pPr>
             <a:r>
@@ -17503,7 +17314,7 @@
           <a:bodyPr wrap="square" lIns="0" tIns="0" rIns="0" bIns="0" rtlCol="0" anchor="ctr"/>
           <a:lstStyle/>
           <a:p>
-            <a:pPr indent="0" marL="0">
+            <a:pPr marL="0" indent="0">
               <a:buNone/>
             </a:pPr>
             <a:r>
@@ -17542,7 +17353,7 @@
           <a:bodyPr wrap="square" lIns="0" tIns="0" rIns="0" bIns="0" rtlCol="0" anchor="ctr"/>
           <a:lstStyle/>
           <a:p>
-            <a:pPr indent="0" marL="0">
+            <a:pPr marL="0" indent="0">
               <a:buNone/>
             </a:pPr>
             <a:r>
@@ -17581,7 +17392,7 @@
           <a:bodyPr wrap="square" lIns="0" tIns="0" rIns="0" bIns="0" rtlCol="0" anchor="ctr"/>
           <a:lstStyle/>
           <a:p>
-            <a:pPr indent="0" marL="0">
+            <a:pPr marL="0" indent="0">
               <a:buNone/>
             </a:pPr>
             <a:r>
@@ -17620,7 +17431,7 @@
           <a:bodyPr wrap="square" lIns="0" tIns="0" rIns="0" bIns="0" rtlCol="0" anchor="ctr"/>
           <a:lstStyle/>
           <a:p>
-            <a:pPr indent="0" marL="0">
+            <a:pPr marL="0" indent="0">
               <a:buNone/>
             </a:pPr>
             <a:r>
@@ -17713,7 +17524,7 @@
           <a:bodyPr wrap="square" lIns="0" tIns="0" rIns="0" bIns="0" rtlCol="0" anchor="ctr"/>
           <a:lstStyle/>
           <a:p>
-            <a:pPr indent="0" marL="0">
+            <a:pPr marL="0" indent="0">
               <a:buNone/>
             </a:pPr>
             <a:r>
@@ -17752,7 +17563,7 @@
           <a:bodyPr wrap="square" lIns="0" tIns="0" rIns="0" bIns="0" rtlCol="0" anchor="t"/>
           <a:lstStyle/>
           <a:p>
-            <a:pPr algn="l" indent="0" marL="0">
+            <a:pPr marL="0" indent="0" algn="l">
               <a:lnSpc>
                 <a:spcPct val="110000"/>
               </a:lnSpc>
@@ -17772,7 +17583,7 @@
             <a:endParaRPr lang="en-US" sz="1100" dirty="0"/>
           </a:p>
           <a:p>
-            <a:pPr algn="l" indent="0" marL="0">
+            <a:pPr marL="0" indent="0" algn="l">
               <a:lnSpc>
                 <a:spcPct val="110000"/>
               </a:lnSpc>
@@ -17781,7 +17592,7 @@
             <a:endParaRPr lang="en-US" sz="1100" dirty="0"/>
           </a:p>
           <a:p>
-            <a:pPr algn="l" indent="0" marL="0">
+            <a:pPr marL="0" indent="0" algn="l">
               <a:lnSpc>
                 <a:spcPct val="110000"/>
               </a:lnSpc>
@@ -17801,7 +17612,7 @@
             <a:endParaRPr lang="en-US" sz="1100" dirty="0"/>
           </a:p>
           <a:p>
-            <a:pPr algn="l" indent="0" marL="0">
+            <a:pPr marL="0" indent="0" algn="l">
               <a:lnSpc>
                 <a:spcPct val="110000"/>
               </a:lnSpc>
@@ -17810,7 +17621,7 @@
             <a:endParaRPr lang="en-US" sz="1100" dirty="0"/>
           </a:p>
           <a:p>
-            <a:pPr algn="l" indent="0" marL="0">
+            <a:pPr marL="0" indent="0" algn="l">
               <a:lnSpc>
                 <a:spcPct val="110000"/>
               </a:lnSpc>
@@ -17906,7 +17717,7 @@
           <a:bodyPr wrap="square" lIns="0" tIns="0" rIns="0" bIns="0" rtlCol="0" anchor="ctr"/>
           <a:lstStyle/>
           <a:p>
-            <a:pPr indent="0" marL="0">
+            <a:pPr marL="0" indent="0">
               <a:buNone/>
             </a:pPr>
             <a:r>
@@ -17945,7 +17756,7 @@
           <a:bodyPr wrap="square" lIns="0" tIns="0" rIns="0" bIns="0" rtlCol="0" anchor="t"/>
           <a:lstStyle/>
           <a:p>
-            <a:pPr algn="l" indent="0" marL="0">
+            <a:pPr marL="0" indent="0" algn="l">
               <a:lnSpc>
                 <a:spcPct val="110000"/>
               </a:lnSpc>
@@ -17987,7 +17798,7 @@
           <a:bodyPr wrap="square" lIns="0" tIns="0" rIns="0" bIns="0" rtlCol="0" anchor="ctr"/>
           <a:lstStyle/>
           <a:p>
-            <a:pPr indent="0" marL="0">
+            <a:pPr marL="0" indent="0">
               <a:buNone/>
             </a:pPr>
             <a:r>
@@ -18021,6 +17832,7 @@
         <a:solidFill>
           <a:srgbClr val="F5F7FB"/>
         </a:solidFill>
+        <a:effectLst/>
       </p:bgPr>
     </p:bg>
     <p:spTree>
@@ -18085,11 +17897,11 @@
           <a:bodyPr wrap="square" lIns="0" tIns="0" rIns="0" bIns="0" rtlCol="0" anchor="ctr"/>
           <a:lstStyle/>
           <a:p>
-            <a:pPr algn="ctr" indent="0" marL="0">
+            <a:pPr marL="0" indent="0" algn="ctr">
               <a:buNone/>
             </a:pPr>
             <a:r>
-              <a:rPr lang="en-US" sz="1150" b="1" spc="100" kern="0" dirty="0">
+              <a:rPr lang="en-US" sz="1150" b="1" kern="0" spc="100" dirty="0">
                 <a:solidFill>
                   <a:srgbClr val="FFFFFF"/>
                 </a:solidFill>
@@ -18124,7 +17936,7 @@
           <a:bodyPr wrap="square" lIns="0" tIns="0" rIns="0" bIns="0" rtlCol="0" anchor="ctr"/>
           <a:lstStyle/>
           <a:p>
-            <a:pPr indent="0" marL="0">
+            <a:pPr marL="0" indent="0">
               <a:buNone/>
             </a:pPr>
             <a:r>
@@ -18163,7 +17975,7 @@
           <a:bodyPr wrap="square" lIns="0" tIns="0" rIns="0" bIns="0" rtlCol="0" anchor="ctr"/>
           <a:lstStyle/>
           <a:p>
-            <a:pPr indent="0" marL="0">
+            <a:pPr marL="0" indent="0">
               <a:buNone/>
             </a:pPr>
             <a:r>
@@ -18183,7 +17995,7 @@
       </p:sp>
       <p:graphicFrame>
         <p:nvGraphicFramePr>
-          <p:cNvPr id="3" name="Table 0"/>
+          <p:cNvPr id="6" name="Table 0"/>
           <p:cNvGraphicFramePr>
             <a:graphicFrameLocks noGrp="1"/>
           </p:cNvGraphicFramePr>
@@ -18197,16 +18009,34 @@
         </p:nvGraphicFramePr>
         <p:xfrm>
           <a:off x="548640" y="2057400"/>
-          <a:ext cx="11091672" cy="914400"/>
+          <a:ext cx="11091672" cy="2743200"/>
         </p:xfrm>
         <a:graphic>
           <a:graphicData uri="http://schemas.openxmlformats.org/drawingml/2006/table">
             <a:tbl>
               <a:tblPr/>
               <a:tblGrid>
-                <a:gridCol w="2377440"/>
-                <a:gridCol w="4206240"/>
-                <a:gridCol w="4507992"/>
+                <a:gridCol w="2377440">
+                  <a:extLst>
+                    <a:ext uri="{9D8B030D-6E8A-4147-A177-3AD203B41FA5}">
+                      <a16:colId xmlns:a16="http://schemas.microsoft.com/office/drawing/2014/main" val="20000"/>
+                    </a:ext>
+                  </a:extLst>
+                </a:gridCol>
+                <a:gridCol w="4206240">
+                  <a:extLst>
+                    <a:ext uri="{9D8B030D-6E8A-4147-A177-3AD203B41FA5}">
+                      <a16:colId xmlns:a16="http://schemas.microsoft.com/office/drawing/2014/main" val="20001"/>
+                    </a:ext>
+                  </a:extLst>
+                </a:gridCol>
+                <a:gridCol w="4507992">
+                  <a:extLst>
+                    <a:ext uri="{9D8B030D-6E8A-4147-A177-3AD203B41FA5}">
+                      <a16:colId xmlns:a16="http://schemas.microsoft.com/office/drawing/2014/main" val="20002"/>
+                    </a:ext>
+                  </a:extLst>
+                </a:gridCol>
               </a:tblGrid>
               <a:tr h="457200">
                 <a:tc>
@@ -18214,7 +18044,7 @@
                     <a:bodyPr/>
                     <a:lstStyle/>
                     <a:p>
-                      <a:pPr indent="0" marL="0">
+                      <a:pPr marL="0" indent="0">
                         <a:buNone/>
                       </a:pPr>
                       <a:endParaRPr lang="en-US" sz="1150" dirty="0">
@@ -18271,7 +18101,7 @@
                     <a:bodyPr/>
                     <a:lstStyle/>
                     <a:p>
-                      <a:pPr indent="0" marL="0">
+                      <a:pPr marL="0" indent="0">
                         <a:buNone/>
                       </a:pPr>
                       <a:r>
@@ -18339,7 +18169,7 @@
                     <a:bodyPr/>
                     <a:lstStyle/>
                     <a:p>
-                      <a:pPr indent="0" marL="0">
+                      <a:pPr marL="0" indent="0">
                         <a:buNone/>
                       </a:pPr>
                       <a:r>
@@ -18402,6 +18232,11 @@
                     </a:solidFill>
                   </a:tcPr>
                 </a:tc>
+                <a:extLst>
+                  <a:ext uri="{0D108BD9-81ED-4DB2-BD59-A6C34878D82A}">
+                    <a16:rowId xmlns:a16="http://schemas.microsoft.com/office/drawing/2014/main" val="10000"/>
+                  </a:ext>
+                </a:extLst>
               </a:tr>
               <a:tr h="457200">
                 <a:tc>
@@ -18409,7 +18244,7 @@
                     <a:bodyPr/>
                     <a:lstStyle/>
                     <a:p>
-                      <a:pPr indent="0" marL="0">
+                      <a:pPr marL="0" indent="0">
                         <a:buNone/>
                       </a:pPr>
                       <a:r>
@@ -18477,7 +18312,7 @@
                     <a:bodyPr/>
                     <a:lstStyle/>
                     <a:p>
-                      <a:pPr indent="0" marL="0">
+                      <a:pPr marL="0" indent="0">
                         <a:buNone/>
                       </a:pPr>
                       <a:r>
@@ -18545,7 +18380,7 @@
                     <a:bodyPr/>
                     <a:lstStyle/>
                     <a:p>
-                      <a:pPr indent="0" marL="0">
+                      <a:pPr marL="0" indent="0">
                         <a:buNone/>
                       </a:pPr>
                       <a:r>
@@ -18608,6 +18443,11 @@
                     </a:solidFill>
                   </a:tcPr>
                 </a:tc>
+                <a:extLst>
+                  <a:ext uri="{0D108BD9-81ED-4DB2-BD59-A6C34878D82A}">
+                    <a16:rowId xmlns:a16="http://schemas.microsoft.com/office/drawing/2014/main" val="10001"/>
+                  </a:ext>
+                </a:extLst>
               </a:tr>
               <a:tr h="457200">
                 <a:tc>
@@ -18615,7 +18455,7 @@
                     <a:bodyPr/>
                     <a:lstStyle/>
                     <a:p>
-                      <a:pPr indent="0" marL="0">
+                      <a:pPr marL="0" indent="0">
                         <a:buNone/>
                       </a:pPr>
                       <a:r>
@@ -18683,7 +18523,7 @@
                     <a:bodyPr/>
                     <a:lstStyle/>
                     <a:p>
-                      <a:pPr indent="0" marL="0">
+                      <a:pPr marL="0" indent="0">
                         <a:buNone/>
                       </a:pPr>
                       <a:r>
@@ -18751,7 +18591,7 @@
                     <a:bodyPr/>
                     <a:lstStyle/>
                     <a:p>
-                      <a:pPr indent="0" marL="0">
+                      <a:pPr marL="0" indent="0">
                         <a:buNone/>
                       </a:pPr>
                       <a:r>
@@ -18814,6 +18654,11 @@
                     </a:solidFill>
                   </a:tcPr>
                 </a:tc>
+                <a:extLst>
+                  <a:ext uri="{0D108BD9-81ED-4DB2-BD59-A6C34878D82A}">
+                    <a16:rowId xmlns:a16="http://schemas.microsoft.com/office/drawing/2014/main" val="10002"/>
+                  </a:ext>
+                </a:extLst>
               </a:tr>
               <a:tr h="457200">
                 <a:tc>
@@ -18821,7 +18666,7 @@
                     <a:bodyPr/>
                     <a:lstStyle/>
                     <a:p>
-                      <a:pPr indent="0" marL="0">
+                      <a:pPr marL="0" indent="0">
                         <a:buNone/>
                       </a:pPr>
                       <a:r>
@@ -18889,7 +18734,7 @@
                     <a:bodyPr/>
                     <a:lstStyle/>
                     <a:p>
-                      <a:pPr indent="0" marL="0">
+                      <a:pPr marL="0" indent="0">
                         <a:buNone/>
                       </a:pPr>
                       <a:r>
@@ -18957,7 +18802,7 @@
                     <a:bodyPr/>
                     <a:lstStyle/>
                     <a:p>
-                      <a:pPr indent="0" marL="0">
+                      <a:pPr marL="0" indent="0">
                         <a:buNone/>
                       </a:pPr>
                       <a:r>
@@ -19020,6 +18865,11 @@
                     </a:solidFill>
                   </a:tcPr>
                 </a:tc>
+                <a:extLst>
+                  <a:ext uri="{0D108BD9-81ED-4DB2-BD59-A6C34878D82A}">
+                    <a16:rowId xmlns:a16="http://schemas.microsoft.com/office/drawing/2014/main" val="10003"/>
+                  </a:ext>
+                </a:extLst>
               </a:tr>
               <a:tr h="457200">
                 <a:tc>
@@ -19027,7 +18877,7 @@
                     <a:bodyPr/>
                     <a:lstStyle/>
                     <a:p>
-                      <a:pPr indent="0" marL="0">
+                      <a:pPr marL="0" indent="0">
                         <a:buNone/>
                       </a:pPr>
                       <a:r>
@@ -19095,7 +18945,7 @@
                     <a:bodyPr/>
                     <a:lstStyle/>
                     <a:p>
-                      <a:pPr indent="0" marL="0">
+                      <a:pPr marL="0" indent="0">
                         <a:buNone/>
                       </a:pPr>
                       <a:r>
@@ -19163,7 +19013,7 @@
                     <a:bodyPr/>
                     <a:lstStyle/>
                     <a:p>
-                      <a:pPr indent="0" marL="0">
+                      <a:pPr marL="0" indent="0">
                         <a:buNone/>
                       </a:pPr>
                       <a:r>
@@ -19226,6 +19076,11 @@
                     </a:solidFill>
                   </a:tcPr>
                 </a:tc>
+                <a:extLst>
+                  <a:ext uri="{0D108BD9-81ED-4DB2-BD59-A6C34878D82A}">
+                    <a16:rowId xmlns:a16="http://schemas.microsoft.com/office/drawing/2014/main" val="10004"/>
+                  </a:ext>
+                </a:extLst>
               </a:tr>
               <a:tr h="457200">
                 <a:tc>
@@ -19233,7 +19088,7 @@
                     <a:bodyPr/>
                     <a:lstStyle/>
                     <a:p>
-                      <a:pPr indent="0" marL="0">
+                      <a:pPr marL="0" indent="0">
                         <a:buNone/>
                       </a:pPr>
                       <a:r>
@@ -19301,7 +19156,7 @@
                     <a:bodyPr/>
                     <a:lstStyle/>
                     <a:p>
-                      <a:pPr indent="0" marL="0">
+                      <a:pPr marL="0" indent="0">
                         <a:buNone/>
                       </a:pPr>
                       <a:r>
@@ -19369,7 +19224,7 @@
                     <a:bodyPr/>
                     <a:lstStyle/>
                     <a:p>
-                      <a:pPr indent="0" marL="0">
+                      <a:pPr marL="0" indent="0">
                         <a:buNone/>
                       </a:pPr>
                       <a:r>
@@ -19432,6 +19287,11 @@
                     </a:solidFill>
                   </a:tcPr>
                 </a:tc>
+                <a:extLst>
+                  <a:ext uri="{0D108BD9-81ED-4DB2-BD59-A6C34878D82A}">
+                    <a16:rowId xmlns:a16="http://schemas.microsoft.com/office/drawing/2014/main" val="10005"/>
+                  </a:ext>
+                </a:extLst>
               </a:tr>
             </a:tbl>
           </a:graphicData>
@@ -19445,7 +19305,7 @@
         </p:nvSpPr>
         <p:spPr>
           <a:xfrm>
-            <a:off x="548640" y="4709160"/>
+            <a:off x="562356" y="4831147"/>
             <a:ext cx="5468112" cy="1481328"/>
           </a:xfrm>
           <a:prstGeom prst="roundRect">
@@ -19512,7 +19372,7 @@
           <a:bodyPr wrap="square" lIns="0" tIns="0" rIns="0" bIns="0" rtlCol="0" anchor="ctr"/>
           <a:lstStyle/>
           <a:p>
-            <a:pPr indent="0" marL="0">
+            <a:pPr marL="0" indent="0">
               <a:buNone/>
             </a:pPr>
             <a:r>
@@ -19551,7 +19411,7 @@
           <a:bodyPr wrap="square" lIns="0" tIns="0" rIns="0" bIns="0" rtlCol="0" anchor="t"/>
           <a:lstStyle/>
           <a:p>
-            <a:pPr algn="l" indent="0" marL="0">
+            <a:pPr marL="0" indent="0" algn="l">
               <a:lnSpc>
                 <a:spcPct val="112000"/>
               </a:lnSpc>
@@ -19571,7 +19431,7 @@
             <a:endParaRPr lang="en-US" sz="1200" dirty="0"/>
           </a:p>
           <a:p>
-            <a:pPr algn="l" indent="0" marL="0">
+            <a:pPr marL="0" indent="0" algn="l">
               <a:lnSpc>
                 <a:spcPct val="112000"/>
               </a:lnSpc>
@@ -19580,7 +19440,7 @@
             <a:endParaRPr lang="en-US" sz="1200" dirty="0"/>
           </a:p>
           <a:p>
-            <a:pPr algn="l" indent="0" marL="0">
+            <a:pPr marL="0" indent="0" algn="l">
               <a:lnSpc>
                 <a:spcPct val="112000"/>
               </a:lnSpc>
@@ -19609,7 +19469,7 @@
         </p:nvSpPr>
         <p:spPr>
           <a:xfrm>
-            <a:off x="6172200" y="4709160"/>
+            <a:off x="6161534" y="4841195"/>
             <a:ext cx="5468112" cy="1481328"/>
           </a:xfrm>
           <a:prstGeom prst="roundRect">
@@ -19676,7 +19536,7 @@
           <a:bodyPr wrap="square" lIns="0" tIns="0" rIns="0" bIns="0" rtlCol="0" anchor="ctr"/>
           <a:lstStyle/>
           <a:p>
-            <a:pPr indent="0" marL="0">
+            <a:pPr marL="0" indent="0">
               <a:buNone/>
             </a:pPr>
             <a:r>
@@ -19715,7 +19575,7 @@
           <a:bodyPr wrap="square" lIns="0" tIns="0" rIns="0" bIns="0" rtlCol="0" anchor="t"/>
           <a:lstStyle/>
           <a:p>
-            <a:pPr algn="l" indent="0" marL="0">
+            <a:pPr marL="0" indent="0" algn="l">
               <a:lnSpc>
                 <a:spcPct val="112000"/>
               </a:lnSpc>
@@ -19735,7 +19595,7 @@
             <a:endParaRPr lang="en-US" sz="1200" dirty="0"/>
           </a:p>
           <a:p>
-            <a:pPr algn="l" indent="0" marL="0">
+            <a:pPr marL="0" indent="0" algn="l">
               <a:lnSpc>
                 <a:spcPct val="112000"/>
               </a:lnSpc>
@@ -19744,7 +19604,7 @@
             <a:endParaRPr lang="en-US" sz="1200" dirty="0"/>
           </a:p>
           <a:p>
-            <a:pPr algn="l" indent="0" marL="0">
+            <a:pPr marL="0" indent="0" algn="l">
               <a:lnSpc>
                 <a:spcPct val="112000"/>
               </a:lnSpc>
@@ -19781,6 +19641,7 @@
         <a:solidFill>
           <a:srgbClr val="F5F7FB"/>
         </a:solidFill>
+        <a:effectLst/>
       </p:bgPr>
     </p:bg>
     <p:spTree>
@@ -19845,11 +19706,11 @@
           <a:bodyPr wrap="square" lIns="0" tIns="0" rIns="0" bIns="0" rtlCol="0" anchor="ctr"/>
           <a:lstStyle/>
           <a:p>
-            <a:pPr algn="ctr" indent="0" marL="0">
+            <a:pPr marL="0" indent="0" algn="ctr">
               <a:buNone/>
             </a:pPr>
             <a:r>
-              <a:rPr lang="en-US" sz="1150" b="1" spc="100" kern="0" dirty="0">
+              <a:rPr lang="en-US" sz="1150" b="1" kern="0" spc="100" dirty="0">
                 <a:solidFill>
                   <a:srgbClr val="FFFFFF"/>
                 </a:solidFill>
@@ -19884,7 +19745,7 @@
           <a:bodyPr wrap="square" lIns="0" tIns="0" rIns="0" bIns="0" rtlCol="0" anchor="ctr"/>
           <a:lstStyle/>
           <a:p>
-            <a:pPr indent="0" marL="0">
+            <a:pPr marL="0" indent="0">
               <a:buNone/>
             </a:pPr>
             <a:r>
@@ -19923,7 +19784,7 @@
           <a:bodyPr wrap="square" lIns="0" tIns="0" rIns="0" bIns="0" rtlCol="0" anchor="ctr"/>
           <a:lstStyle/>
           <a:p>
-            <a:pPr indent="0" marL="0">
+            <a:pPr marL="0" indent="0">
               <a:buNone/>
             </a:pPr>
             <a:r>
@@ -19943,7 +19804,7 @@
       </p:sp>
       <p:graphicFrame>
         <p:nvGraphicFramePr>
-          <p:cNvPr id="4" name="Table 0"/>
+          <p:cNvPr id="6" name="Table 0"/>
           <p:cNvGraphicFramePr>
             <a:graphicFrameLocks noGrp="1"/>
           </p:cNvGraphicFramePr>
@@ -19957,16 +19818,34 @@
         </p:nvGraphicFramePr>
         <p:xfrm>
           <a:off x="548640" y="2011680"/>
-          <a:ext cx="6766560" cy="914400"/>
+          <a:ext cx="6766560" cy="3291840"/>
         </p:xfrm>
         <a:graphic>
           <a:graphicData uri="http://schemas.openxmlformats.org/drawingml/2006/table">
             <a:tbl>
               <a:tblPr/>
               <a:tblGrid>
-                <a:gridCol w="731520"/>
-                <a:gridCol w="4937760"/>
-                <a:gridCol w="1097280"/>
+                <a:gridCol w="731520">
+                  <a:extLst>
+                    <a:ext uri="{9D8B030D-6E8A-4147-A177-3AD203B41FA5}">
+                      <a16:colId xmlns:a16="http://schemas.microsoft.com/office/drawing/2014/main" val="20000"/>
+                    </a:ext>
+                  </a:extLst>
+                </a:gridCol>
+                <a:gridCol w="4937760">
+                  <a:extLst>
+                    <a:ext uri="{9D8B030D-6E8A-4147-A177-3AD203B41FA5}">
+                      <a16:colId xmlns:a16="http://schemas.microsoft.com/office/drawing/2014/main" val="20001"/>
+                    </a:ext>
+                  </a:extLst>
+                </a:gridCol>
+                <a:gridCol w="1097280">
+                  <a:extLst>
+                    <a:ext uri="{9D8B030D-6E8A-4147-A177-3AD203B41FA5}">
+                      <a16:colId xmlns:a16="http://schemas.microsoft.com/office/drawing/2014/main" val="20002"/>
+                    </a:ext>
+                  </a:extLst>
+                </a:gridCol>
               </a:tblGrid>
               <a:tr h="365760">
                 <a:tc>
@@ -19974,7 +19853,7 @@
                     <a:bodyPr/>
                     <a:lstStyle/>
                     <a:p>
-                      <a:pPr indent="0" marL="0">
+                      <a:pPr marL="0" indent="0">
                         <a:buNone/>
                       </a:pPr>
                       <a:r>
@@ -20042,7 +19921,7 @@
                     <a:bodyPr/>
                     <a:lstStyle/>
                     <a:p>
-                      <a:pPr indent="0" marL="0">
+                      <a:pPr marL="0" indent="0">
                         <a:buNone/>
                       </a:pPr>
                       <a:r>
@@ -20110,7 +19989,7 @@
                     <a:bodyPr/>
                     <a:lstStyle/>
                     <a:p>
-                      <a:pPr indent="0" marL="0">
+                      <a:pPr marL="0" indent="0">
                         <a:buNone/>
                       </a:pPr>
                       <a:r>
@@ -20173,6 +20052,11 @@
                     </a:solidFill>
                   </a:tcPr>
                 </a:tc>
+                <a:extLst>
+                  <a:ext uri="{0D108BD9-81ED-4DB2-BD59-A6C34878D82A}">
+                    <a16:rowId xmlns:a16="http://schemas.microsoft.com/office/drawing/2014/main" val="10000"/>
+                  </a:ext>
+                </a:extLst>
               </a:tr>
               <a:tr h="365760">
                 <a:tc>
@@ -20180,7 +20064,7 @@
                     <a:bodyPr/>
                     <a:lstStyle/>
                     <a:p>
-                      <a:pPr indent="0" marL="0">
+                      <a:pPr marL="0" indent="0">
                         <a:buNone/>
                       </a:pPr>
                       <a:r>
@@ -20248,7 +20132,7 @@
                     <a:bodyPr/>
                     <a:lstStyle/>
                     <a:p>
-                      <a:pPr indent="0" marL="0">
+                      <a:pPr marL="0" indent="0">
                         <a:buNone/>
                       </a:pPr>
                       <a:r>
@@ -20316,7 +20200,7 @@
                     <a:bodyPr/>
                     <a:lstStyle/>
                     <a:p>
-                      <a:pPr algn="ctr" indent="0" marL="0">
+                      <a:pPr marL="0" indent="0" algn="ctr">
                         <a:buNone/>
                       </a:pPr>
                       <a:r>
@@ -20379,6 +20263,11 @@
                     </a:solidFill>
                   </a:tcPr>
                 </a:tc>
+                <a:extLst>
+                  <a:ext uri="{0D108BD9-81ED-4DB2-BD59-A6C34878D82A}">
+                    <a16:rowId xmlns:a16="http://schemas.microsoft.com/office/drawing/2014/main" val="10001"/>
+                  </a:ext>
+                </a:extLst>
               </a:tr>
               <a:tr h="365760">
                 <a:tc>
@@ -20386,7 +20275,7 @@
                     <a:bodyPr/>
                     <a:lstStyle/>
                     <a:p>
-                      <a:pPr indent="0" marL="0">
+                      <a:pPr marL="0" indent="0">
                         <a:buNone/>
                       </a:pPr>
                       <a:r>
@@ -20454,7 +20343,7 @@
                     <a:bodyPr/>
                     <a:lstStyle/>
                     <a:p>
-                      <a:pPr indent="0" marL="0">
+                      <a:pPr marL="0" indent="0">
                         <a:buNone/>
                       </a:pPr>
                       <a:r>
@@ -20522,7 +20411,7 @@
                     <a:bodyPr/>
                     <a:lstStyle/>
                     <a:p>
-                      <a:pPr algn="ctr" indent="0" marL="0">
+                      <a:pPr marL="0" indent="0" algn="ctr">
                         <a:buNone/>
                       </a:pPr>
                       <a:r>
@@ -20585,6 +20474,11 @@
                     </a:solidFill>
                   </a:tcPr>
                 </a:tc>
+                <a:extLst>
+                  <a:ext uri="{0D108BD9-81ED-4DB2-BD59-A6C34878D82A}">
+                    <a16:rowId xmlns:a16="http://schemas.microsoft.com/office/drawing/2014/main" val="10002"/>
+                  </a:ext>
+                </a:extLst>
               </a:tr>
               <a:tr h="365760">
                 <a:tc>
@@ -20592,7 +20486,7 @@
                     <a:bodyPr/>
                     <a:lstStyle/>
                     <a:p>
-                      <a:pPr indent="0" marL="0">
+                      <a:pPr marL="0" indent="0">
                         <a:buNone/>
                       </a:pPr>
                       <a:r>
@@ -20660,7 +20554,7 @@
                     <a:bodyPr/>
                     <a:lstStyle/>
                     <a:p>
-                      <a:pPr indent="0" marL="0">
+                      <a:pPr marL="0" indent="0">
                         <a:buNone/>
                       </a:pPr>
                       <a:r>
@@ -20728,7 +20622,7 @@
                     <a:bodyPr/>
                     <a:lstStyle/>
                     <a:p>
-                      <a:pPr algn="ctr" indent="0" marL="0">
+                      <a:pPr marL="0" indent="0" algn="ctr">
                         <a:buNone/>
                       </a:pPr>
                       <a:r>
@@ -20791,6 +20685,11 @@
                     </a:solidFill>
                   </a:tcPr>
                 </a:tc>
+                <a:extLst>
+                  <a:ext uri="{0D108BD9-81ED-4DB2-BD59-A6C34878D82A}">
+                    <a16:rowId xmlns:a16="http://schemas.microsoft.com/office/drawing/2014/main" val="10003"/>
+                  </a:ext>
+                </a:extLst>
               </a:tr>
               <a:tr h="365760">
                 <a:tc>
@@ -20798,7 +20697,7 @@
                     <a:bodyPr/>
                     <a:lstStyle/>
                     <a:p>
-                      <a:pPr indent="0" marL="0">
+                      <a:pPr marL="0" indent="0">
                         <a:buNone/>
                       </a:pPr>
                       <a:r>
@@ -20866,7 +20765,7 @@
                     <a:bodyPr/>
                     <a:lstStyle/>
                     <a:p>
-                      <a:pPr indent="0" marL="0">
+                      <a:pPr marL="0" indent="0">
                         <a:buNone/>
                       </a:pPr>
                       <a:r>
@@ -20934,7 +20833,7 @@
                     <a:bodyPr/>
                     <a:lstStyle/>
                     <a:p>
-                      <a:pPr algn="ctr" indent="0" marL="0">
+                      <a:pPr marL="0" indent="0" algn="ctr">
                         <a:buNone/>
                       </a:pPr>
                       <a:r>
@@ -20997,6 +20896,11 @@
                     </a:solidFill>
                   </a:tcPr>
                 </a:tc>
+                <a:extLst>
+                  <a:ext uri="{0D108BD9-81ED-4DB2-BD59-A6C34878D82A}">
+                    <a16:rowId xmlns:a16="http://schemas.microsoft.com/office/drawing/2014/main" val="10004"/>
+                  </a:ext>
+                </a:extLst>
               </a:tr>
               <a:tr h="365760">
                 <a:tc>
@@ -21004,7 +20908,7 @@
                     <a:bodyPr/>
                     <a:lstStyle/>
                     <a:p>
-                      <a:pPr indent="0" marL="0">
+                      <a:pPr marL="0" indent="0">
                         <a:buNone/>
                       </a:pPr>
                       <a:r>
@@ -21072,7 +20976,7 @@
                     <a:bodyPr/>
                     <a:lstStyle/>
                     <a:p>
-                      <a:pPr indent="0" marL="0">
+                      <a:pPr marL="0" indent="0">
                         <a:buNone/>
                       </a:pPr>
                       <a:r>
@@ -21140,7 +21044,7 @@
                     <a:bodyPr/>
                     <a:lstStyle/>
                     <a:p>
-                      <a:pPr algn="ctr" indent="0" marL="0">
+                      <a:pPr marL="0" indent="0" algn="ctr">
                         <a:buNone/>
                       </a:pPr>
                       <a:r>
@@ -21203,6 +21107,11 @@
                     </a:solidFill>
                   </a:tcPr>
                 </a:tc>
+                <a:extLst>
+                  <a:ext uri="{0D108BD9-81ED-4DB2-BD59-A6C34878D82A}">
+                    <a16:rowId xmlns:a16="http://schemas.microsoft.com/office/drawing/2014/main" val="10005"/>
+                  </a:ext>
+                </a:extLst>
               </a:tr>
               <a:tr h="365760">
                 <a:tc>
@@ -21210,7 +21119,7 @@
                     <a:bodyPr/>
                     <a:lstStyle/>
                     <a:p>
-                      <a:pPr indent="0" marL="0">
+                      <a:pPr marL="0" indent="0">
                         <a:buNone/>
                       </a:pPr>
                       <a:r>
@@ -21278,7 +21187,7 @@
                     <a:bodyPr/>
                     <a:lstStyle/>
                     <a:p>
-                      <a:pPr indent="0" marL="0">
+                      <a:pPr marL="0" indent="0">
                         <a:buNone/>
                       </a:pPr>
                       <a:r>
@@ -21346,7 +21255,7 @@
                     <a:bodyPr/>
                     <a:lstStyle/>
                     <a:p>
-                      <a:pPr algn="ctr" indent="0" marL="0">
+                      <a:pPr marL="0" indent="0" algn="ctr">
                         <a:buNone/>
                       </a:pPr>
                       <a:r>
@@ -21409,6 +21318,11 @@
                     </a:solidFill>
                   </a:tcPr>
                 </a:tc>
+                <a:extLst>
+                  <a:ext uri="{0D108BD9-81ED-4DB2-BD59-A6C34878D82A}">
+                    <a16:rowId xmlns:a16="http://schemas.microsoft.com/office/drawing/2014/main" val="10006"/>
+                  </a:ext>
+                </a:extLst>
               </a:tr>
               <a:tr h="365760">
                 <a:tc>
@@ -21416,7 +21330,7 @@
                     <a:bodyPr/>
                     <a:lstStyle/>
                     <a:p>
-                      <a:pPr indent="0" marL="0">
+                      <a:pPr marL="0" indent="0">
                         <a:buNone/>
                       </a:pPr>
                       <a:r>
@@ -21484,7 +21398,7 @@
                     <a:bodyPr/>
                     <a:lstStyle/>
                     <a:p>
-                      <a:pPr indent="0" marL="0">
+                      <a:pPr marL="0" indent="0">
                         <a:buNone/>
                       </a:pPr>
                       <a:r>
@@ -21552,7 +21466,7 @@
                     <a:bodyPr/>
                     <a:lstStyle/>
                     <a:p>
-                      <a:pPr algn="ctr" indent="0" marL="0">
+                      <a:pPr marL="0" indent="0" algn="ctr">
                         <a:buNone/>
                       </a:pPr>
                       <a:r>
@@ -21615,6 +21529,11 @@
                     </a:solidFill>
                   </a:tcPr>
                 </a:tc>
+                <a:extLst>
+                  <a:ext uri="{0D108BD9-81ED-4DB2-BD59-A6C34878D82A}">
+                    <a16:rowId xmlns:a16="http://schemas.microsoft.com/office/drawing/2014/main" val="10007"/>
+                  </a:ext>
+                </a:extLst>
               </a:tr>
               <a:tr h="365760">
                 <a:tc>
@@ -21622,7 +21541,7 @@
                     <a:bodyPr/>
                     <a:lstStyle/>
                     <a:p>
-                      <a:pPr indent="0" marL="0">
+                      <a:pPr marL="0" indent="0">
                         <a:buNone/>
                       </a:pPr>
                       <a:r>
@@ -21690,7 +21609,7 @@
                     <a:bodyPr/>
                     <a:lstStyle/>
                     <a:p>
-                      <a:pPr indent="0" marL="0">
+                      <a:pPr marL="0" indent="0">
                         <a:buNone/>
                       </a:pPr>
                       <a:r>
@@ -21758,7 +21677,7 @@
                     <a:bodyPr/>
                     <a:lstStyle/>
                     <a:p>
-                      <a:pPr algn="ctr" indent="0" marL="0">
+                      <a:pPr marL="0" indent="0" algn="ctr">
                         <a:buNone/>
                       </a:pPr>
                       <a:r>
@@ -21821,6 +21740,11 @@
                     </a:solidFill>
                   </a:tcPr>
                 </a:tc>
+                <a:extLst>
+                  <a:ext uri="{0D108BD9-81ED-4DB2-BD59-A6C34878D82A}">
+                    <a16:rowId xmlns:a16="http://schemas.microsoft.com/office/drawing/2014/main" val="10008"/>
+                  </a:ext>
+                </a:extLst>
               </a:tr>
             </a:tbl>
           </a:graphicData>
@@ -21901,7 +21825,7 @@
           <a:bodyPr wrap="square" lIns="0" tIns="0" rIns="0" bIns="0" rtlCol="0" anchor="ctr"/>
           <a:lstStyle/>
           <a:p>
-            <a:pPr indent="0" marL="0">
+            <a:pPr marL="0" indent="0">
               <a:buNone/>
             </a:pPr>
             <a:r>
@@ -22100,7 +22024,7 @@
           <a:bodyPr wrap="square" lIns="0" tIns="0" rIns="0" bIns="0" rtlCol="0" anchor="ctr"/>
           <a:lstStyle/>
           <a:p>
-            <a:pPr indent="0" marL="0">
+            <a:pPr marL="0" indent="0">
               <a:buNone/>
             </a:pPr>
             <a:r>
@@ -22139,7 +22063,7 @@
           <a:bodyPr wrap="square" lIns="0" tIns="0" rIns="0" bIns="0" rtlCol="0" anchor="t"/>
           <a:lstStyle/>
           <a:p>
-            <a:pPr algn="l" indent="0" marL="0">
+            <a:pPr marL="0" indent="0" algn="l">
               <a:lnSpc>
                 <a:spcPct val="112000"/>
               </a:lnSpc>
@@ -22159,7 +22083,7 @@
             <a:endParaRPr lang="en-US" sz="1150" dirty="0"/>
           </a:p>
           <a:p>
-            <a:pPr algn="l" indent="0" marL="0">
+            <a:pPr marL="0" indent="0" algn="l">
               <a:lnSpc>
                 <a:spcPct val="112000"/>
               </a:lnSpc>
@@ -22168,7 +22092,7 @@
             <a:endParaRPr lang="en-US" sz="1150" dirty="0"/>
           </a:p>
           <a:p>
-            <a:pPr algn="l" indent="0" marL="0">
+            <a:pPr marL="0" indent="0" algn="l">
               <a:lnSpc>
                 <a:spcPct val="112000"/>
               </a:lnSpc>
@@ -22205,6 +22129,7 @@
         <a:solidFill>
           <a:srgbClr val="F5F7FB"/>
         </a:solidFill>
+        <a:effectLst/>
       </p:bgPr>
     </p:bg>
     <p:spTree>
@@ -22269,11 +22194,11 @@
           <a:bodyPr wrap="square" lIns="0" tIns="0" rIns="0" bIns="0" rtlCol="0" anchor="ctr"/>
           <a:lstStyle/>
           <a:p>
-            <a:pPr algn="ctr" indent="0" marL="0">
+            <a:pPr marL="0" indent="0" algn="ctr">
               <a:buNone/>
             </a:pPr>
             <a:r>
-              <a:rPr lang="en-US" sz="1150" b="1" spc="100" kern="0" dirty="0">
+              <a:rPr lang="en-US" sz="1150" b="1" kern="0" spc="100" dirty="0">
                 <a:solidFill>
                   <a:srgbClr val="FFFFFF"/>
                 </a:solidFill>
@@ -22308,7 +22233,7 @@
           <a:bodyPr wrap="square" lIns="0" tIns="0" rIns="0" bIns="0" rtlCol="0" anchor="ctr"/>
           <a:lstStyle/>
           <a:p>
-            <a:pPr indent="0" marL="0">
+            <a:pPr marL="0" indent="0">
               <a:buNone/>
             </a:pPr>
             <a:r>
@@ -22347,7 +22272,7 @@
           <a:bodyPr wrap="square" lIns="0" tIns="0" rIns="0" bIns="0" rtlCol="0" anchor="ctr"/>
           <a:lstStyle/>
           <a:p>
-            <a:pPr indent="0" marL="0">
+            <a:pPr marL="0" indent="0">
               <a:buNone/>
             </a:pPr>
             <a:r>
@@ -22386,7 +22311,7 @@
           <a:bodyPr wrap="square" lIns="0" tIns="0" rIns="0" bIns="0" rtlCol="0" anchor="ctr"/>
           <a:lstStyle/>
           <a:p>
-            <a:pPr algn="l" indent="0" marL="0">
+            <a:pPr marL="0" indent="0" algn="l">
               <a:buNone/>
             </a:pPr>
             <a:r>
@@ -22425,7 +22350,7 @@
           <a:bodyPr wrap="square" lIns="0" tIns="0" rIns="0" bIns="0" rtlCol="0" anchor="t"/>
           <a:lstStyle/>
           <a:p>
-            <a:pPr indent="0" marL="0">
+            <a:pPr marL="0" indent="0">
               <a:buNone/>
             </a:pPr>
             <a:r>
@@ -22442,7 +22367,7 @@
             <a:endParaRPr lang="en-US" sz="1150" dirty="0"/>
           </a:p>
           <a:p>
-            <a:pPr indent="0" marL="0">
+            <a:pPr marL="0" indent="0">
               <a:buNone/>
             </a:pPr>
             <a:r>
@@ -22481,7 +22406,7 @@
           <a:bodyPr wrap="square" lIns="0" tIns="0" rIns="0" bIns="0" rtlCol="0" anchor="ctr"/>
           <a:lstStyle/>
           <a:p>
-            <a:pPr algn="l" indent="0" marL="0">
+            <a:pPr marL="0" indent="0" algn="l">
               <a:buNone/>
             </a:pPr>
             <a:r>
@@ -22520,7 +22445,7 @@
           <a:bodyPr wrap="square" lIns="0" tIns="0" rIns="0" bIns="0" rtlCol="0" anchor="t"/>
           <a:lstStyle/>
           <a:p>
-            <a:pPr indent="0" marL="0">
+            <a:pPr marL="0" indent="0">
               <a:buNone/>
             </a:pPr>
             <a:r>
@@ -22537,7 +22462,7 @@
             <a:endParaRPr lang="en-US" sz="1150" dirty="0"/>
           </a:p>
           <a:p>
-            <a:pPr indent="0" marL="0">
+            <a:pPr marL="0" indent="0">
               <a:buNone/>
             </a:pPr>
             <a:r>
@@ -22576,7 +22501,7 @@
           <a:bodyPr wrap="square" lIns="0" tIns="0" rIns="0" bIns="0" rtlCol="0" anchor="ctr"/>
           <a:lstStyle/>
           <a:p>
-            <a:pPr algn="l" indent="0" marL="0">
+            <a:pPr marL="0" indent="0" algn="l">
               <a:buNone/>
             </a:pPr>
             <a:r>
@@ -22615,7 +22540,7 @@
           <a:bodyPr wrap="square" lIns="0" tIns="0" rIns="0" bIns="0" rtlCol="0" anchor="t"/>
           <a:lstStyle/>
           <a:p>
-            <a:pPr indent="0" marL="0">
+            <a:pPr marL="0" indent="0">
               <a:buNone/>
             </a:pPr>
             <a:r>
@@ -22632,7 +22557,7 @@
             <a:endParaRPr lang="en-US" sz="1150" dirty="0"/>
           </a:p>
           <a:p>
-            <a:pPr indent="0" marL="0">
+            <a:pPr marL="0" indent="0">
               <a:buNone/>
             </a:pPr>
             <a:r>
@@ -22694,7 +22619,7 @@
           <a:bodyPr wrap="square" lIns="0" tIns="0" rIns="0" bIns="0" rtlCol="0" anchor="t"/>
           <a:lstStyle/>
           <a:p>
-            <a:pPr algn="l" indent="0" marL="0">
+            <a:pPr marL="0" indent="0" algn="l">
               <a:lnSpc>
                 <a:spcPct val="108000"/>
               </a:lnSpc>
@@ -22736,7 +22661,7 @@
           <a:bodyPr wrap="square" lIns="0" tIns="0" rIns="0" bIns="0" rtlCol="0" anchor="ctr"/>
           <a:lstStyle/>
           <a:p>
-            <a:pPr indent="0" marL="0">
+            <a:pPr marL="0" indent="0">
               <a:buNone/>
             </a:pPr>
             <a:r>
@@ -22800,7 +22725,7 @@
           <a:bodyPr wrap="square" lIns="0" tIns="0" rIns="0" bIns="0" rtlCol="0" anchor="ctr"/>
           <a:lstStyle/>
           <a:p>
-            <a:pPr indent="0" marL="0">
+            <a:pPr marL="0" indent="0">
               <a:buNone/>
             </a:pPr>
             <a:r>
@@ -22839,7 +22764,7 @@
           <a:bodyPr wrap="square" lIns="0" tIns="0" rIns="0" bIns="0" rtlCol="0" anchor="ctr"/>
           <a:lstStyle/>
           <a:p>
-            <a:pPr indent="0" marL="0">
+            <a:pPr marL="0" indent="0">
               <a:buNone/>
             </a:pPr>
             <a:r>
@@ -22903,7 +22828,7 @@
           <a:bodyPr wrap="square" lIns="0" tIns="0" rIns="0" bIns="0" rtlCol="0" anchor="ctr"/>
           <a:lstStyle/>
           <a:p>
-            <a:pPr indent="0" marL="0">
+            <a:pPr marL="0" indent="0">
               <a:buNone/>
             </a:pPr>
             <a:r>
@@ -22942,7 +22867,7 @@
           <a:bodyPr wrap="square" lIns="0" tIns="0" rIns="0" bIns="0" rtlCol="0" anchor="ctr"/>
           <a:lstStyle/>
           <a:p>
-            <a:pPr indent="0" marL="0">
+            <a:pPr marL="0" indent="0">
               <a:buNone/>
             </a:pPr>
             <a:r>
@@ -23006,7 +22931,7 @@
           <a:bodyPr wrap="square" lIns="0" tIns="0" rIns="0" bIns="0" rtlCol="0" anchor="ctr"/>
           <a:lstStyle/>
           <a:p>
-            <a:pPr indent="0" marL="0">
+            <a:pPr marL="0" indent="0">
               <a:buNone/>
             </a:pPr>
             <a:r>
@@ -23099,7 +23024,7 @@
           <a:bodyPr wrap="square" lIns="0" tIns="0" rIns="0" bIns="0" rtlCol="0" anchor="ctr"/>
           <a:lstStyle/>
           <a:p>
-            <a:pPr indent="0" marL="0">
+            <a:pPr marL="0" indent="0">
               <a:buNone/>
             </a:pPr>
             <a:r>
@@ -23138,7 +23063,7 @@
           <a:bodyPr wrap="square" lIns="0" tIns="0" rIns="0" bIns="0" rtlCol="0" anchor="t"/>
           <a:lstStyle/>
           <a:p>
-            <a:pPr algn="l" indent="0" marL="0">
+            <a:pPr marL="0" indent="0" algn="l">
               <a:lnSpc>
                 <a:spcPct val="114000"/>
               </a:lnSpc>
@@ -23158,7 +23083,7 @@
             <a:endParaRPr lang="en-US" sz="1150" dirty="0"/>
           </a:p>
           <a:p>
-            <a:pPr algn="l" indent="0" marL="0">
+            <a:pPr marL="0" indent="0" algn="l">
               <a:lnSpc>
                 <a:spcPct val="114000"/>
               </a:lnSpc>
@@ -23178,7 +23103,7 @@
             <a:endParaRPr lang="en-US" sz="1150" dirty="0"/>
           </a:p>
           <a:p>
-            <a:pPr algn="l" indent="0" marL="0">
+            <a:pPr marL="0" indent="0" algn="l">
               <a:lnSpc>
                 <a:spcPct val="114000"/>
               </a:lnSpc>
@@ -23187,7 +23112,7 @@
             <a:endParaRPr lang="en-US" sz="1150" dirty="0"/>
           </a:p>
           <a:p>
-            <a:pPr algn="l" indent="0" marL="0">
+            <a:pPr marL="0" indent="0" algn="l">
               <a:lnSpc>
                 <a:spcPct val="114000"/>
               </a:lnSpc>
@@ -23283,7 +23208,7 @@
           <a:bodyPr wrap="square" lIns="0" tIns="0" rIns="0" bIns="0" rtlCol="0" anchor="ctr"/>
           <a:lstStyle/>
           <a:p>
-            <a:pPr indent="0" marL="0">
+            <a:pPr marL="0" indent="0">
               <a:buNone/>
             </a:pPr>
             <a:r>
@@ -23322,7 +23247,7 @@
           <a:bodyPr wrap="square" lIns="0" tIns="0" rIns="0" bIns="0" rtlCol="0" anchor="t"/>
           <a:lstStyle/>
           <a:p>
-            <a:pPr algn="l" indent="0" marL="0">
+            <a:pPr marL="0" indent="0" algn="l">
               <a:lnSpc>
                 <a:spcPct val="106000"/>
               </a:lnSpc>
@@ -23359,6 +23284,7 @@
         <a:solidFill>
           <a:srgbClr val="F5F7FB"/>
         </a:solidFill>
+        <a:effectLst/>
       </p:bgPr>
     </p:bg>
     <p:spTree>
@@ -23423,11 +23349,11 @@
           <a:bodyPr wrap="square" lIns="0" tIns="0" rIns="0" bIns="0" rtlCol="0" anchor="ctr"/>
           <a:lstStyle/>
           <a:p>
-            <a:pPr algn="ctr" indent="0" marL="0">
+            <a:pPr marL="0" indent="0" algn="ctr">
               <a:buNone/>
             </a:pPr>
             <a:r>
-              <a:rPr lang="en-US" sz="1150" b="1" spc="100" kern="0" dirty="0">
+              <a:rPr lang="en-US" sz="1150" b="1" kern="0" spc="100" dirty="0">
                 <a:solidFill>
                   <a:srgbClr val="FFFFFF"/>
                 </a:solidFill>
@@ -23462,7 +23388,7 @@
           <a:bodyPr wrap="square" lIns="0" tIns="0" rIns="0" bIns="0" rtlCol="0" anchor="ctr"/>
           <a:lstStyle/>
           <a:p>
-            <a:pPr indent="0" marL="0">
+            <a:pPr marL="0" indent="0">
               <a:buNone/>
             </a:pPr>
             <a:r>
@@ -23501,7 +23427,7 @@
           <a:bodyPr wrap="square" lIns="0" tIns="0" rIns="0" bIns="0" rtlCol="0" anchor="ctr"/>
           <a:lstStyle/>
           <a:p>
-            <a:pPr indent="0" marL="0">
+            <a:pPr marL="0" indent="0">
               <a:buNone/>
             </a:pPr>
             <a:r>
@@ -23594,7 +23520,7 @@
           <a:bodyPr wrap="square" lIns="0" tIns="0" rIns="0" bIns="0" rtlCol="0" anchor="ctr"/>
           <a:lstStyle/>
           <a:p>
-            <a:pPr indent="0" marL="0">
+            <a:pPr marL="0" indent="0">
               <a:buNone/>
             </a:pPr>
             <a:r>
@@ -23633,7 +23559,7 @@
           <a:bodyPr wrap="square" lIns="0" tIns="0" rIns="0" bIns="0" rtlCol="0" anchor="t"/>
           <a:lstStyle/>
           <a:p>
-            <a:pPr algn="l" indent="0" marL="0">
+            <a:pPr marL="0" indent="0" algn="l">
               <a:lnSpc>
                 <a:spcPct val="130000"/>
               </a:lnSpc>
@@ -23653,7 +23579,7 @@
             <a:endParaRPr lang="en-US" sz="1600" dirty="0"/>
           </a:p>
           <a:p>
-            <a:pPr algn="l" indent="0" marL="0">
+            <a:pPr marL="0" indent="0" algn="l">
               <a:lnSpc>
                 <a:spcPct val="130000"/>
               </a:lnSpc>
@@ -23695,7 +23621,7 @@
           <a:bodyPr wrap="square" lIns="0" tIns="0" rIns="0" bIns="0" rtlCol="0" anchor="t"/>
           <a:lstStyle/>
           <a:p>
-            <a:pPr algn="l" indent="0" marL="0">
+            <a:pPr marL="0" indent="0" algn="l">
               <a:lnSpc>
                 <a:spcPct val="108000"/>
               </a:lnSpc>
@@ -23791,7 +23717,7 @@
           <a:bodyPr wrap="square" lIns="0" tIns="0" rIns="0" bIns="0" rtlCol="0" anchor="ctr"/>
           <a:lstStyle/>
           <a:p>
-            <a:pPr indent="0" marL="0">
+            <a:pPr marL="0" indent="0">
               <a:buNone/>
             </a:pPr>
             <a:r>
@@ -23830,7 +23756,7 @@
           <a:bodyPr wrap="square" lIns="0" tIns="0" rIns="0" bIns="0" rtlCol="0" anchor="t"/>
           <a:lstStyle/>
           <a:p>
-            <a:pPr algn="l" indent="0" marL="0">
+            <a:pPr marL="0" indent="0" algn="l">
               <a:lnSpc>
                 <a:spcPct val="114000"/>
               </a:lnSpc>
@@ -23850,7 +23776,7 @@
             <a:endParaRPr lang="en-US" sz="1200" dirty="0"/>
           </a:p>
           <a:p>
-            <a:pPr algn="l" indent="0" marL="0">
+            <a:pPr marL="0" indent="0" algn="l">
               <a:lnSpc>
                 <a:spcPct val="114000"/>
               </a:lnSpc>
@@ -23859,7 +23785,7 @@
             <a:endParaRPr lang="en-US" sz="1200" dirty="0"/>
           </a:p>
           <a:p>
-            <a:pPr algn="l" indent="0" marL="0">
+            <a:pPr marL="0" indent="0" algn="l">
               <a:lnSpc>
                 <a:spcPct val="114000"/>
               </a:lnSpc>
@@ -23955,7 +23881,7 @@
           <a:bodyPr wrap="square" lIns="0" tIns="0" rIns="0" bIns="0" rtlCol="0" anchor="ctr"/>
           <a:lstStyle/>
           <a:p>
-            <a:pPr indent="0" marL="0">
+            <a:pPr marL="0" indent="0">
               <a:buNone/>
             </a:pPr>
             <a:r>
@@ -23994,7 +23920,7 @@
           <a:bodyPr wrap="square" lIns="0" tIns="0" rIns="0" bIns="0" rtlCol="0" anchor="t"/>
           <a:lstStyle/>
           <a:p>
-            <a:pPr algn="l" indent="0" marL="0">
+            <a:pPr marL="0" indent="0" algn="l">
               <a:lnSpc>
                 <a:spcPct val="108000"/>
               </a:lnSpc>
@@ -24090,7 +24016,7 @@
           <a:bodyPr wrap="square" lIns="0" tIns="0" rIns="0" bIns="0" rtlCol="0" anchor="ctr"/>
           <a:lstStyle/>
           <a:p>
-            <a:pPr indent="0" marL="0">
+            <a:pPr marL="0" indent="0">
               <a:buNone/>
             </a:pPr>
             <a:r>
@@ -24129,7 +24055,7 @@
           <a:bodyPr wrap="square" lIns="0" tIns="0" rIns="0" bIns="0" rtlCol="0" anchor="t"/>
           <a:lstStyle/>
           <a:p>
-            <a:pPr algn="l" indent="0" marL="0">
+            <a:pPr marL="0" indent="0" algn="l">
               <a:lnSpc>
                 <a:spcPct val="108000"/>
               </a:lnSpc>
@@ -24166,6 +24092,7 @@
         <a:solidFill>
           <a:srgbClr val="F5F7FB"/>
         </a:solidFill>
+        <a:effectLst/>
       </p:bgPr>
     </p:bg>
     <p:spTree>
@@ -24230,11 +24157,11 @@
           <a:bodyPr wrap="square" lIns="0" tIns="0" rIns="0" bIns="0" rtlCol="0" anchor="ctr"/>
           <a:lstStyle/>
           <a:p>
-            <a:pPr algn="ctr" indent="0" marL="0">
+            <a:pPr marL="0" indent="0" algn="ctr">
               <a:buNone/>
             </a:pPr>
             <a:r>
-              <a:rPr lang="en-US" sz="1150" b="1" spc="100" kern="0" dirty="0">
+              <a:rPr lang="en-US" sz="1150" b="1" kern="0" spc="100" dirty="0">
                 <a:solidFill>
                   <a:srgbClr val="FFFFFF"/>
                 </a:solidFill>
@@ -24269,7 +24196,7 @@
           <a:bodyPr wrap="square" lIns="0" tIns="0" rIns="0" bIns="0" rtlCol="0" anchor="ctr"/>
           <a:lstStyle/>
           <a:p>
-            <a:pPr indent="0" marL="0">
+            <a:pPr marL="0" indent="0">
               <a:buNone/>
             </a:pPr>
             <a:r>
@@ -24308,7 +24235,7 @@
           <a:bodyPr wrap="square" lIns="0" tIns="0" rIns="0" bIns="0" rtlCol="0" anchor="ctr"/>
           <a:lstStyle/>
           <a:p>
-            <a:pPr indent="0" marL="0">
+            <a:pPr marL="0" indent="0">
               <a:buNone/>
             </a:pPr>
             <a:r>
@@ -24374,7 +24301,7 @@
           <a:bodyPr wrap="square" lIns="0" tIns="0" rIns="0" bIns="0" rtlCol="0" anchor="ctr"/>
           <a:lstStyle/>
           <a:p>
-            <a:pPr algn="ctr" indent="0" marL="0">
+            <a:pPr marL="0" indent="0" algn="ctr">
               <a:buNone/>
             </a:pPr>
             <a:r>
@@ -24413,7 +24340,7 @@
           <a:bodyPr wrap="square" lIns="0" tIns="0" rIns="0" bIns="0" rtlCol="0" anchor="t"/>
           <a:lstStyle/>
           <a:p>
-            <a:pPr algn="ctr" indent="0" marL="0">
+            <a:pPr marL="0" indent="0" algn="ctr">
               <a:lnSpc>
                 <a:spcPct val="108000"/>
               </a:lnSpc>
@@ -24503,7 +24430,7 @@
           <a:bodyPr wrap="square" lIns="0" tIns="0" rIns="0" bIns="0" rtlCol="0" anchor="ctr"/>
           <a:lstStyle/>
           <a:p>
-            <a:pPr algn="r" indent="0" marL="0">
+            <a:pPr marL="0" indent="0" algn="r">
               <a:buNone/>
             </a:pPr>
             <a:r>
@@ -24565,7 +24492,7 @@
           <a:bodyPr wrap="square" lIns="0" tIns="0" rIns="0" bIns="0" rtlCol="0" anchor="ctr"/>
           <a:lstStyle/>
           <a:p>
-            <a:pPr algn="r" indent="0" marL="0">
+            <a:pPr marL="0" indent="0" algn="r">
               <a:buNone/>
             </a:pPr>
             <a:r>
@@ -24627,7 +24554,7 @@
           <a:bodyPr wrap="square" lIns="0" tIns="0" rIns="0" bIns="0" rtlCol="0" anchor="ctr"/>
           <a:lstStyle/>
           <a:p>
-            <a:pPr algn="r" indent="0" marL="0">
+            <a:pPr marL="0" indent="0" algn="r">
               <a:buNone/>
             </a:pPr>
             <a:r>
@@ -27956,7 +27883,7 @@
           <a:bodyPr wrap="square" lIns="0" tIns="0" rIns="0" bIns="0" rtlCol="0" anchor="ctr"/>
           <a:lstStyle/>
           <a:p>
-            <a:pPr algn="ctr" indent="0" marL="0">
+            <a:pPr marL="0" indent="0" algn="ctr">
               <a:buNone/>
             </a:pPr>
             <a:r>
@@ -27976,7 +27903,7 @@
       </p:sp>
       <p:graphicFrame>
         <p:nvGraphicFramePr>
-          <p:cNvPr id="7" name="Table 0"/>
+          <p:cNvPr id="139" name="Table 0"/>
           <p:cNvGraphicFramePr>
             <a:graphicFrameLocks noGrp="1"/>
           </p:cNvGraphicFramePr>
@@ -27990,16 +27917,34 @@
         </p:nvGraphicFramePr>
         <p:xfrm>
           <a:off x="548640" y="3401568"/>
-          <a:ext cx="5029200" cy="914400"/>
+          <a:ext cx="5029200" cy="1536192"/>
         </p:xfrm>
         <a:graphic>
           <a:graphicData uri="http://schemas.openxmlformats.org/drawingml/2006/table">
             <a:tbl>
               <a:tblPr/>
               <a:tblGrid>
-                <a:gridCol w="1005840"/>
-                <a:gridCol w="1828800"/>
-                <a:gridCol w="2194560"/>
+                <a:gridCol w="1005840">
+                  <a:extLst>
+                    <a:ext uri="{9D8B030D-6E8A-4147-A177-3AD203B41FA5}">
+                      <a16:colId xmlns:a16="http://schemas.microsoft.com/office/drawing/2014/main" val="20000"/>
+                    </a:ext>
+                  </a:extLst>
+                </a:gridCol>
+                <a:gridCol w="1828800">
+                  <a:extLst>
+                    <a:ext uri="{9D8B030D-6E8A-4147-A177-3AD203B41FA5}">
+                      <a16:colId xmlns:a16="http://schemas.microsoft.com/office/drawing/2014/main" val="20001"/>
+                    </a:ext>
+                  </a:extLst>
+                </a:gridCol>
+                <a:gridCol w="2194560">
+                  <a:extLst>
+                    <a:ext uri="{9D8B030D-6E8A-4147-A177-3AD203B41FA5}">
+                      <a16:colId xmlns:a16="http://schemas.microsoft.com/office/drawing/2014/main" val="20002"/>
+                    </a:ext>
+                  </a:extLst>
+                </a:gridCol>
               </a:tblGrid>
               <a:tr h="384048">
                 <a:tc>
@@ -28007,7 +27952,7 @@
                     <a:bodyPr/>
                     <a:lstStyle/>
                     <a:p>
-                      <a:pPr indent="0" marL="0">
+                      <a:pPr marL="0" indent="0">
                         <a:buNone/>
                       </a:pPr>
                       <a:r>
@@ -28075,7 +28020,7 @@
                     <a:bodyPr/>
                     <a:lstStyle/>
                     <a:p>
-                      <a:pPr indent="0" marL="0">
+                      <a:pPr marL="0" indent="0">
                         <a:buNone/>
                       </a:pPr>
                       <a:r>
@@ -28143,7 +28088,7 @@
                     <a:bodyPr/>
                     <a:lstStyle/>
                     <a:p>
-                      <a:pPr indent="0" marL="0">
+                      <a:pPr marL="0" indent="0">
                         <a:buNone/>
                       </a:pPr>
                       <a:r>
@@ -28206,6 +28151,11 @@
                     </a:solidFill>
                   </a:tcPr>
                 </a:tc>
+                <a:extLst>
+                  <a:ext uri="{0D108BD9-81ED-4DB2-BD59-A6C34878D82A}">
+                    <a16:rowId xmlns:a16="http://schemas.microsoft.com/office/drawing/2014/main" val="10000"/>
+                  </a:ext>
+                </a:extLst>
               </a:tr>
               <a:tr h="384048">
                 <a:tc>
@@ -28213,7 +28163,7 @@
                     <a:bodyPr/>
                     <a:lstStyle/>
                     <a:p>
-                      <a:pPr algn="ctr" indent="0" marL="0">
+                      <a:pPr marL="0" indent="0" algn="ctr">
                         <a:buNone/>
                       </a:pPr>
                       <a:r>
@@ -28281,7 +28231,7 @@
                     <a:bodyPr/>
                     <a:lstStyle/>
                     <a:p>
-                      <a:pPr algn="ctr" indent="0" marL="0">
+                      <a:pPr marL="0" indent="0" algn="ctr">
                         <a:buNone/>
                       </a:pPr>
                       <a:r>
@@ -28349,7 +28299,7 @@
                     <a:bodyPr/>
                     <a:lstStyle/>
                     <a:p>
-                      <a:pPr algn="ctr" indent="0" marL="0">
+                      <a:pPr marL="0" indent="0" algn="ctr">
                         <a:buNone/>
                       </a:pPr>
                       <a:r>
@@ -28412,6 +28362,11 @@
                     </a:solidFill>
                   </a:tcPr>
                 </a:tc>
+                <a:extLst>
+                  <a:ext uri="{0D108BD9-81ED-4DB2-BD59-A6C34878D82A}">
+                    <a16:rowId xmlns:a16="http://schemas.microsoft.com/office/drawing/2014/main" val="10001"/>
+                  </a:ext>
+                </a:extLst>
               </a:tr>
               <a:tr h="384048">
                 <a:tc>
@@ -28419,7 +28374,7 @@
                     <a:bodyPr/>
                     <a:lstStyle/>
                     <a:p>
-                      <a:pPr algn="ctr" indent="0" marL="0">
+                      <a:pPr marL="0" indent="0" algn="ctr">
                         <a:buNone/>
                       </a:pPr>
                       <a:r>
@@ -28487,7 +28442,7 @@
                     <a:bodyPr/>
                     <a:lstStyle/>
                     <a:p>
-                      <a:pPr algn="ctr" indent="0" marL="0">
+                      <a:pPr marL="0" indent="0" algn="ctr">
                         <a:buNone/>
                       </a:pPr>
                       <a:r>
@@ -28555,7 +28510,7 @@
                     <a:bodyPr/>
                     <a:lstStyle/>
                     <a:p>
-                      <a:pPr algn="ctr" indent="0" marL="0">
+                      <a:pPr marL="0" indent="0" algn="ctr">
                         <a:buNone/>
                       </a:pPr>
                       <a:r>
@@ -28618,6 +28573,11 @@
                     </a:solidFill>
                   </a:tcPr>
                 </a:tc>
+                <a:extLst>
+                  <a:ext uri="{0D108BD9-81ED-4DB2-BD59-A6C34878D82A}">
+                    <a16:rowId xmlns:a16="http://schemas.microsoft.com/office/drawing/2014/main" val="10002"/>
+                  </a:ext>
+                </a:extLst>
               </a:tr>
               <a:tr h="384048">
                 <a:tc>
@@ -28625,7 +28585,7 @@
                     <a:bodyPr/>
                     <a:lstStyle/>
                     <a:p>
-                      <a:pPr algn="ctr" indent="0" marL="0">
+                      <a:pPr marL="0" indent="0" algn="ctr">
                         <a:buNone/>
                       </a:pPr>
                       <a:r>
@@ -28693,7 +28653,7 @@
                     <a:bodyPr/>
                     <a:lstStyle/>
                     <a:p>
-                      <a:pPr algn="ctr" indent="0" marL="0">
+                      <a:pPr marL="0" indent="0" algn="ctr">
                         <a:buNone/>
                       </a:pPr>
                       <a:r>
@@ -28761,7 +28721,7 @@
                     <a:bodyPr/>
                     <a:lstStyle/>
                     <a:p>
-                      <a:pPr algn="ctr" indent="0" marL="0">
+                      <a:pPr marL="0" indent="0" algn="ctr">
                         <a:buNone/>
                       </a:pPr>
                       <a:r>
@@ -28824,6 +28784,11 @@
                     </a:solidFill>
                   </a:tcPr>
                 </a:tc>
+                <a:extLst>
+                  <a:ext uri="{0D108BD9-81ED-4DB2-BD59-A6C34878D82A}">
+                    <a16:rowId xmlns:a16="http://schemas.microsoft.com/office/drawing/2014/main" val="10003"/>
+                  </a:ext>
+                </a:extLst>
               </a:tr>
             </a:tbl>
           </a:graphicData>
@@ -28904,7 +28869,7 @@
           <a:bodyPr wrap="square" lIns="0" tIns="0" rIns="0" bIns="0" rtlCol="0" anchor="ctr"/>
           <a:lstStyle/>
           <a:p>
-            <a:pPr indent="0" marL="0">
+            <a:pPr marL="0" indent="0">
               <a:buNone/>
             </a:pPr>
             <a:r>
@@ -28943,7 +28908,7 @@
           <a:bodyPr wrap="square" lIns="0" tIns="0" rIns="0" bIns="0" rtlCol="0" anchor="t"/>
           <a:lstStyle/>
           <a:p>
-            <a:pPr algn="l" indent="0" marL="0">
+            <a:pPr marL="0" indent="0" algn="l">
               <a:lnSpc>
                 <a:spcPct val="110000"/>
               </a:lnSpc>
@@ -28963,7 +28928,7 @@
             <a:endParaRPr lang="en-US" sz="1200" dirty="0"/>
           </a:p>
           <a:p>
-            <a:pPr algn="l" indent="0" marL="0">
+            <a:pPr marL="0" indent="0" algn="l">
               <a:lnSpc>
                 <a:spcPct val="110000"/>
               </a:lnSpc>
@@ -28972,7 +28937,7 @@
             <a:endParaRPr lang="en-US" sz="1200" dirty="0"/>
           </a:p>
           <a:p>
-            <a:pPr algn="l" indent="0" marL="0">
+            <a:pPr marL="0" indent="0" algn="l">
               <a:lnSpc>
                 <a:spcPct val="110000"/>
               </a:lnSpc>
@@ -29009,6 +28974,7 @@
         <a:solidFill>
           <a:srgbClr val="F5F7FB"/>
         </a:solidFill>
+        <a:effectLst/>
       </p:bgPr>
     </p:bg>
     <p:spTree>
@@ -29073,11 +29039,11 @@
           <a:bodyPr wrap="square" lIns="0" tIns="0" rIns="0" bIns="0" rtlCol="0" anchor="ctr"/>
           <a:lstStyle/>
           <a:p>
-            <a:pPr algn="ctr" indent="0" marL="0">
+            <a:pPr marL="0" indent="0" algn="ctr">
               <a:buNone/>
             </a:pPr>
             <a:r>
-              <a:rPr lang="en-US" sz="1150" b="1" spc="100" kern="0" dirty="0">
+              <a:rPr lang="en-US" sz="1150" b="1" kern="0" spc="100" dirty="0">
                 <a:solidFill>
                   <a:srgbClr val="FFFFFF"/>
                 </a:solidFill>
@@ -29112,7 +29078,7 @@
           <a:bodyPr wrap="square" lIns="0" tIns="0" rIns="0" bIns="0" rtlCol="0" anchor="ctr"/>
           <a:lstStyle/>
           <a:p>
-            <a:pPr indent="0" marL="0">
+            <a:pPr marL="0" indent="0">
               <a:buNone/>
             </a:pPr>
             <a:r>
@@ -29151,7 +29117,7 @@
           <a:bodyPr wrap="square" lIns="0" tIns="0" rIns="0" bIns="0" rtlCol="0" anchor="ctr"/>
           <a:lstStyle/>
           <a:p>
-            <a:pPr indent="0" marL="0">
+            <a:pPr marL="0" indent="0">
               <a:buNone/>
             </a:pPr>
             <a:r>
@@ -29217,7 +29183,7 @@
           <a:bodyPr wrap="square" lIns="0" tIns="0" rIns="0" bIns="0" rtlCol="0" anchor="ctr"/>
           <a:lstStyle/>
           <a:p>
-            <a:pPr algn="ctr" indent="0" marL="0">
+            <a:pPr marL="0" indent="0" algn="ctr">
               <a:buNone/>
             </a:pPr>
             <a:r>
@@ -29251,16 +29217,34 @@
         </p:nvGraphicFramePr>
         <p:xfrm>
           <a:off x="548640" y="2926080"/>
-          <a:ext cx="5029200" cy="914400"/>
+          <a:ext cx="5029200" cy="1536192"/>
         </p:xfrm>
         <a:graphic>
           <a:graphicData uri="http://schemas.openxmlformats.org/drawingml/2006/table">
             <a:tbl>
               <a:tblPr/>
               <a:tblGrid>
-                <a:gridCol w="1554480"/>
-                <a:gridCol w="1280160"/>
-                <a:gridCol w="2194560"/>
+                <a:gridCol w="1554480">
+                  <a:extLst>
+                    <a:ext uri="{9D8B030D-6E8A-4147-A177-3AD203B41FA5}">
+                      <a16:colId xmlns:a16="http://schemas.microsoft.com/office/drawing/2014/main" val="20000"/>
+                    </a:ext>
+                  </a:extLst>
+                </a:gridCol>
+                <a:gridCol w="1280160">
+                  <a:extLst>
+                    <a:ext uri="{9D8B030D-6E8A-4147-A177-3AD203B41FA5}">
+                      <a16:colId xmlns:a16="http://schemas.microsoft.com/office/drawing/2014/main" val="20001"/>
+                    </a:ext>
+                  </a:extLst>
+                </a:gridCol>
+                <a:gridCol w="2194560">
+                  <a:extLst>
+                    <a:ext uri="{9D8B030D-6E8A-4147-A177-3AD203B41FA5}">
+                      <a16:colId xmlns:a16="http://schemas.microsoft.com/office/drawing/2014/main" val="20002"/>
+                    </a:ext>
+                  </a:extLst>
+                </a:gridCol>
               </a:tblGrid>
               <a:tr h="384048">
                 <a:tc>
@@ -29268,7 +29252,7 @@
                     <a:bodyPr/>
                     <a:lstStyle/>
                     <a:p>
-                      <a:pPr indent="0" marL="0">
+                      <a:pPr marL="0" indent="0">
                         <a:buNone/>
                       </a:pPr>
                       <a:r>
@@ -29336,7 +29320,7 @@
                     <a:bodyPr/>
                     <a:lstStyle/>
                     <a:p>
-                      <a:pPr indent="0" marL="0">
+                      <a:pPr marL="0" indent="0">
                         <a:buNone/>
                       </a:pPr>
                       <a:r>
@@ -29404,7 +29388,7 @@
                     <a:bodyPr/>
                     <a:lstStyle/>
                     <a:p>
-                      <a:pPr indent="0" marL="0">
+                      <a:pPr marL="0" indent="0">
                         <a:buNone/>
                       </a:pPr>
                       <a:r>
@@ -29467,6 +29451,11 @@
                     </a:solidFill>
                   </a:tcPr>
                 </a:tc>
+                <a:extLst>
+                  <a:ext uri="{0D108BD9-81ED-4DB2-BD59-A6C34878D82A}">
+                    <a16:rowId xmlns:a16="http://schemas.microsoft.com/office/drawing/2014/main" val="10000"/>
+                  </a:ext>
+                </a:extLst>
               </a:tr>
               <a:tr h="384048">
                 <a:tc>
@@ -29474,7 +29463,7 @@
                     <a:bodyPr/>
                     <a:lstStyle/>
                     <a:p>
-                      <a:pPr algn="ctr" indent="0" marL="0">
+                      <a:pPr marL="0" indent="0" algn="ctr">
                         <a:buNone/>
                       </a:pPr>
                       <a:r>
@@ -29542,7 +29531,7 @@
                     <a:bodyPr/>
                     <a:lstStyle/>
                     <a:p>
-                      <a:pPr algn="ctr" indent="0" marL="0">
+                      <a:pPr marL="0" indent="0" algn="ctr">
                         <a:buNone/>
                       </a:pPr>
                       <a:r>
@@ -29610,7 +29599,7 @@
                     <a:bodyPr/>
                     <a:lstStyle/>
                     <a:p>
-                      <a:pPr algn="ctr" indent="0" marL="0">
+                      <a:pPr marL="0" indent="0" algn="ctr">
                         <a:buNone/>
                       </a:pPr>
                       <a:r>
@@ -29673,6 +29662,11 @@
                     </a:solidFill>
                   </a:tcPr>
                 </a:tc>
+                <a:extLst>
+                  <a:ext uri="{0D108BD9-81ED-4DB2-BD59-A6C34878D82A}">
+                    <a16:rowId xmlns:a16="http://schemas.microsoft.com/office/drawing/2014/main" val="10001"/>
+                  </a:ext>
+                </a:extLst>
               </a:tr>
               <a:tr h="384048">
                 <a:tc>
@@ -29680,7 +29674,7 @@
                     <a:bodyPr/>
                     <a:lstStyle/>
                     <a:p>
-                      <a:pPr algn="ctr" indent="0" marL="0">
+                      <a:pPr marL="0" indent="0" algn="ctr">
                         <a:buNone/>
                       </a:pPr>
                       <a:r>
@@ -29748,7 +29742,7 @@
                     <a:bodyPr/>
                     <a:lstStyle/>
                     <a:p>
-                      <a:pPr algn="ctr" indent="0" marL="0">
+                      <a:pPr marL="0" indent="0" algn="ctr">
                         <a:buNone/>
                       </a:pPr>
                       <a:r>
@@ -29816,7 +29810,7 @@
                     <a:bodyPr/>
                     <a:lstStyle/>
                     <a:p>
-                      <a:pPr algn="ctr" indent="0" marL="0">
+                      <a:pPr marL="0" indent="0" algn="ctr">
                         <a:buNone/>
                       </a:pPr>
                       <a:r>
@@ -29879,6 +29873,11 @@
                     </a:solidFill>
                   </a:tcPr>
                 </a:tc>
+                <a:extLst>
+                  <a:ext uri="{0D108BD9-81ED-4DB2-BD59-A6C34878D82A}">
+                    <a16:rowId xmlns:a16="http://schemas.microsoft.com/office/drawing/2014/main" val="10002"/>
+                  </a:ext>
+                </a:extLst>
               </a:tr>
               <a:tr h="384048">
                 <a:tc>
@@ -29886,7 +29885,7 @@
                     <a:bodyPr/>
                     <a:lstStyle/>
                     <a:p>
-                      <a:pPr algn="ctr" indent="0" marL="0">
+                      <a:pPr marL="0" indent="0" algn="ctr">
                         <a:buNone/>
                       </a:pPr>
                       <a:r>
@@ -29954,7 +29953,7 @@
                     <a:bodyPr/>
                     <a:lstStyle/>
                     <a:p>
-                      <a:pPr algn="ctr" indent="0" marL="0">
+                      <a:pPr marL="0" indent="0" algn="ctr">
                         <a:buNone/>
                       </a:pPr>
                       <a:r>
@@ -30022,7 +30021,7 @@
                     <a:bodyPr/>
                     <a:lstStyle/>
                     <a:p>
-                      <a:pPr algn="ctr" indent="0" marL="0">
+                      <a:pPr marL="0" indent="0" algn="ctr">
                         <a:buNone/>
                       </a:pPr>
                       <a:r>
@@ -30085,6 +30084,11 @@
                     </a:solidFill>
                   </a:tcPr>
                 </a:tc>
+                <a:extLst>
+                  <a:ext uri="{0D108BD9-81ED-4DB2-BD59-A6C34878D82A}">
+                    <a16:rowId xmlns:a16="http://schemas.microsoft.com/office/drawing/2014/main" val="10003"/>
+                  </a:ext>
+                </a:extLst>
               </a:tr>
             </a:tbl>
           </a:graphicData>
@@ -30106,16 +30110,34 @@
         </p:nvGraphicFramePr>
         <p:xfrm>
           <a:off x="6035040" y="1965960"/>
-          <a:ext cx="5605272" cy="914400"/>
+          <a:ext cx="5605272" cy="1316736"/>
         </p:xfrm>
         <a:graphic>
           <a:graphicData uri="http://schemas.openxmlformats.org/drawingml/2006/table">
             <a:tbl>
               <a:tblPr/>
               <a:tblGrid>
-                <a:gridCol w="1737360"/>
-                <a:gridCol w="1920240"/>
-                <a:gridCol w="1947672"/>
+                <a:gridCol w="1737360">
+                  <a:extLst>
+                    <a:ext uri="{9D8B030D-6E8A-4147-A177-3AD203B41FA5}">
+                      <a16:colId xmlns:a16="http://schemas.microsoft.com/office/drawing/2014/main" val="20000"/>
+                    </a:ext>
+                  </a:extLst>
+                </a:gridCol>
+                <a:gridCol w="1920240">
+                  <a:extLst>
+                    <a:ext uri="{9D8B030D-6E8A-4147-A177-3AD203B41FA5}">
+                      <a16:colId xmlns:a16="http://schemas.microsoft.com/office/drawing/2014/main" val="20001"/>
+                    </a:ext>
+                  </a:extLst>
+                </a:gridCol>
+                <a:gridCol w="1947672">
+                  <a:extLst>
+                    <a:ext uri="{9D8B030D-6E8A-4147-A177-3AD203B41FA5}">
+                      <a16:colId xmlns:a16="http://schemas.microsoft.com/office/drawing/2014/main" val="20002"/>
+                    </a:ext>
+                  </a:extLst>
+                </a:gridCol>
               </a:tblGrid>
               <a:tr h="438912">
                 <a:tc>
@@ -30123,7 +30145,7 @@
                     <a:bodyPr/>
                     <a:lstStyle/>
                     <a:p>
-                      <a:pPr indent="0" marL="0">
+                      <a:pPr marL="0" indent="0">
                         <a:buNone/>
                       </a:pPr>
                       <a:endParaRPr lang="en-US" sz="1150" dirty="0">
@@ -30180,7 +30202,7 @@
                     <a:bodyPr/>
                     <a:lstStyle/>
                     <a:p>
-                      <a:pPr indent="0" marL="0">
+                      <a:pPr marL="0" indent="0">
                         <a:buNone/>
                       </a:pPr>
                       <a:r>
@@ -30248,7 +30270,7 @@
                     <a:bodyPr/>
                     <a:lstStyle/>
                     <a:p>
-                      <a:pPr indent="0" marL="0">
+                      <a:pPr marL="0" indent="0">
                         <a:buNone/>
                       </a:pPr>
                       <a:r>
@@ -30311,6 +30333,11 @@
                     </a:solidFill>
                   </a:tcPr>
                 </a:tc>
+                <a:extLst>
+                  <a:ext uri="{0D108BD9-81ED-4DB2-BD59-A6C34878D82A}">
+                    <a16:rowId xmlns:a16="http://schemas.microsoft.com/office/drawing/2014/main" val="10000"/>
+                  </a:ext>
+                </a:extLst>
               </a:tr>
               <a:tr h="438912">
                 <a:tc>
@@ -30318,7 +30345,7 @@
                     <a:bodyPr/>
                     <a:lstStyle/>
                     <a:p>
-                      <a:pPr indent="0" marL="0">
+                      <a:pPr marL="0" indent="0">
                         <a:buNone/>
                       </a:pPr>
                       <a:r>
@@ -30386,7 +30413,7 @@
                     <a:bodyPr/>
                     <a:lstStyle/>
                     <a:p>
-                      <a:pPr algn="ctr" indent="0" marL="0">
+                      <a:pPr marL="0" indent="0" algn="ctr">
                         <a:buNone/>
                       </a:pPr>
                       <a:r>
@@ -30454,7 +30481,7 @@
                     <a:bodyPr/>
                     <a:lstStyle/>
                     <a:p>
-                      <a:pPr algn="ctr" indent="0" marL="0">
+                      <a:pPr marL="0" indent="0" algn="ctr">
                         <a:buNone/>
                       </a:pPr>
                       <a:r>
@@ -30517,6 +30544,11 @@
                     </a:solidFill>
                   </a:tcPr>
                 </a:tc>
+                <a:extLst>
+                  <a:ext uri="{0D108BD9-81ED-4DB2-BD59-A6C34878D82A}">
+                    <a16:rowId xmlns:a16="http://schemas.microsoft.com/office/drawing/2014/main" val="10001"/>
+                  </a:ext>
+                </a:extLst>
               </a:tr>
               <a:tr h="438912">
                 <a:tc>
@@ -30524,7 +30556,7 @@
                     <a:bodyPr/>
                     <a:lstStyle/>
                     <a:p>
-                      <a:pPr indent="0" marL="0">
+                      <a:pPr marL="0" indent="0">
                         <a:buNone/>
                       </a:pPr>
                       <a:r>
@@ -30592,7 +30624,7 @@
                     <a:bodyPr/>
                     <a:lstStyle/>
                     <a:p>
-                      <a:pPr algn="ctr" indent="0" marL="0">
+                      <a:pPr marL="0" indent="0" algn="ctr">
                         <a:buNone/>
                       </a:pPr>
                       <a:r>
@@ -30660,7 +30692,7 @@
                     <a:bodyPr/>
                     <a:lstStyle/>
                     <a:p>
-                      <a:pPr algn="ctr" indent="0" marL="0">
+                      <a:pPr marL="0" indent="0" algn="ctr">
                         <a:buNone/>
                       </a:pPr>
                       <a:r>
@@ -30723,6 +30755,11 @@
                     </a:solidFill>
                   </a:tcPr>
                 </a:tc>
+                <a:extLst>
+                  <a:ext uri="{0D108BD9-81ED-4DB2-BD59-A6C34878D82A}">
+                    <a16:rowId xmlns:a16="http://schemas.microsoft.com/office/drawing/2014/main" val="10002"/>
+                  </a:ext>
+                </a:extLst>
               </a:tr>
             </a:tbl>
           </a:graphicData>
@@ -30776,7 +30813,7 @@
           <a:bodyPr wrap="square" lIns="0" tIns="0" rIns="0" bIns="0" rtlCol="0" anchor="ctr"/>
           <a:lstStyle/>
           <a:p>
-            <a:pPr algn="ctr" indent="0" marL="0">
+            <a:pPr marL="0" indent="0" algn="ctr">
               <a:lnSpc>
                 <a:spcPct val="108000"/>
               </a:lnSpc>
@@ -30872,7 +30909,7 @@
           <a:bodyPr wrap="square" lIns="0" tIns="0" rIns="0" bIns="0" rtlCol="0" anchor="ctr"/>
           <a:lstStyle/>
           <a:p>
-            <a:pPr indent="0" marL="0">
+            <a:pPr marL="0" indent="0">
               <a:buNone/>
             </a:pPr>
             <a:r>
@@ -30892,7 +30929,7 @@
       </p:sp>
       <p:sp>
         <p:nvSpPr>
-          <p:cNvPr id="15" name="Text 11"/>
+          <p:cNvPr id="9" name="Text 11"/>
           <p:cNvSpPr/>
           <p:nvPr/>
         </p:nvSpPr>
@@ -30911,7 +30948,7 @@
           <a:bodyPr wrap="square" lIns="0" tIns="0" rIns="0" bIns="0" rtlCol="0" anchor="t"/>
           <a:lstStyle/>
           <a:p>
-            <a:pPr algn="l" indent="0" marL="0">
+            <a:pPr marL="0" indent="0" algn="l">
               <a:lnSpc>
                 <a:spcPct val="114000"/>
               </a:lnSpc>
@@ -30931,7 +30968,7 @@
             <a:endParaRPr lang="en-US" sz="1200" dirty="0"/>
           </a:p>
           <a:p>
-            <a:pPr algn="l" indent="0" marL="0">
+            <a:pPr marL="0" indent="0" algn="l">
               <a:lnSpc>
                 <a:spcPct val="114000"/>
               </a:lnSpc>
@@ -30940,7 +30977,7 @@
             <a:endParaRPr lang="en-US" sz="1200" dirty="0"/>
           </a:p>
           <a:p>
-            <a:pPr algn="l" indent="0" marL="0">
+            <a:pPr marL="0" indent="0" algn="l">
               <a:lnSpc>
                 <a:spcPct val="114000"/>
               </a:lnSpc>
@@ -30960,7 +30997,7 @@
             <a:endParaRPr lang="en-US" sz="1200" dirty="0"/>
           </a:p>
           <a:p>
-            <a:pPr algn="l" indent="0" marL="0">
+            <a:pPr marL="0" indent="0" algn="l">
               <a:lnSpc>
                 <a:spcPct val="114000"/>
               </a:lnSpc>
@@ -30969,7 +31006,7 @@
             <a:endParaRPr lang="en-US" sz="1200" dirty="0"/>
           </a:p>
           <a:p>
-            <a:pPr algn="l" indent="0" marL="0">
+            <a:pPr marL="0" indent="0" algn="l">
               <a:lnSpc>
                 <a:spcPct val="114000"/>
               </a:lnSpc>
@@ -31006,6 +31043,7 @@
         <a:solidFill>
           <a:srgbClr val="F5F7FB"/>
         </a:solidFill>
+        <a:effectLst/>
       </p:bgPr>
     </p:bg>
     <p:spTree>
@@ -31070,11 +31108,11 @@
           <a:bodyPr wrap="square" lIns="0" tIns="0" rIns="0" bIns="0" rtlCol="0" anchor="ctr"/>
           <a:lstStyle/>
           <a:p>
-            <a:pPr algn="ctr" indent="0" marL="0">
+            <a:pPr marL="0" indent="0" algn="ctr">
               <a:buNone/>
             </a:pPr>
             <a:r>
-              <a:rPr lang="en-US" sz="1150" b="1" spc="100" kern="0" dirty="0">
+              <a:rPr lang="en-US" sz="1150" b="1" kern="0" spc="100" dirty="0">
                 <a:solidFill>
                   <a:srgbClr val="FFFFFF"/>
                 </a:solidFill>
@@ -31109,7 +31147,7 @@
           <a:bodyPr wrap="square" lIns="0" tIns="0" rIns="0" bIns="0" rtlCol="0" anchor="ctr"/>
           <a:lstStyle/>
           <a:p>
-            <a:pPr indent="0" marL="0">
+            <a:pPr marL="0" indent="0">
               <a:buNone/>
             </a:pPr>
             <a:r>
@@ -31148,7 +31186,7 @@
           <a:bodyPr wrap="square" lIns="0" tIns="0" rIns="0" bIns="0" rtlCol="0" anchor="ctr"/>
           <a:lstStyle/>
           <a:p>
-            <a:pPr indent="0" marL="0">
+            <a:pPr marL="0" indent="0">
               <a:buNone/>
             </a:pPr>
             <a:r>
@@ -31214,7 +31252,7 @@
           <a:bodyPr wrap="square" lIns="0" tIns="0" rIns="0" bIns="0" rtlCol="0" anchor="ctr"/>
           <a:lstStyle/>
           <a:p>
-            <a:pPr algn="ctr" indent="0" marL="0">
+            <a:pPr marL="0" indent="0" algn="ctr">
               <a:buNone/>
             </a:pPr>
             <a:r>
@@ -31248,17 +31286,41 @@
         </p:nvGraphicFramePr>
         <p:xfrm>
           <a:off x="548640" y="2926080"/>
-          <a:ext cx="11091672" cy="914400"/>
+          <a:ext cx="11091672" cy="1901952"/>
         </p:xfrm>
         <a:graphic>
           <a:graphicData uri="http://schemas.openxmlformats.org/drawingml/2006/table">
             <a:tbl>
               <a:tblPr/>
               <a:tblGrid>
-                <a:gridCol w="2011680"/>
-                <a:gridCol w="2011680"/>
-                <a:gridCol w="4754880"/>
-                <a:gridCol w="2313432"/>
+                <a:gridCol w="2011680">
+                  <a:extLst>
+                    <a:ext uri="{9D8B030D-6E8A-4147-A177-3AD203B41FA5}">
+                      <a16:colId xmlns:a16="http://schemas.microsoft.com/office/drawing/2014/main" val="20000"/>
+                    </a:ext>
+                  </a:extLst>
+                </a:gridCol>
+                <a:gridCol w="2011680">
+                  <a:extLst>
+                    <a:ext uri="{9D8B030D-6E8A-4147-A177-3AD203B41FA5}">
+                      <a16:colId xmlns:a16="http://schemas.microsoft.com/office/drawing/2014/main" val="20001"/>
+                    </a:ext>
+                  </a:extLst>
+                </a:gridCol>
+                <a:gridCol w="4754880">
+                  <a:extLst>
+                    <a:ext uri="{9D8B030D-6E8A-4147-A177-3AD203B41FA5}">
+                      <a16:colId xmlns:a16="http://schemas.microsoft.com/office/drawing/2014/main" val="20002"/>
+                    </a:ext>
+                  </a:extLst>
+                </a:gridCol>
+                <a:gridCol w="2313432">
+                  <a:extLst>
+                    <a:ext uri="{9D8B030D-6E8A-4147-A177-3AD203B41FA5}">
+                      <a16:colId xmlns:a16="http://schemas.microsoft.com/office/drawing/2014/main" val="20003"/>
+                    </a:ext>
+                  </a:extLst>
+                </a:gridCol>
               </a:tblGrid>
               <a:tr h="475488">
                 <a:tc>
@@ -31266,7 +31328,7 @@
                     <a:bodyPr/>
                     <a:lstStyle/>
                     <a:p>
-                      <a:pPr indent="0" marL="0">
+                      <a:pPr marL="0" indent="0">
                         <a:buNone/>
                       </a:pPr>
                       <a:r>
@@ -31334,7 +31396,7 @@
                     <a:bodyPr/>
                     <a:lstStyle/>
                     <a:p>
-                      <a:pPr indent="0" marL="0">
+                      <a:pPr marL="0" indent="0">
                         <a:buNone/>
                       </a:pPr>
                       <a:r>
@@ -31402,7 +31464,7 @@
                     <a:bodyPr/>
                     <a:lstStyle/>
                     <a:p>
-                      <a:pPr indent="0" marL="0">
+                      <a:pPr marL="0" indent="0">
                         <a:buNone/>
                       </a:pPr>
                       <a:r>
@@ -31470,7 +31532,7 @@
                     <a:bodyPr/>
                     <a:lstStyle/>
                     <a:p>
-                      <a:pPr indent="0" marL="0">
+                      <a:pPr marL="0" indent="0">
                         <a:buNone/>
                       </a:pPr>
                       <a:r>
@@ -31533,6 +31595,11 @@
                     </a:solidFill>
                   </a:tcPr>
                 </a:tc>
+                <a:extLst>
+                  <a:ext uri="{0D108BD9-81ED-4DB2-BD59-A6C34878D82A}">
+                    <a16:rowId xmlns:a16="http://schemas.microsoft.com/office/drawing/2014/main" val="10000"/>
+                  </a:ext>
+                </a:extLst>
               </a:tr>
               <a:tr h="475488">
                 <a:tc>
@@ -31540,7 +31607,7 @@
                     <a:bodyPr/>
                     <a:lstStyle/>
                     <a:p>
-                      <a:pPr indent="0" marL="0">
+                      <a:pPr marL="0" indent="0">
                         <a:buNone/>
                       </a:pPr>
                       <a:r>
@@ -31608,7 +31675,7 @@
                     <a:bodyPr/>
                     <a:lstStyle/>
                     <a:p>
-                      <a:pPr algn="ctr" indent="0" marL="0">
+                      <a:pPr marL="0" indent="0" algn="ctr">
                         <a:buNone/>
                       </a:pPr>
                       <a:r>
@@ -31676,7 +31743,7 @@
                     <a:bodyPr/>
                     <a:lstStyle/>
                     <a:p>
-                      <a:pPr indent="0" marL="0">
+                      <a:pPr marL="0" indent="0">
                         <a:buNone/>
                       </a:pPr>
                       <a:r>
@@ -31744,7 +31811,7 @@
                     <a:bodyPr/>
                     <a:lstStyle/>
                     <a:p>
-                      <a:pPr algn="ctr" indent="0" marL="0">
+                      <a:pPr marL="0" indent="0" algn="ctr">
                         <a:buNone/>
                       </a:pPr>
                       <a:r>
@@ -31807,6 +31874,11 @@
                     </a:solidFill>
                   </a:tcPr>
                 </a:tc>
+                <a:extLst>
+                  <a:ext uri="{0D108BD9-81ED-4DB2-BD59-A6C34878D82A}">
+                    <a16:rowId xmlns:a16="http://schemas.microsoft.com/office/drawing/2014/main" val="10001"/>
+                  </a:ext>
+                </a:extLst>
               </a:tr>
               <a:tr h="475488">
                 <a:tc>
@@ -31814,7 +31886,7 @@
                     <a:bodyPr/>
                     <a:lstStyle/>
                     <a:p>
-                      <a:pPr indent="0" marL="0">
+                      <a:pPr marL="0" indent="0">
                         <a:buNone/>
                       </a:pPr>
                       <a:r>
@@ -31882,7 +31954,7 @@
                     <a:bodyPr/>
                     <a:lstStyle/>
                     <a:p>
-                      <a:pPr algn="ctr" indent="0" marL="0">
+                      <a:pPr marL="0" indent="0" algn="ctr">
                         <a:buNone/>
                       </a:pPr>
                       <a:r>
@@ -31950,7 +32022,7 @@
                     <a:bodyPr/>
                     <a:lstStyle/>
                     <a:p>
-                      <a:pPr indent="0" marL="0">
+                      <a:pPr marL="0" indent="0">
                         <a:buNone/>
                       </a:pPr>
                       <a:r>
@@ -32018,7 +32090,7 @@
                     <a:bodyPr/>
                     <a:lstStyle/>
                     <a:p>
-                      <a:pPr algn="ctr" indent="0" marL="0">
+                      <a:pPr marL="0" indent="0" algn="ctr">
                         <a:buNone/>
                       </a:pPr>
                       <a:r>
@@ -32081,6 +32153,11 @@
                     </a:solidFill>
                   </a:tcPr>
                 </a:tc>
+                <a:extLst>
+                  <a:ext uri="{0D108BD9-81ED-4DB2-BD59-A6C34878D82A}">
+                    <a16:rowId xmlns:a16="http://schemas.microsoft.com/office/drawing/2014/main" val="10002"/>
+                  </a:ext>
+                </a:extLst>
               </a:tr>
               <a:tr h="475488">
                 <a:tc>
@@ -32088,7 +32165,7 @@
                     <a:bodyPr/>
                     <a:lstStyle/>
                     <a:p>
-                      <a:pPr indent="0" marL="0">
+                      <a:pPr marL="0" indent="0">
                         <a:buNone/>
                       </a:pPr>
                       <a:r>
@@ -32156,7 +32233,7 @@
                     <a:bodyPr/>
                     <a:lstStyle/>
                     <a:p>
-                      <a:pPr algn="ctr" indent="0" marL="0">
+                      <a:pPr marL="0" indent="0" algn="ctr">
                         <a:buNone/>
                       </a:pPr>
                       <a:r>
@@ -32224,7 +32301,7 @@
                     <a:bodyPr/>
                     <a:lstStyle/>
                     <a:p>
-                      <a:pPr indent="0" marL="0">
+                      <a:pPr marL="0" indent="0">
                         <a:buNone/>
                       </a:pPr>
                       <a:r>
@@ -32292,7 +32369,7 @@
                     <a:bodyPr/>
                     <a:lstStyle/>
                     <a:p>
-                      <a:pPr algn="ctr" indent="0" marL="0">
+                      <a:pPr marL="0" indent="0" algn="ctr">
                         <a:buNone/>
                       </a:pPr>
                       <a:r>
@@ -32355,6 +32432,11 @@
                     </a:solidFill>
                   </a:tcPr>
                 </a:tc>
+                <a:extLst>
+                  <a:ext uri="{0D108BD9-81ED-4DB2-BD59-A6C34878D82A}">
+                    <a16:rowId xmlns:a16="http://schemas.microsoft.com/office/drawing/2014/main" val="10003"/>
+                  </a:ext>
+                </a:extLst>
               </a:tr>
             </a:tbl>
           </a:graphicData>
@@ -32362,13 +32444,13 @@
       </p:graphicFrame>
       <p:sp>
         <p:nvSpPr>
-          <p:cNvPr id="9" name="Shape 6"/>
-          <p:cNvSpPr/>
-          <p:nvPr/>
-        </p:nvSpPr>
-        <p:spPr>
-          <a:xfrm>
-            <a:off x="548640" y="4617720"/>
+          <p:cNvPr id="8" name="Shape 6"/>
+          <p:cNvSpPr/>
+          <p:nvPr/>
+        </p:nvSpPr>
+        <p:spPr>
+          <a:xfrm>
+            <a:off x="551689" y="4932133"/>
             <a:ext cx="5468112" cy="960120"/>
           </a:xfrm>
           <a:prstGeom prst="roundRect">
@@ -32395,7 +32477,7 @@
         </p:nvSpPr>
         <p:spPr>
           <a:xfrm>
-            <a:off x="804672" y="4837176"/>
+            <a:off x="807721" y="5151589"/>
             <a:ext cx="118872" cy="118872"/>
           </a:xfrm>
           <a:prstGeom prst="roundRect">
@@ -32422,7 +32504,7 @@
         </p:nvSpPr>
         <p:spPr>
           <a:xfrm>
-            <a:off x="1042416" y="4736592"/>
+            <a:off x="1045465" y="5051005"/>
             <a:ext cx="4791456" cy="292608"/>
           </a:xfrm>
           <a:prstGeom prst="rect">
@@ -32435,7 +32517,7 @@
           <a:bodyPr wrap="square" lIns="0" tIns="0" rIns="0" bIns="0" rtlCol="0" anchor="ctr"/>
           <a:lstStyle/>
           <a:p>
-            <a:pPr indent="0" marL="0">
+            <a:pPr marL="0" indent="0">
               <a:buNone/>
             </a:pPr>
             <a:r>
@@ -32461,7 +32543,7 @@
         </p:nvSpPr>
         <p:spPr>
           <a:xfrm>
-            <a:off x="804672" y="5029200"/>
+            <a:off x="807721" y="5343613"/>
             <a:ext cx="4983480" cy="411480"/>
           </a:xfrm>
           <a:prstGeom prst="rect">
@@ -32474,7 +32556,7 @@
           <a:bodyPr wrap="square" lIns="0" tIns="0" rIns="0" bIns="0" rtlCol="0" anchor="t"/>
           <a:lstStyle/>
           <a:p>
-            <a:pPr algn="l" indent="0" marL="0">
+            <a:pPr marL="0" indent="0" algn="l">
               <a:lnSpc>
                 <a:spcPct val="106000"/>
               </a:lnSpc>
@@ -32503,7 +32585,7 @@
         </p:nvSpPr>
         <p:spPr>
           <a:xfrm>
-            <a:off x="6172200" y="4617720"/>
+            <a:off x="6138673" y="4932133"/>
             <a:ext cx="5468112" cy="960120"/>
           </a:xfrm>
           <a:prstGeom prst="roundRect">
@@ -32530,7 +32612,7 @@
         </p:nvSpPr>
         <p:spPr>
           <a:xfrm>
-            <a:off x="6419088" y="4837176"/>
+            <a:off x="6385561" y="5151589"/>
             <a:ext cx="118872" cy="118872"/>
           </a:xfrm>
           <a:prstGeom prst="roundRect">
@@ -32557,7 +32639,7 @@
         </p:nvSpPr>
         <p:spPr>
           <a:xfrm>
-            <a:off x="6656832" y="4736592"/>
+            <a:off x="6623305" y="5051005"/>
             <a:ext cx="4791456" cy="292608"/>
           </a:xfrm>
           <a:prstGeom prst="rect">
@@ -32570,7 +32652,7 @@
           <a:bodyPr wrap="square" lIns="0" tIns="0" rIns="0" bIns="0" rtlCol="0" anchor="ctr"/>
           <a:lstStyle/>
           <a:p>
-            <a:pPr indent="0" marL="0">
+            <a:pPr marL="0" indent="0">
               <a:buNone/>
             </a:pPr>
             <a:r>
@@ -32596,7 +32678,7 @@
         </p:nvSpPr>
         <p:spPr>
           <a:xfrm>
-            <a:off x="6419088" y="5029200"/>
+            <a:off x="6385561" y="5343613"/>
             <a:ext cx="4983480" cy="411480"/>
           </a:xfrm>
           <a:prstGeom prst="rect">
@@ -32609,7 +32691,7 @@
           <a:bodyPr wrap="square" lIns="0" tIns="0" rIns="0" bIns="0" rtlCol="0" anchor="t"/>
           <a:lstStyle/>
           <a:p>
-            <a:pPr algn="l" indent="0" marL="0">
+            <a:pPr marL="0" indent="0" algn="l">
               <a:lnSpc>
                 <a:spcPct val="106000"/>
               </a:lnSpc>
@@ -32638,7 +32720,7 @@
         </p:nvSpPr>
         <p:spPr>
           <a:xfrm>
-            <a:off x="548640" y="5715000"/>
+            <a:off x="550164" y="5996354"/>
             <a:ext cx="11091672" cy="621792"/>
           </a:xfrm>
           <a:prstGeom prst="roundRect">
@@ -32665,7 +32747,7 @@
         </p:nvSpPr>
         <p:spPr>
           <a:xfrm>
-            <a:off x="822960" y="5715000"/>
+            <a:off x="824484" y="5996354"/>
             <a:ext cx="10607040" cy="621792"/>
           </a:xfrm>
           <a:prstGeom prst="rect">
@@ -32678,7 +32760,7 @@
           <a:bodyPr wrap="square" lIns="0" tIns="0" rIns="0" bIns="0" rtlCol="0" anchor="ctr"/>
           <a:lstStyle/>
           <a:p>
-            <a:pPr algn="l" indent="0" marL="0">
+            <a:pPr marL="0" indent="0" algn="l">
               <a:lnSpc>
                 <a:spcPct val="108000"/>
               </a:lnSpc>
@@ -32715,6 +32797,7 @@
         <a:solidFill>
           <a:srgbClr val="F5F7FB"/>
         </a:solidFill>
+        <a:effectLst/>
       </p:bgPr>
     </p:bg>
     <p:spTree>
@@ -32779,11 +32862,11 @@
           <a:bodyPr wrap="square" lIns="0" tIns="0" rIns="0" bIns="0" rtlCol="0" anchor="ctr"/>
           <a:lstStyle/>
           <a:p>
-            <a:pPr algn="ctr" indent="0" marL="0">
+            <a:pPr marL="0" indent="0" algn="ctr">
               <a:buNone/>
             </a:pPr>
             <a:r>
-              <a:rPr lang="en-US" sz="1150" b="1" spc="100" kern="0" dirty="0">
+              <a:rPr lang="en-US" sz="1150" b="1" kern="0" spc="100" dirty="0">
                 <a:solidFill>
                   <a:srgbClr val="FFFFFF"/>
                 </a:solidFill>
@@ -32818,7 +32901,7 @@
           <a:bodyPr wrap="square" lIns="0" tIns="0" rIns="0" bIns="0" rtlCol="0" anchor="ctr"/>
           <a:lstStyle/>
           <a:p>
-            <a:pPr indent="0" marL="0">
+            <a:pPr marL="0" indent="0">
               <a:buNone/>
             </a:pPr>
             <a:r>
@@ -32857,7 +32940,7 @@
           <a:bodyPr wrap="square" lIns="0" tIns="0" rIns="0" bIns="0" rtlCol="0" anchor="ctr"/>
           <a:lstStyle/>
           <a:p>
-            <a:pPr indent="0" marL="0">
+            <a:pPr marL="0" indent="0">
               <a:buNone/>
             </a:pPr>
             <a:r>
@@ -32896,7 +32979,7 @@
           <a:bodyPr wrap="square" lIns="0" tIns="0" rIns="0" bIns="0" rtlCol="0" anchor="ctr"/>
           <a:lstStyle/>
           <a:p>
-            <a:pPr algn="ctr" indent="0" marL="0">
+            <a:pPr marL="0" indent="0" algn="ctr">
               <a:buNone/>
             </a:pPr>
             <a:r>
@@ -32935,7 +33018,7 @@
           <a:bodyPr wrap="square" lIns="0" tIns="0" rIns="0" bIns="0" rtlCol="0" anchor="ctr"/>
           <a:lstStyle/>
           <a:p>
-            <a:pPr algn="ctr" indent="0" marL="0">
+            <a:pPr marL="0" indent="0" algn="ctr">
               <a:buNone/>
             </a:pPr>
             <a:r>
@@ -32974,7 +33057,7 @@
           <a:bodyPr wrap="square" lIns="1016" tIns="1016" rIns="1016" bIns="1016" rtlCol="0" anchor="ctr"/>
           <a:lstStyle/>
           <a:p>
-            <a:pPr algn="r" indent="0" marL="0">
+            <a:pPr marL="0" indent="0" algn="r">
               <a:buNone/>
             </a:pPr>
             <a:r>
@@ -33013,7 +33096,7 @@
           <a:bodyPr wrap="square" lIns="1016" tIns="1016" rIns="1016" bIns="1016" rtlCol="0" anchor="ctr"/>
           <a:lstStyle/>
           <a:p>
-            <a:pPr algn="r" indent="0" marL="0">
+            <a:pPr marL="0" indent="0" algn="r">
               <a:buNone/>
             </a:pPr>
             <a:r>
@@ -33077,7 +33160,7 @@
           <a:bodyPr wrap="square" lIns="0" tIns="0" rIns="0" bIns="0" rtlCol="0" anchor="ctr"/>
           <a:lstStyle/>
           <a:p>
-            <a:pPr algn="ctr" indent="0" marL="0">
+            <a:pPr marL="0" indent="0" algn="ctr">
               <a:buNone/>
             </a:pPr>
             <a:r>
@@ -33116,7 +33199,7 @@
           <a:bodyPr wrap="square" lIns="0" tIns="0" rIns="0" bIns="0" rtlCol="0" anchor="ctr"/>
           <a:lstStyle/>
           <a:p>
-            <a:pPr algn="ctr" indent="0" marL="0">
+            <a:pPr marL="0" indent="0" algn="ctr">
               <a:buNone/>
             </a:pPr>
             <a:r>
@@ -33180,7 +33263,7 @@
           <a:bodyPr wrap="square" lIns="0" tIns="0" rIns="0" bIns="0" rtlCol="0" anchor="ctr"/>
           <a:lstStyle/>
           <a:p>
-            <a:pPr algn="ctr" indent="0" marL="0">
+            <a:pPr marL="0" indent="0" algn="ctr">
               <a:buNone/>
             </a:pPr>
             <a:r>
@@ -33219,7 +33302,7 @@
           <a:bodyPr wrap="square" lIns="0" tIns="0" rIns="0" bIns="0" rtlCol="0" anchor="ctr"/>
           <a:lstStyle/>
           <a:p>
-            <a:pPr algn="ctr" indent="0" marL="0">
+            <a:pPr marL="0" indent="0" algn="ctr">
               <a:buNone/>
             </a:pPr>
             <a:r>
@@ -33283,7 +33366,7 @@
           <a:bodyPr wrap="square" lIns="0" tIns="0" rIns="0" bIns="0" rtlCol="0" anchor="ctr"/>
           <a:lstStyle/>
           <a:p>
-            <a:pPr algn="ctr" indent="0" marL="0">
+            <a:pPr marL="0" indent="0" algn="ctr">
               <a:buNone/>
             </a:pPr>
             <a:r>
@@ -33322,7 +33405,7 @@
           <a:bodyPr wrap="square" lIns="0" tIns="0" rIns="0" bIns="0" rtlCol="0" anchor="ctr"/>
           <a:lstStyle/>
           <a:p>
-            <a:pPr algn="ctr" indent="0" marL="0">
+            <a:pPr marL="0" indent="0" algn="ctr">
               <a:buNone/>
             </a:pPr>
             <a:r>
@@ -33386,7 +33469,7 @@
           <a:bodyPr wrap="square" lIns="0" tIns="0" rIns="0" bIns="0" rtlCol="0" anchor="ctr"/>
           <a:lstStyle/>
           <a:p>
-            <a:pPr algn="ctr" indent="0" marL="0">
+            <a:pPr marL="0" indent="0" algn="ctr">
               <a:buNone/>
             </a:pPr>
             <a:r>
@@ -33425,7 +33508,7 @@
           <a:bodyPr wrap="square" lIns="0" tIns="0" rIns="0" bIns="0" rtlCol="0" anchor="ctr"/>
           <a:lstStyle/>
           <a:p>
-            <a:pPr algn="ctr" indent="0" marL="0">
+            <a:pPr marL="0" indent="0" algn="ctr">
               <a:buNone/>
             </a:pPr>
             <a:r>
@@ -33491,7 +33574,7 @@
           <a:bodyPr wrap="square" lIns="0" tIns="0" rIns="0" bIns="0" rtlCol="0" anchor="ctr"/>
           <a:lstStyle/>
           <a:p>
-            <a:pPr indent="0" marL="0">
+            <a:pPr marL="0" indent="0">
               <a:buNone/>
             </a:pPr>
             <a:r>
@@ -33530,7 +33613,7 @@
           <a:bodyPr wrap="square" lIns="0" tIns="0" rIns="0" bIns="0" rtlCol="0" anchor="ctr"/>
           <a:lstStyle/>
           <a:p>
-            <a:pPr indent="0" marL="0">
+            <a:pPr marL="0" indent="0">
               <a:buNone/>
             </a:pPr>
             <a:r>
@@ -33569,7 +33652,7 @@
           <a:bodyPr wrap="square" lIns="0" tIns="0" rIns="0" bIns="0" rtlCol="0" anchor="ctr"/>
           <a:lstStyle/>
           <a:p>
-            <a:pPr algn="l" indent="0" marL="0">
+            <a:pPr marL="0" indent="0" algn="l">
               <a:lnSpc>
                 <a:spcPct val="108000"/>
               </a:lnSpc>
@@ -33638,7 +33721,7 @@
           <a:bodyPr wrap="square" lIns="0" tIns="0" rIns="0" bIns="0" rtlCol="0" anchor="ctr"/>
           <a:lstStyle/>
           <a:p>
-            <a:pPr indent="0" marL="0">
+            <a:pPr marL="0" indent="0">
               <a:buNone/>
             </a:pPr>
             <a:r>
@@ -33677,7 +33760,7 @@
           <a:bodyPr wrap="square" lIns="0" tIns="0" rIns="0" bIns="0" rtlCol="0" anchor="ctr"/>
           <a:lstStyle/>
           <a:p>
-            <a:pPr indent="0" marL="0">
+            <a:pPr marL="0" indent="0">
               <a:buNone/>
             </a:pPr>
             <a:r>
@@ -33716,7 +33799,7 @@
           <a:bodyPr wrap="square" lIns="0" tIns="0" rIns="0" bIns="0" rtlCol="0" anchor="ctr"/>
           <a:lstStyle/>
           <a:p>
-            <a:pPr algn="l" indent="0" marL="0">
+            <a:pPr marL="0" indent="0" algn="l">
               <a:lnSpc>
                 <a:spcPct val="108000"/>
               </a:lnSpc>
@@ -33785,7 +33868,7 @@
           <a:bodyPr wrap="square" lIns="0" tIns="0" rIns="0" bIns="0" rtlCol="0" anchor="ctr"/>
           <a:lstStyle/>
           <a:p>
-            <a:pPr indent="0" marL="0">
+            <a:pPr marL="0" indent="0">
               <a:buNone/>
             </a:pPr>
             <a:r>
@@ -33824,7 +33907,7 @@
           <a:bodyPr wrap="square" lIns="0" tIns="0" rIns="0" bIns="0" rtlCol="0" anchor="ctr"/>
           <a:lstStyle/>
           <a:p>
-            <a:pPr indent="0" marL="0">
+            <a:pPr marL="0" indent="0">
               <a:buNone/>
             </a:pPr>
             <a:r>
@@ -33863,7 +33946,7 @@
           <a:bodyPr wrap="square" lIns="0" tIns="0" rIns="0" bIns="0" rtlCol="0" anchor="ctr"/>
           <a:lstStyle/>
           <a:p>
-            <a:pPr algn="l" indent="0" marL="0">
+            <a:pPr marL="0" indent="0" algn="l">
               <a:lnSpc>
                 <a:spcPct val="108000"/>
               </a:lnSpc>
@@ -33959,7 +34042,7 @@
           <a:bodyPr wrap="square" lIns="0" tIns="0" rIns="0" bIns="0" rtlCol="0" anchor="ctr"/>
           <a:lstStyle/>
           <a:p>
-            <a:pPr indent="0" marL="0">
+            <a:pPr marL="0" indent="0">
               <a:buNone/>
             </a:pPr>
             <a:r>
@@ -33998,7 +34081,7 @@
           <a:bodyPr wrap="square" lIns="0" tIns="0" rIns="0" bIns="0" rtlCol="0" anchor="t"/>
           <a:lstStyle/>
           <a:p>
-            <a:pPr algn="l" indent="0" marL="0">
+            <a:pPr marL="0" indent="0" algn="l">
               <a:lnSpc>
                 <a:spcPct val="106000"/>
               </a:lnSpc>
@@ -34094,7 +34177,7 @@
           <a:bodyPr wrap="square" lIns="0" tIns="0" rIns="0" bIns="0" rtlCol="0" anchor="ctr"/>
           <a:lstStyle/>
           <a:p>
-            <a:pPr indent="0" marL="0">
+            <a:pPr marL="0" indent="0">
               <a:buNone/>
             </a:pPr>
             <a:r>
@@ -34133,7 +34216,7 @@
           <a:bodyPr wrap="square" lIns="0" tIns="0" rIns="0" bIns="0" rtlCol="0" anchor="t"/>
           <a:lstStyle/>
           <a:p>
-            <a:pPr algn="l" indent="0" marL="0">
+            <a:pPr marL="0" indent="0" algn="l">
               <a:lnSpc>
                 <a:spcPct val="104000"/>
               </a:lnSpc>
@@ -34154,6 +34237,36 @@
           </a:p>
         </p:txBody>
       </p:sp>
+      <p:pic>
+        <p:nvPicPr>
+          <p:cNvPr id="42" name="Picture 41" descr="Confusion matrix with the formulas of precision, recall, accuracy and f1-score">
+            <a:extLst>
+              <a:ext uri="{FF2B5EF4-FFF2-40B4-BE49-F238E27FC236}">
+                <a16:creationId xmlns:a16="http://schemas.microsoft.com/office/drawing/2014/main" id="{17335434-E5D1-61CA-E1CF-25F2145F8969}"/>
+              </a:ext>
+            </a:extLst>
+          </p:cNvPr>
+          <p:cNvPicPr>
+            <a:picLocks noChangeAspect="1"/>
+          </p:cNvPicPr>
+          <p:nvPr/>
+        </p:nvPicPr>
+        <p:blipFill>
+          <a:blip r:embed="rId3"/>
+          <a:stretch>
+            <a:fillRect/>
+          </a:stretch>
+        </p:blipFill>
+        <p:spPr>
+          <a:xfrm>
+            <a:off x="7919154" y="2406762"/>
+            <a:ext cx="3693726" cy="1422684"/>
+          </a:xfrm>
+          <a:prstGeom prst="rect">
+            <a:avLst/>
+          </a:prstGeom>
+        </p:spPr>
+      </p:pic>
     </p:spTree>
   </p:cSld>
   <p:clrMapOvr>
@@ -34455,4 +34568,319 @@
     </a:ext>
   </a:extLst>
 </a:theme>
+</file>
+
+<file path=ppt/theme/theme2.xml><?xml version="1.0" encoding="utf-8"?>
+<a:theme xmlns:a="http://schemas.openxmlformats.org/drawingml/2006/main" name="Office Theme">
+  <a:themeElements>
+    <a:clrScheme name="Office">
+      <a:dk1>
+        <a:sysClr val="windowText" lastClr="000000"/>
+      </a:dk1>
+      <a:lt1>
+        <a:sysClr val="window" lastClr="FFFFFF"/>
+      </a:lt1>
+      <a:dk2>
+        <a:srgbClr val="0E2841"/>
+      </a:dk2>
+      <a:lt2>
+        <a:srgbClr val="E8E8E8"/>
+      </a:lt2>
+      <a:accent1>
+        <a:srgbClr val="156082"/>
+      </a:accent1>
+      <a:accent2>
+        <a:srgbClr val="E97132"/>
+      </a:accent2>
+      <a:accent3>
+        <a:srgbClr val="196B24"/>
+      </a:accent3>
+      <a:accent4>
+        <a:srgbClr val="0F9ED5"/>
+      </a:accent4>
+      <a:accent5>
+        <a:srgbClr val="A02B93"/>
+      </a:accent5>
+      <a:accent6>
+        <a:srgbClr val="4EA72E"/>
+      </a:accent6>
+      <a:hlink>
+        <a:srgbClr val="467886"/>
+      </a:hlink>
+      <a:folHlink>
+        <a:srgbClr val="96607D"/>
+      </a:folHlink>
+    </a:clrScheme>
+    <a:fontScheme name="Office">
+      <a:majorFont>
+        <a:latin typeface="Aptos Display" panose="02110004020202020204"/>
+        <a:ea typeface=""/>
+        <a:cs typeface=""/>
+        <a:font script="Jpan" typeface="游ゴシック Light"/>
+        <a:font script="Hang" typeface="맑은 고딕"/>
+        <a:font script="Hans" typeface="等线 Light"/>
+        <a:font script="Hant" typeface="新細明體"/>
+        <a:font script="Arab" typeface="Times New Roman"/>
+        <a:font script="Hebr" typeface="Times New Roman"/>
+        <a:font script="Thai" typeface="Angsana New"/>
+        <a:font script="Ethi" typeface="Nyala"/>
+        <a:font script="Beng" typeface="Vrinda"/>
+        <a:font script="Gujr" typeface="Shruti"/>
+        <a:font script="Khmr" typeface="MoolBoran"/>
+        <a:font script="Knda" typeface="Tunga"/>
+        <a:font script="Guru" typeface="Raavi"/>
+        <a:font script="Cans" typeface="Euphemia"/>
+        <a:font script="Cher" typeface="Plantagenet Cherokee"/>
+        <a:font script="Yiii" typeface="Microsoft Yi Baiti"/>
+        <a:font script="Tibt" typeface="Microsoft Himalaya"/>
+        <a:font script="Thaa" typeface="MV Boli"/>
+        <a:font script="Deva" typeface="Mangal"/>
+        <a:font script="Telu" typeface="Gautami"/>
+        <a:font script="Taml" typeface="Latha"/>
+        <a:font script="Syrc" typeface="Estrangelo Edessa"/>
+        <a:font script="Orya" typeface="Kalinga"/>
+        <a:font script="Mlym" typeface="Kartika"/>
+        <a:font script="Laoo" typeface="DokChampa"/>
+        <a:font script="Sinh" typeface="Iskoola Pota"/>
+        <a:font script="Mong" typeface="Mongolian Baiti"/>
+        <a:font script="Viet" typeface="Times New Roman"/>
+        <a:font script="Uigh" typeface="Microsoft Uighur"/>
+        <a:font script="Geor" typeface="Sylfaen"/>
+        <a:font script="Armn" typeface="Arial"/>
+        <a:font script="Bugi" typeface="Leelawadee UI"/>
+        <a:font script="Bopo" typeface="Microsoft JhengHei"/>
+        <a:font script="Java" typeface="Javanese Text"/>
+        <a:font script="Lisu" typeface="Segoe UI"/>
+        <a:font script="Mymr" typeface="Myanmar Text"/>
+        <a:font script="Nkoo" typeface="Ebrima"/>
+        <a:font script="Olck" typeface="Nirmala UI"/>
+        <a:font script="Osma" typeface="Ebrima"/>
+        <a:font script="Phag" typeface="Phagspa"/>
+        <a:font script="Syrn" typeface="Estrangelo Edessa"/>
+        <a:font script="Syrj" typeface="Estrangelo Edessa"/>
+        <a:font script="Syre" typeface="Estrangelo Edessa"/>
+        <a:font script="Sora" typeface="Nirmala UI"/>
+        <a:font script="Tale" typeface="Microsoft Tai Le"/>
+        <a:font script="Talu" typeface="Microsoft New Tai Lue"/>
+        <a:font script="Tfng" typeface="Ebrima"/>
+      </a:majorFont>
+      <a:minorFont>
+        <a:latin typeface="Aptos" panose="02110004020202020204"/>
+        <a:ea typeface=""/>
+        <a:cs typeface=""/>
+        <a:font script="Jpan" typeface="游ゴシック"/>
+        <a:font script="Hang" typeface="맑은 고딕"/>
+        <a:font script="Hans" typeface="等线"/>
+        <a:font script="Hant" typeface="新細明體"/>
+        <a:font script="Arab" typeface="Arial"/>
+        <a:font script="Hebr" typeface="Arial"/>
+        <a:font script="Thai" typeface="Cordia New"/>
+        <a:font script="Ethi" typeface="Nyala"/>
+        <a:font script="Beng" typeface="Vrinda"/>
+        <a:font script="Gujr" typeface="Shruti"/>
+        <a:font script="Khmr" typeface="DaunPenh"/>
+        <a:font script="Knda" typeface="Tunga"/>
+        <a:font script="Guru" typeface="Raavi"/>
+        <a:font script="Cans" typeface="Euphemia"/>
+        <a:font script="Cher" typeface="Plantagenet Cherokee"/>
+        <a:font script="Yiii" typeface="Microsoft Yi Baiti"/>
+        <a:font script="Tibt" typeface="Microsoft Himalaya"/>
+        <a:font script="Thaa" typeface="MV Boli"/>
+        <a:font script="Deva" typeface="Mangal"/>
+        <a:font script="Telu" typeface="Gautami"/>
+        <a:font script="Taml" typeface="Latha"/>
+        <a:font script="Syrc" typeface="Estrangelo Edessa"/>
+        <a:font script="Orya" typeface="Kalinga"/>
+        <a:font script="Mlym" typeface="Kartika"/>
+        <a:font script="Laoo" typeface="DokChampa"/>
+        <a:font script="Sinh" typeface="Iskoola Pota"/>
+        <a:font script="Mong" typeface="Mongolian Baiti"/>
+        <a:font script="Viet" typeface="Arial"/>
+        <a:font script="Uigh" typeface="Microsoft Uighur"/>
+        <a:font script="Geor" typeface="Sylfaen"/>
+        <a:font script="Armn" typeface="Arial"/>
+        <a:font script="Bugi" typeface="Leelawadee UI"/>
+        <a:font script="Bopo" typeface="Microsoft JhengHei"/>
+        <a:font script="Java" typeface="Javanese Text"/>
+        <a:font script="Lisu" typeface="Segoe UI"/>
+        <a:font script="Mymr" typeface="Myanmar Text"/>
+        <a:font script="Nkoo" typeface="Ebrima"/>
+        <a:font script="Olck" typeface="Nirmala UI"/>
+        <a:font script="Osma" typeface="Ebrima"/>
+        <a:font script="Phag" typeface="Phagspa"/>
+        <a:font script="Syrn" typeface="Estrangelo Edessa"/>
+        <a:font script="Syrj" typeface="Estrangelo Edessa"/>
+        <a:font script="Syre" typeface="Estrangelo Edessa"/>
+        <a:font script="Sora" typeface="Nirmala UI"/>
+        <a:font script="Tale" typeface="Microsoft Tai Le"/>
+        <a:font script="Talu" typeface="Microsoft New Tai Lue"/>
+        <a:font script="Tfng" typeface="Ebrima"/>
+      </a:minorFont>
+    </a:fontScheme>
+    <a:fmtScheme name="Office">
+      <a:fillStyleLst>
+        <a:solidFill>
+          <a:schemeClr val="phClr"/>
+        </a:solidFill>
+        <a:gradFill rotWithShape="1">
+          <a:gsLst>
+            <a:gs pos="0">
+              <a:schemeClr val="phClr">
+                <a:lumMod val="110000"/>
+                <a:satMod val="105000"/>
+                <a:tint val="67000"/>
+              </a:schemeClr>
+            </a:gs>
+            <a:gs pos="50000">
+              <a:schemeClr val="phClr">
+                <a:lumMod val="105000"/>
+                <a:satMod val="103000"/>
+                <a:tint val="73000"/>
+              </a:schemeClr>
+            </a:gs>
+            <a:gs pos="100000">
+              <a:schemeClr val="phClr">
+                <a:lumMod val="105000"/>
+                <a:satMod val="109000"/>
+                <a:tint val="81000"/>
+              </a:schemeClr>
+            </a:gs>
+          </a:gsLst>
+          <a:lin ang="5400000" scaled="0"/>
+        </a:gradFill>
+        <a:gradFill rotWithShape="1">
+          <a:gsLst>
+            <a:gs pos="0">
+              <a:schemeClr val="phClr">
+                <a:satMod val="103000"/>
+                <a:lumMod val="102000"/>
+                <a:tint val="94000"/>
+              </a:schemeClr>
+            </a:gs>
+            <a:gs pos="50000">
+              <a:schemeClr val="phClr">
+                <a:satMod val="110000"/>
+                <a:lumMod val="100000"/>
+                <a:shade val="100000"/>
+              </a:schemeClr>
+            </a:gs>
+            <a:gs pos="100000">
+              <a:schemeClr val="phClr">
+                <a:lumMod val="99000"/>
+                <a:satMod val="120000"/>
+                <a:shade val="78000"/>
+              </a:schemeClr>
+            </a:gs>
+          </a:gsLst>
+          <a:lin ang="5400000" scaled="0"/>
+        </a:gradFill>
+      </a:fillStyleLst>
+      <a:lnStyleLst>
+        <a:ln w="12700" cap="flat" cmpd="sng" algn="ctr">
+          <a:solidFill>
+            <a:schemeClr val="phClr"/>
+          </a:solidFill>
+          <a:prstDash val="solid"/>
+          <a:miter lim="800000"/>
+        </a:ln>
+        <a:ln w="19050" cap="flat" cmpd="sng" algn="ctr">
+          <a:solidFill>
+            <a:schemeClr val="phClr"/>
+          </a:solidFill>
+          <a:prstDash val="solid"/>
+          <a:miter lim="800000"/>
+        </a:ln>
+        <a:ln w="25400" cap="flat" cmpd="sng" algn="ctr">
+          <a:solidFill>
+            <a:schemeClr val="phClr"/>
+          </a:solidFill>
+          <a:prstDash val="solid"/>
+          <a:miter lim="800000"/>
+        </a:ln>
+      </a:lnStyleLst>
+      <a:effectStyleLst>
+        <a:effectStyle>
+          <a:effectLst/>
+        </a:effectStyle>
+        <a:effectStyle>
+          <a:effectLst/>
+        </a:effectStyle>
+        <a:effectStyle>
+          <a:effectLst>
+            <a:outerShdw blurRad="57150" dist="19050" dir="5400000" algn="ctr" rotWithShape="0">
+              <a:srgbClr val="000000">
+                <a:alpha val="63000"/>
+              </a:srgbClr>
+            </a:outerShdw>
+          </a:effectLst>
+        </a:effectStyle>
+      </a:effectStyleLst>
+      <a:bgFillStyleLst>
+        <a:solidFill>
+          <a:schemeClr val="phClr"/>
+        </a:solidFill>
+        <a:solidFill>
+          <a:schemeClr val="phClr">
+            <a:tint val="95000"/>
+            <a:satMod val="170000"/>
+          </a:schemeClr>
+        </a:solidFill>
+        <a:gradFill rotWithShape="1">
+          <a:gsLst>
+            <a:gs pos="0">
+              <a:schemeClr val="phClr">
+                <a:tint val="93000"/>
+                <a:satMod val="150000"/>
+                <a:shade val="98000"/>
+                <a:lumMod val="102000"/>
+              </a:schemeClr>
+            </a:gs>
+            <a:gs pos="50000">
+              <a:schemeClr val="phClr">
+                <a:tint val="98000"/>
+                <a:satMod val="130000"/>
+                <a:shade val="90000"/>
+                <a:lumMod val="103000"/>
+              </a:schemeClr>
+            </a:gs>
+            <a:gs pos="100000">
+              <a:schemeClr val="phClr">
+                <a:shade val="63000"/>
+                <a:satMod val="120000"/>
+              </a:schemeClr>
+            </a:gs>
+          </a:gsLst>
+          <a:lin ang="5400000" scaled="0"/>
+        </a:gradFill>
+      </a:bgFillStyleLst>
+    </a:fmtScheme>
+  </a:themeElements>
+  <a:objectDefaults>
+    <a:lnDef>
+      <a:spPr/>
+      <a:bodyPr/>
+      <a:lstStyle/>
+      <a:style>
+        <a:lnRef idx="2">
+          <a:schemeClr val="accent1"/>
+        </a:lnRef>
+        <a:fillRef idx="0">
+          <a:schemeClr val="accent1"/>
+        </a:fillRef>
+        <a:effectRef idx="1">
+          <a:schemeClr val="accent1"/>
+        </a:effectRef>
+        <a:fontRef idx="minor">
+          <a:schemeClr val="tx1"/>
+        </a:fontRef>
+      </a:style>
+    </a:lnDef>
+  </a:objectDefaults>
+  <a:extraClrSchemeLst/>
+  <a:extLst>
+    <a:ext uri="{05A4C25C-085E-4340-85A3-A5531E510DB2}">
+      <thm15:themeFamily xmlns:thm15="http://schemas.microsoft.com/office/thememl/2012/main" name="Office Theme" id="{2E142A2C-CD16-42D6-873A-C26D2A0506FA}" vid="{1BDDFF52-6CD6-40A5-AB3C-68EB2F1E4D0A}"/>
+    </a:ext>
+  </a:extLst>
+</a:theme>
 </file>